--- a/CACF/_документы/Презентация о Фонде – деятельность и возможности развития.pptx
+++ b/CACF/_документы/Презентация о Фонде – деятельность и возможности развития.pptx
@@ -5,29 +5,29 @@
     <p:sldMasterId id="2147483648" r:id="rId1"/>
   </p:sldMasterIdLst>
   <p:notesMasterIdLst>
-    <p:notesMasterId r:id="rId22"/>
+    <p:notesMasterId r:id="rId23"/>
   </p:notesMasterIdLst>
   <p:sldIdLst>
-    <p:sldId id="265" r:id="rId2"/>
-    <p:sldId id="267" r:id="rId3"/>
-    <p:sldId id="308" r:id="rId4"/>
-    <p:sldId id="257" r:id="rId5"/>
-    <p:sldId id="289" r:id="rId6"/>
-    <p:sldId id="269" r:id="rId7"/>
-    <p:sldId id="299" r:id="rId8"/>
-    <p:sldId id="288" r:id="rId9"/>
-    <p:sldId id="298" r:id="rId10"/>
-    <p:sldId id="309" r:id="rId11"/>
-    <p:sldId id="300" r:id="rId12"/>
-    <p:sldId id="282" r:id="rId13"/>
-    <p:sldId id="310" r:id="rId14"/>
-    <p:sldId id="311" r:id="rId15"/>
-    <p:sldId id="312" r:id="rId16"/>
-    <p:sldId id="290" r:id="rId17"/>
-    <p:sldId id="258" r:id="rId18"/>
-    <p:sldId id="285" r:id="rId19"/>
-    <p:sldId id="296" r:id="rId20"/>
-    <p:sldId id="266" r:id="rId21"/>
+    <p:sldId id="265" r:id="rId3"/>
+    <p:sldId id="267" r:id="rId4"/>
+    <p:sldId id="308" r:id="rId5"/>
+    <p:sldId id="257" r:id="rId6"/>
+    <p:sldId id="289" r:id="rId7"/>
+    <p:sldId id="269" r:id="rId8"/>
+    <p:sldId id="299" r:id="rId9"/>
+    <p:sldId id="288" r:id="rId10"/>
+    <p:sldId id="298" r:id="rId11"/>
+    <p:sldId id="309" r:id="rId12"/>
+    <p:sldId id="300" r:id="rId13"/>
+    <p:sldId id="282" r:id="rId14"/>
+    <p:sldId id="310" r:id="rId15"/>
+    <p:sldId id="311" r:id="rId16"/>
+    <p:sldId id="312" r:id="rId17"/>
+    <p:sldId id="290" r:id="rId18"/>
+    <p:sldId id="258" r:id="rId19"/>
+    <p:sldId id="285" r:id="rId20"/>
+    <p:sldId id="296" r:id="rId21"/>
+    <p:sldId id="266" r:id="rId22"/>
   </p:sldIdLst>
   <p:sldSz cx="12192000" cy="6858000"/>
   <p:notesSz cx="6858000" cy="9144000"/>
@@ -126,11 +126,6 @@
       </a:defRPr>
     </a:lvl9pPr>
   </p:defaultTextStyle>
-  <p:extLst>
-    <p:ext uri="{EFAFB233-063F-42B5-8137-9DF3F51BA10A}">
-      <p15:sldGuideLst xmlns:p15="http://schemas.microsoft.com/office/powerpoint/2012/main"/>
-    </p:ext>
-  </p:extLst>
 </p:presentation>
 </file>
 
@@ -216,7 +211,6 @@
           <a:p>
             <a:fld id="{13A0E622-3E01-144F-9ECD-D0AAB6AC4D3F}" type="datetimeFigureOut">
               <a:rPr lang="en-US" smtClean="0"/>
-              <a:t>10/29/2026</a:t>
             </a:fld>
             <a:endParaRPr lang="en-US"/>
           </a:p>
@@ -283,6 +277,7 @@
               <a:rPr lang="ru-RU"/>
               <a:t>Образец текста</a:t>
             </a:r>
+            <a:endParaRPr lang="ru-RU"/>
           </a:p>
           <a:p>
             <a:pPr lvl="1"/>
@@ -290,6 +285,7 @@
               <a:rPr lang="ru-RU"/>
               <a:t>Второй уровень</a:t>
             </a:r>
+            <a:endParaRPr lang="ru-RU"/>
           </a:p>
           <a:p>
             <a:pPr lvl="2"/>
@@ -297,6 +293,7 @@
               <a:rPr lang="ru-RU"/>
               <a:t>Третий уровень</a:t>
             </a:r>
+            <a:endParaRPr lang="ru-RU"/>
           </a:p>
           <a:p>
             <a:pPr lvl="3"/>
@@ -304,6 +301,7 @@
               <a:rPr lang="ru-RU"/>
               <a:t>Четвертый уровень</a:t>
             </a:r>
+            <a:endParaRPr lang="ru-RU"/>
           </a:p>
           <a:p>
             <a:pPr lvl="4"/>
@@ -375,18 +373,12 @@
           <a:p>
             <a:fld id="{1A02B0C5-90C3-9C4B-8C2C-6021F84E4664}" type="slidenum">
               <a:rPr lang="en-US" smtClean="0"/>
-              <a:t>‹#›</a:t>
             </a:fld>
             <a:endParaRPr lang="en-US"/>
           </a:p>
         </p:txBody>
       </p:sp>
     </p:spTree>
-    <p:extLst>
-      <p:ext uri="{BB962C8B-B14F-4D97-AF65-F5344CB8AC3E}">
-        <p14:creationId xmlns:p14="http://schemas.microsoft.com/office/powerpoint/2010/main" val="3306369880"/>
-      </p:ext>
-    </p:extLst>
   </p:cSld>
   <p:clrMap bg1="lt1" tx1="dk1" bg2="lt2" tx2="dk2" accent1="accent1" accent2="accent2" accent3="accent3" accent4="accent4" accent5="accent5" accent6="accent6" hlink="hlink" folHlink="folHlink"/>
   <p:notesStyle>
@@ -615,7 +607,6 @@
           <a:p>
             <a:fld id="{D3FC49F1-F1CE-1340-8047-D9DA1EB28984}" type="datetimeFigureOut">
               <a:rPr lang="en-US" smtClean="0"/>
-              <a:t>10/29/2026</a:t>
             </a:fld>
             <a:endParaRPr lang="en-US"/>
           </a:p>
@@ -657,7 +648,6 @@
           <a:p>
             <a:fld id="{C5F217DE-4206-CA42-AFC6-D6533D4BF104}" type="slidenum">
               <a:rPr lang="en-US" smtClean="0"/>
-              <a:t>‹#›</a:t>
             </a:fld>
             <a:endParaRPr lang="en-US"/>
           </a:p>
@@ -731,6 +721,7 @@
               <a:rPr lang="ru-RU"/>
               <a:t>Образец текста</a:t>
             </a:r>
+            <a:endParaRPr lang="ru-RU"/>
           </a:p>
           <a:p>
             <a:pPr lvl="1"/>
@@ -738,6 +729,7 @@
               <a:rPr lang="ru-RU"/>
               <a:t>Второй уровень</a:t>
             </a:r>
+            <a:endParaRPr lang="ru-RU"/>
           </a:p>
           <a:p>
             <a:pPr lvl="2"/>
@@ -745,6 +737,7 @@
               <a:rPr lang="ru-RU"/>
               <a:t>Третий уровень</a:t>
             </a:r>
+            <a:endParaRPr lang="ru-RU"/>
           </a:p>
           <a:p>
             <a:pPr lvl="3"/>
@@ -752,6 +745,7 @@
               <a:rPr lang="ru-RU"/>
               <a:t>Четвертый уровень</a:t>
             </a:r>
+            <a:endParaRPr lang="ru-RU"/>
           </a:p>
           <a:p>
             <a:pPr lvl="4"/>
@@ -780,7 +774,6 @@
           <a:p>
             <a:fld id="{D3FC49F1-F1CE-1340-8047-D9DA1EB28984}" type="datetimeFigureOut">
               <a:rPr lang="en-US" smtClean="0"/>
-              <a:t>10/29/2026</a:t>
             </a:fld>
             <a:endParaRPr lang="en-US"/>
           </a:p>
@@ -822,7 +815,6 @@
           <a:p>
             <a:fld id="{C5F217DE-4206-CA42-AFC6-D6533D4BF104}" type="slidenum">
               <a:rPr lang="en-US" smtClean="0"/>
-              <a:t>‹#›</a:t>
             </a:fld>
             <a:endParaRPr lang="en-US"/>
           </a:p>
@@ -906,6 +898,7 @@
               <a:rPr lang="ru-RU"/>
               <a:t>Образец текста</a:t>
             </a:r>
+            <a:endParaRPr lang="ru-RU"/>
           </a:p>
           <a:p>
             <a:pPr lvl="1"/>
@@ -913,6 +906,7 @@
               <a:rPr lang="ru-RU"/>
               <a:t>Второй уровень</a:t>
             </a:r>
+            <a:endParaRPr lang="ru-RU"/>
           </a:p>
           <a:p>
             <a:pPr lvl="2"/>
@@ -920,6 +914,7 @@
               <a:rPr lang="ru-RU"/>
               <a:t>Третий уровень</a:t>
             </a:r>
+            <a:endParaRPr lang="ru-RU"/>
           </a:p>
           <a:p>
             <a:pPr lvl="3"/>
@@ -927,6 +922,7 @@
               <a:rPr lang="ru-RU"/>
               <a:t>Четвертый уровень</a:t>
             </a:r>
+            <a:endParaRPr lang="ru-RU"/>
           </a:p>
           <a:p>
             <a:pPr lvl="4"/>
@@ -955,7 +951,6 @@
           <a:p>
             <a:fld id="{D3FC49F1-F1CE-1340-8047-D9DA1EB28984}" type="datetimeFigureOut">
               <a:rPr lang="en-US" smtClean="0"/>
-              <a:t>10/29/2026</a:t>
             </a:fld>
             <a:endParaRPr lang="en-US"/>
           </a:p>
@@ -997,7 +992,6 @@
           <a:p>
             <a:fld id="{C5F217DE-4206-CA42-AFC6-D6533D4BF104}" type="slidenum">
               <a:rPr lang="en-US" smtClean="0"/>
-              <a:t>‹#›</a:t>
             </a:fld>
             <a:endParaRPr lang="en-US"/>
           </a:p>
@@ -1071,6 +1065,7 @@
               <a:rPr lang="ru-RU"/>
               <a:t>Образец текста</a:t>
             </a:r>
+            <a:endParaRPr lang="ru-RU"/>
           </a:p>
           <a:p>
             <a:pPr lvl="1"/>
@@ -1078,6 +1073,7 @@
               <a:rPr lang="ru-RU"/>
               <a:t>Второй уровень</a:t>
             </a:r>
+            <a:endParaRPr lang="ru-RU"/>
           </a:p>
           <a:p>
             <a:pPr lvl="2"/>
@@ -1085,6 +1081,7 @@
               <a:rPr lang="ru-RU"/>
               <a:t>Третий уровень</a:t>
             </a:r>
+            <a:endParaRPr lang="ru-RU"/>
           </a:p>
           <a:p>
             <a:pPr lvl="3"/>
@@ -1092,6 +1089,7 @@
               <a:rPr lang="ru-RU"/>
               <a:t>Четвертый уровень</a:t>
             </a:r>
+            <a:endParaRPr lang="ru-RU"/>
           </a:p>
           <a:p>
             <a:pPr lvl="4"/>
@@ -1120,7 +1118,6 @@
           <a:p>
             <a:fld id="{D3FC49F1-F1CE-1340-8047-D9DA1EB28984}" type="datetimeFigureOut">
               <a:rPr lang="en-US" smtClean="0"/>
-              <a:t>10/29/2026</a:t>
             </a:fld>
             <a:endParaRPr lang="en-US"/>
           </a:p>
@@ -1162,7 +1159,6 @@
           <a:p>
             <a:fld id="{C5F217DE-4206-CA42-AFC6-D6533D4BF104}" type="slidenum">
               <a:rPr lang="en-US" smtClean="0"/>
-              <a:t>‹#›</a:t>
             </a:fld>
             <a:endParaRPr lang="en-US"/>
           </a:p>
@@ -1341,6 +1337,7 @@
               <a:rPr lang="ru-RU"/>
               <a:t>Образец текста</a:t>
             </a:r>
+            <a:endParaRPr lang="ru-RU"/>
           </a:p>
         </p:txBody>
       </p:sp>
@@ -1361,7 +1358,6 @@
           <a:p>
             <a:fld id="{D3FC49F1-F1CE-1340-8047-D9DA1EB28984}" type="datetimeFigureOut">
               <a:rPr lang="en-US" smtClean="0"/>
-              <a:t>10/29/2026</a:t>
             </a:fld>
             <a:endParaRPr lang="en-US"/>
           </a:p>
@@ -1403,7 +1399,6 @@
           <a:p>
             <a:fld id="{C5F217DE-4206-CA42-AFC6-D6533D4BF104}" type="slidenum">
               <a:rPr lang="en-US" smtClean="0"/>
-              <a:t>‹#›</a:t>
             </a:fld>
             <a:endParaRPr lang="en-US"/>
           </a:p>
@@ -1482,6 +1477,7 @@
               <a:rPr lang="ru-RU"/>
               <a:t>Образец текста</a:t>
             </a:r>
+            <a:endParaRPr lang="ru-RU"/>
           </a:p>
           <a:p>
             <a:pPr lvl="1"/>
@@ -1489,6 +1485,7 @@
               <a:rPr lang="ru-RU"/>
               <a:t>Второй уровень</a:t>
             </a:r>
+            <a:endParaRPr lang="ru-RU"/>
           </a:p>
           <a:p>
             <a:pPr lvl="2"/>
@@ -1496,6 +1493,7 @@
               <a:rPr lang="ru-RU"/>
               <a:t>Третий уровень</a:t>
             </a:r>
+            <a:endParaRPr lang="ru-RU"/>
           </a:p>
           <a:p>
             <a:pPr lvl="3"/>
@@ -1503,6 +1501,7 @@
               <a:rPr lang="ru-RU"/>
               <a:t>Четвертый уровень</a:t>
             </a:r>
+            <a:endParaRPr lang="ru-RU"/>
           </a:p>
           <a:p>
             <a:pPr lvl="4"/>
@@ -1539,6 +1538,7 @@
               <a:rPr lang="ru-RU"/>
               <a:t>Образец текста</a:t>
             </a:r>
+            <a:endParaRPr lang="ru-RU"/>
           </a:p>
           <a:p>
             <a:pPr lvl="1"/>
@@ -1546,6 +1546,7 @@
               <a:rPr lang="ru-RU"/>
               <a:t>Второй уровень</a:t>
             </a:r>
+            <a:endParaRPr lang="ru-RU"/>
           </a:p>
           <a:p>
             <a:pPr lvl="2"/>
@@ -1553,6 +1554,7 @@
               <a:rPr lang="ru-RU"/>
               <a:t>Третий уровень</a:t>
             </a:r>
+            <a:endParaRPr lang="ru-RU"/>
           </a:p>
           <a:p>
             <a:pPr lvl="3"/>
@@ -1560,6 +1562,7 @@
               <a:rPr lang="ru-RU"/>
               <a:t>Четвертый уровень</a:t>
             </a:r>
+            <a:endParaRPr lang="ru-RU"/>
           </a:p>
           <a:p>
             <a:pPr lvl="4"/>
@@ -1588,7 +1591,6 @@
           <a:p>
             <a:fld id="{D3FC49F1-F1CE-1340-8047-D9DA1EB28984}" type="datetimeFigureOut">
               <a:rPr lang="en-US" smtClean="0"/>
-              <a:t>10/29/2026</a:t>
             </a:fld>
             <a:endParaRPr lang="en-US"/>
           </a:p>
@@ -1630,7 +1632,6 @@
           <a:p>
             <a:fld id="{C5F217DE-4206-CA42-AFC6-D6533D4BF104}" type="slidenum">
               <a:rPr lang="en-US" smtClean="0"/>
-              <a:t>‹#›</a:t>
             </a:fld>
             <a:endParaRPr lang="en-US"/>
           </a:p>
@@ -1751,6 +1752,7 @@
               <a:rPr lang="ru-RU"/>
               <a:t>Образец текста</a:t>
             </a:r>
+            <a:endParaRPr lang="ru-RU"/>
           </a:p>
         </p:txBody>
       </p:sp>
@@ -1779,6 +1781,7 @@
               <a:rPr lang="ru-RU"/>
               <a:t>Образец текста</a:t>
             </a:r>
+            <a:endParaRPr lang="ru-RU"/>
           </a:p>
           <a:p>
             <a:pPr lvl="1"/>
@@ -1786,6 +1789,7 @@
               <a:rPr lang="ru-RU"/>
               <a:t>Второй уровень</a:t>
             </a:r>
+            <a:endParaRPr lang="ru-RU"/>
           </a:p>
           <a:p>
             <a:pPr lvl="2"/>
@@ -1793,6 +1797,7 @@
               <a:rPr lang="ru-RU"/>
               <a:t>Третий уровень</a:t>
             </a:r>
+            <a:endParaRPr lang="ru-RU"/>
           </a:p>
           <a:p>
             <a:pPr lvl="3"/>
@@ -1800,6 +1805,7 @@
               <a:rPr lang="ru-RU"/>
               <a:t>Четвертый уровень</a:t>
             </a:r>
+            <a:endParaRPr lang="ru-RU"/>
           </a:p>
           <a:p>
             <a:pPr lvl="4"/>
@@ -1873,6 +1879,7 @@
               <a:rPr lang="ru-RU"/>
               <a:t>Образец текста</a:t>
             </a:r>
+            <a:endParaRPr lang="ru-RU"/>
           </a:p>
         </p:txBody>
       </p:sp>
@@ -1901,6 +1908,7 @@
               <a:rPr lang="ru-RU"/>
               <a:t>Образец текста</a:t>
             </a:r>
+            <a:endParaRPr lang="ru-RU"/>
           </a:p>
           <a:p>
             <a:pPr lvl="1"/>
@@ -1908,6 +1916,7 @@
               <a:rPr lang="ru-RU"/>
               <a:t>Второй уровень</a:t>
             </a:r>
+            <a:endParaRPr lang="ru-RU"/>
           </a:p>
           <a:p>
             <a:pPr lvl="2"/>
@@ -1915,6 +1924,7 @@
               <a:rPr lang="ru-RU"/>
               <a:t>Третий уровень</a:t>
             </a:r>
+            <a:endParaRPr lang="ru-RU"/>
           </a:p>
           <a:p>
             <a:pPr lvl="3"/>
@@ -1922,6 +1932,7 @@
               <a:rPr lang="ru-RU"/>
               <a:t>Четвертый уровень</a:t>
             </a:r>
+            <a:endParaRPr lang="ru-RU"/>
           </a:p>
           <a:p>
             <a:pPr lvl="4"/>
@@ -1950,7 +1961,6 @@
           <a:p>
             <a:fld id="{D3FC49F1-F1CE-1340-8047-D9DA1EB28984}" type="datetimeFigureOut">
               <a:rPr lang="en-US" smtClean="0"/>
-              <a:t>10/29/2026</a:t>
             </a:fld>
             <a:endParaRPr lang="en-US"/>
           </a:p>
@@ -1992,7 +2002,6 @@
           <a:p>
             <a:fld id="{C5F217DE-4206-CA42-AFC6-D6533D4BF104}" type="slidenum">
               <a:rPr lang="en-US" smtClean="0"/>
-              <a:t>‹#›</a:t>
             </a:fld>
             <a:endParaRPr lang="en-US"/>
           </a:p>
@@ -2063,7 +2072,6 @@
           <a:p>
             <a:fld id="{D3FC49F1-F1CE-1340-8047-D9DA1EB28984}" type="datetimeFigureOut">
               <a:rPr lang="en-US" smtClean="0"/>
-              <a:t>10/29/2026</a:t>
             </a:fld>
             <a:endParaRPr lang="en-US"/>
           </a:p>
@@ -2105,7 +2113,6 @@
           <a:p>
             <a:fld id="{C5F217DE-4206-CA42-AFC6-D6533D4BF104}" type="slidenum">
               <a:rPr lang="en-US" smtClean="0"/>
-              <a:t>‹#›</a:t>
             </a:fld>
             <a:endParaRPr lang="en-US"/>
           </a:p>
@@ -2153,7 +2160,6 @@
           <a:p>
             <a:fld id="{D3FC49F1-F1CE-1340-8047-D9DA1EB28984}" type="datetimeFigureOut">
               <a:rPr lang="en-US" smtClean="0"/>
-              <a:t>10/29/2026</a:t>
             </a:fld>
             <a:endParaRPr lang="en-US"/>
           </a:p>
@@ -2195,7 +2201,6 @@
           <a:p>
             <a:fld id="{C5F217DE-4206-CA42-AFC6-D6533D4BF104}" type="slidenum">
               <a:rPr lang="en-US" smtClean="0"/>
-              <a:t>‹#›</a:t>
             </a:fld>
             <a:endParaRPr lang="en-US"/>
           </a:p>
@@ -2311,6 +2316,7 @@
               <a:rPr lang="ru-RU"/>
               <a:t>Образец текста</a:t>
             </a:r>
+            <a:endParaRPr lang="ru-RU"/>
           </a:p>
           <a:p>
             <a:pPr lvl="1"/>
@@ -2318,6 +2324,7 @@
               <a:rPr lang="ru-RU"/>
               <a:t>Второй уровень</a:t>
             </a:r>
+            <a:endParaRPr lang="ru-RU"/>
           </a:p>
           <a:p>
             <a:pPr lvl="2"/>
@@ -2325,6 +2332,7 @@
               <a:rPr lang="ru-RU"/>
               <a:t>Третий уровень</a:t>
             </a:r>
+            <a:endParaRPr lang="ru-RU"/>
           </a:p>
           <a:p>
             <a:pPr lvl="3"/>
@@ -2332,6 +2340,7 @@
               <a:rPr lang="ru-RU"/>
               <a:t>Четвертый уровень</a:t>
             </a:r>
+            <a:endParaRPr lang="ru-RU"/>
           </a:p>
           <a:p>
             <a:pPr lvl="4"/>
@@ -2405,6 +2414,7 @@
               <a:rPr lang="ru-RU"/>
               <a:t>Образец текста</a:t>
             </a:r>
+            <a:endParaRPr lang="ru-RU"/>
           </a:p>
         </p:txBody>
       </p:sp>
@@ -2425,7 +2435,6 @@
           <a:p>
             <a:fld id="{D3FC49F1-F1CE-1340-8047-D9DA1EB28984}" type="datetimeFigureOut">
               <a:rPr lang="en-US" smtClean="0"/>
-              <a:t>10/29/2026</a:t>
             </a:fld>
             <a:endParaRPr lang="en-US"/>
           </a:p>
@@ -2467,7 +2476,6 @@
           <a:p>
             <a:fld id="{C5F217DE-4206-CA42-AFC6-D6533D4BF104}" type="slidenum">
               <a:rPr lang="en-US" smtClean="0"/>
-              <a:t>‹#›</a:t>
             </a:fld>
             <a:endParaRPr lang="en-US"/>
           </a:p>
@@ -2653,6 +2661,7 @@
               <a:rPr lang="ru-RU"/>
               <a:t>Образец текста</a:t>
             </a:r>
+            <a:endParaRPr lang="ru-RU"/>
           </a:p>
         </p:txBody>
       </p:sp>
@@ -2673,7 +2682,6 @@
           <a:p>
             <a:fld id="{D3FC49F1-F1CE-1340-8047-D9DA1EB28984}" type="datetimeFigureOut">
               <a:rPr lang="en-US" smtClean="0"/>
-              <a:t>10/29/2026</a:t>
             </a:fld>
             <a:endParaRPr lang="en-US"/>
           </a:p>
@@ -2715,7 +2723,6 @@
           <a:p>
             <a:fld id="{C5F217DE-4206-CA42-AFC6-D6533D4BF104}" type="slidenum">
               <a:rPr lang="en-US" smtClean="0"/>
-              <a:t>‹#›</a:t>
             </a:fld>
             <a:endParaRPr lang="en-US"/>
           </a:p>
@@ -2814,6 +2821,7 @@
               <a:rPr lang="ru-RU"/>
               <a:t>Образец текста</a:t>
             </a:r>
+            <a:endParaRPr lang="ru-RU"/>
           </a:p>
           <a:p>
             <a:pPr lvl="1"/>
@@ -2821,6 +2829,7 @@
               <a:rPr lang="ru-RU"/>
               <a:t>Второй уровень</a:t>
             </a:r>
+            <a:endParaRPr lang="ru-RU"/>
           </a:p>
           <a:p>
             <a:pPr lvl="2"/>
@@ -2828,6 +2837,7 @@
               <a:rPr lang="ru-RU"/>
               <a:t>Третий уровень</a:t>
             </a:r>
+            <a:endParaRPr lang="ru-RU"/>
           </a:p>
           <a:p>
             <a:pPr lvl="3"/>
@@ -2835,6 +2845,7 @@
               <a:rPr lang="ru-RU"/>
               <a:t>Четвертый уровень</a:t>
             </a:r>
+            <a:endParaRPr lang="ru-RU"/>
           </a:p>
           <a:p>
             <a:pPr lvl="4"/>
@@ -2881,7 +2892,6 @@
           <a:p>
             <a:fld id="{D3FC49F1-F1CE-1340-8047-D9DA1EB28984}" type="datetimeFigureOut">
               <a:rPr lang="en-US" smtClean="0"/>
-              <a:t>10/29/2026</a:t>
             </a:fld>
             <a:endParaRPr lang="en-US"/>
           </a:p>
@@ -2959,7 +2969,6 @@
           <a:p>
             <a:fld id="{C5F217DE-4206-CA42-AFC6-D6533D4BF104}" type="slidenum">
               <a:rPr lang="en-US" smtClean="0"/>
-              <a:t>‹#›</a:t>
             </a:fld>
             <a:endParaRPr lang="en-US"/>
           </a:p>
@@ -3290,7 +3299,7 @@
           <p:nvPr/>
         </p:nvPicPr>
         <p:blipFill>
-          <a:blip r:embed="rId2"/>
+          <a:blip r:embed="rId1"/>
           <a:stretch>
             <a:fillRect/>
           </a:stretch>
@@ -3363,6 +3372,12 @@
               </a:rPr>
               <a:t>Проектный офис для Центральной Азии </a:t>
             </a:r>
+            <a:endParaRPr lang="ru-RU" b="1" noProof="1">
+              <a:solidFill>
+                <a:schemeClr val="bg1"/>
+              </a:solidFill>
+              <a:cs typeface="Calibri" panose="020F0502020204030204" pitchFamily="34" charset="0"/>
+            </a:endParaRPr>
           </a:p>
           <a:p>
             <a:r>
@@ -3374,6 +3389,12 @@
               </a:rPr>
               <a:t>по изменению климата и зеленой энергетике</a:t>
             </a:r>
+            <a:endParaRPr lang="ru-RU" b="1" noProof="1">
+              <a:solidFill>
+                <a:schemeClr val="bg1"/>
+              </a:solidFill>
+              <a:cs typeface="Calibri" panose="020F0502020204030204" pitchFamily="34" charset="0"/>
+            </a:endParaRPr>
           </a:p>
           <a:p>
             <a:endParaRPr lang="ru-RU" sz="2400" b="1" noProof="1">
@@ -3420,6 +3441,12 @@
               </a:rPr>
               <a:t>Деятельность и возможности развития</a:t>
             </a:r>
+            <a:endParaRPr lang="ru-RU" sz="4800" b="1" noProof="1">
+              <a:solidFill>
+                <a:schemeClr val="bg1"/>
+              </a:solidFill>
+              <a:cs typeface="Calibri" panose="020F0502020204030204" pitchFamily="34" charset="0"/>
+            </a:endParaRPr>
           </a:p>
         </p:txBody>
       </p:sp>
@@ -3432,7 +3459,7 @@
           <p:nvPr/>
         </p:nvPicPr>
         <p:blipFill>
-          <a:blip r:embed="rId3"/>
+          <a:blip r:embed="rId2"/>
           <a:stretch>
             <a:fillRect/>
           </a:stretch>
@@ -3500,6 +3527,13 @@
               </a:rPr>
               <a:t>Астана</a:t>
             </a:r>
+            <a:endParaRPr lang="ru-RU" sz="2400" noProof="1">
+              <a:solidFill>
+                <a:schemeClr val="bg1"/>
+              </a:solidFill>
+              <a:latin typeface="Manrope" pitchFamily="2" charset="0"/>
+              <a:cs typeface="Calibri" panose="020F0502020204030204" pitchFamily="34" charset="0"/>
+            </a:endParaRPr>
           </a:p>
           <a:p>
             <a:pPr algn="r"/>
@@ -3513,6 +3547,13 @@
               </a:rPr>
               <a:t>октябрь 2026 г. </a:t>
             </a:r>
+            <a:endParaRPr lang="ru-RU" sz="2400" noProof="1">
+              <a:solidFill>
+                <a:schemeClr val="bg1"/>
+              </a:solidFill>
+              <a:latin typeface="Manrope" pitchFamily="2" charset="0"/>
+              <a:cs typeface="Calibri" panose="020F0502020204030204" pitchFamily="34" charset="0"/>
+            </a:endParaRPr>
           </a:p>
         </p:txBody>
       </p:sp>
@@ -3550,19 +3591,7 @@
           <p:nvPr/>
         </p:nvPicPr>
         <p:blipFill>
-          <a:blip r:embed="rId2">
-            <a:extLst>
-              <a:ext uri="{BEBA8EAE-BF5A-486C-A8C5-ECC9F3942E4B}">
-                <a14:imgProps xmlns:a14="http://schemas.microsoft.com/office/drawing/2010/main">
-                  <a14:imgLayer>
-                    <a14:imgEffect>
-                      <a14:brightnessContrast bright="40000"/>
-                    </a14:imgEffect>
-                  </a14:imgLayer>
-                </a14:imgProps>
-              </a:ext>
-            </a:extLst>
-          </a:blip>
+          <a:blip r:embed="rId1"/>
           <a:srcRect l="33301" t="65431" r="13372"/>
           <a:stretch>
             <a:fillRect/>
@@ -3654,7 +3683,6 @@
                   <a:schemeClr val="bg1"/>
                 </a:solidFill>
               </a:rPr>
-              <a:t>10</a:t>
             </a:fld>
             <a:endParaRPr lang="ru-RU" dirty="0">
               <a:solidFill>
@@ -3747,6 +3775,12 @@
               </a:rPr>
               <a:t>Проектный офис для Центральной Азии </a:t>
             </a:r>
+            <a:endParaRPr lang="ru-RU" sz="1400" b="1" i="1" dirty="0">
+              <a:solidFill>
+                <a:srgbClr val="3B7D48"/>
+              </a:solidFill>
+              <a:cs typeface="Calibri" panose="020F0502020204030204" pitchFamily="34" charset="0"/>
+            </a:endParaRPr>
           </a:p>
           <a:p>
             <a:r>
@@ -3758,6 +3792,12 @@
               </a:rPr>
               <a:t>по изменению климата и зеленой энергетике</a:t>
             </a:r>
+            <a:endParaRPr lang="ru-RU" sz="1400" b="1" i="1" dirty="0">
+              <a:solidFill>
+                <a:srgbClr val="3B7D48"/>
+              </a:solidFill>
+              <a:cs typeface="Calibri" panose="020F0502020204030204" pitchFamily="34" charset="0"/>
+            </a:endParaRPr>
           </a:p>
         </p:txBody>
       </p:sp>
@@ -3770,7 +3810,7 @@
           <p:nvPr/>
         </p:nvPicPr>
         <p:blipFill>
-          <a:blip r:embed="rId3"/>
+          <a:blip r:embed="rId2"/>
           <a:stretch>
             <a:fillRect/>
           </a:stretch>
@@ -3817,6 +3857,12 @@
               </a:rPr>
               <a:t>Информационная и аналитическая работа</a:t>
             </a:r>
+            <a:endParaRPr sz="2000" b="1">
+              <a:solidFill>
+                <a:srgbClr val="1C3E6D"/>
+              </a:solidFill>
+              <a:latin typeface="Manrope"/>
+            </a:endParaRPr>
           </a:p>
         </p:txBody>
       </p:sp>
@@ -3852,6 +3898,12 @@
               </a:rPr>
               <a:t>июнь – октябрь 2026 года</a:t>
             </a:r>
+            <a:endParaRPr sz="1200" b="0">
+              <a:solidFill>
+                <a:srgbClr val="3B7D48"/>
+              </a:solidFill>
+              <a:latin typeface="Manrope"/>
+            </a:endParaRPr>
           </a:p>
         </p:txBody>
       </p:sp>
@@ -3898,7 +3950,6 @@
           <a:lstStyle/>
           <a:p>
             <a:pPr algn="ctr"/>
-            <a:endParaRPr/>
           </a:p>
         </p:txBody>
       </p:sp>
@@ -3943,7 +3994,6 @@
           <a:lstStyle/>
           <a:p>
             <a:pPr algn="ctr"/>
-            <a:endParaRPr/>
           </a:p>
         </p:txBody>
       </p:sp>
@@ -3979,6 +4029,12 @@
               </a:rPr>
               <a:t>26</a:t>
             </a:r>
+            <a:endParaRPr sz="2000" b="1">
+              <a:solidFill>
+                <a:srgbClr val="3B7D48"/>
+              </a:solidFill>
+              <a:latin typeface="Manrope"/>
+            </a:endParaRPr>
           </a:p>
         </p:txBody>
       </p:sp>
@@ -4014,6 +4070,12 @@
               </a:rPr>
               <a:t>пресс-релизов</a:t>
             </a:r>
+            <a:endParaRPr sz="1100" b="1">
+              <a:solidFill>
+                <a:srgbClr val="1C3E6D"/>
+              </a:solidFill>
+              <a:latin typeface="Manrope"/>
+            </a:endParaRPr>
           </a:p>
         </p:txBody>
       </p:sp>
@@ -4049,6 +4111,12 @@
               </a:rPr>
               <a:t>июнь – октябрь</a:t>
             </a:r>
+            <a:endParaRPr sz="950" b="0">
+              <a:solidFill>
+                <a:srgbClr val="404040"/>
+              </a:solidFill>
+              <a:latin typeface="Manrope"/>
+            </a:endParaRPr>
           </a:p>
         </p:txBody>
       </p:sp>
@@ -4095,7 +4163,6 @@
           <a:lstStyle/>
           <a:p>
             <a:pPr algn="ctr"/>
-            <a:endParaRPr/>
           </a:p>
         </p:txBody>
       </p:sp>
@@ -4140,7 +4207,6 @@
           <a:lstStyle/>
           <a:p>
             <a:pPr algn="ctr"/>
-            <a:endParaRPr/>
           </a:p>
         </p:txBody>
       </p:sp>
@@ -4153,7 +4219,7 @@
         <p:spPr>
           <a:xfrm>
             <a:off x="2718000" y="1692000"/>
-            <a:ext cx="2052000" cy="360000"/>
+            <a:ext cx="2052000" cy="342900"/>
           </a:xfrm>
           <a:prstGeom prst="rect">
             <a:avLst/>
@@ -4174,8 +4240,23 @@
                 </a:solidFill>
                 <a:latin typeface="Manrope"/>
               </a:rPr>
-              <a:t>101</a:t>
-            </a:r>
+              <a:t>1</a:t>
+            </a:r>
+            <a:r>
+              <a:rPr lang="ru-RU" sz="2000" b="1">
+                <a:solidFill>
+                  <a:srgbClr val="156082"/>
+                </a:solidFill>
+                <a:latin typeface="Manrope"/>
+              </a:rPr>
+              <a:t>27+</a:t>
+            </a:r>
+            <a:endParaRPr lang="ru-RU" sz="2000" b="1">
+              <a:solidFill>
+                <a:srgbClr val="156082"/>
+              </a:solidFill>
+              <a:latin typeface="Manrope"/>
+            </a:endParaRPr>
           </a:p>
         </p:txBody>
       </p:sp>
@@ -4188,7 +4269,7 @@
         <p:spPr>
           <a:xfrm>
             <a:off x="2718000" y="2015999"/>
-            <a:ext cx="2052000" cy="180000"/>
+            <a:ext cx="2052000" cy="204470"/>
           </a:xfrm>
           <a:prstGeom prst="rect">
             <a:avLst/>
@@ -4209,8 +4290,32 @@
                 </a:solidFill>
                 <a:latin typeface="Manrope"/>
               </a:rPr>
-              <a:t>публикация в СМИ</a:t>
-            </a:r>
+              <a:t>публикаци</a:t>
+            </a:r>
+            <a:r>
+              <a:rPr lang="ru-RU" sz="1100" b="1">
+                <a:solidFill>
+                  <a:srgbClr val="1C3E6D"/>
+                </a:solidFill>
+                <a:latin typeface="Manrope"/>
+              </a:rPr>
+              <a:t>й</a:t>
+            </a:r>
+            <a:r>
+              <a:rPr sz="1100" b="1">
+                <a:solidFill>
+                  <a:srgbClr val="1C3E6D"/>
+                </a:solidFill>
+                <a:latin typeface="Manrope"/>
+              </a:rPr>
+              <a:t> в СМИ</a:t>
+            </a:r>
+            <a:endParaRPr sz="1100" b="1">
+              <a:solidFill>
+                <a:srgbClr val="1C3E6D"/>
+              </a:solidFill>
+              <a:latin typeface="Manrope"/>
+            </a:endParaRPr>
           </a:p>
         </p:txBody>
       </p:sp>
@@ -4246,6 +4351,12 @@
               </a:rPr>
               <a:t>июнь – сентябрь</a:t>
             </a:r>
+            <a:endParaRPr sz="950" b="0">
+              <a:solidFill>
+                <a:srgbClr val="404040"/>
+              </a:solidFill>
+              <a:latin typeface="Manrope"/>
+            </a:endParaRPr>
           </a:p>
         </p:txBody>
       </p:sp>
@@ -4292,7 +4403,6 @@
           <a:lstStyle/>
           <a:p>
             <a:pPr algn="ctr"/>
-            <a:endParaRPr/>
           </a:p>
         </p:txBody>
       </p:sp>
@@ -4337,7 +4447,6 @@
           <a:lstStyle/>
           <a:p>
             <a:pPr algn="ctr"/>
-            <a:endParaRPr/>
           </a:p>
         </p:txBody>
       </p:sp>
@@ -4350,7 +4459,7 @@
         <p:spPr>
           <a:xfrm>
             <a:off x="5058000" y="1692000"/>
-            <a:ext cx="2052000" cy="360000"/>
+            <a:ext cx="2052000" cy="342900"/>
           </a:xfrm>
           <a:prstGeom prst="rect">
             <a:avLst/>
@@ -4373,6 +4482,21 @@
               </a:rPr>
               <a:t>130</a:t>
             </a:r>
+            <a:r>
+              <a:rPr lang="ru-RU" sz="2000" b="1">
+                <a:solidFill>
+                  <a:srgbClr val="1C3E6D"/>
+                </a:solidFill>
+                <a:latin typeface="Manrope"/>
+              </a:rPr>
+              <a:t>+</a:t>
+            </a:r>
+            <a:endParaRPr lang="ru-RU" sz="2000" b="1">
+              <a:solidFill>
+                <a:srgbClr val="1C3E6D"/>
+              </a:solidFill>
+              <a:latin typeface="Manrope"/>
+            </a:endParaRPr>
           </a:p>
         </p:txBody>
       </p:sp>
@@ -4408,6 +4532,12 @@
               </a:rPr>
               <a:t>постов в соцсетях</a:t>
             </a:r>
+            <a:endParaRPr sz="1100" b="1">
+              <a:solidFill>
+                <a:srgbClr val="1C3E6D"/>
+              </a:solidFill>
+              <a:latin typeface="Manrope"/>
+            </a:endParaRPr>
           </a:p>
         </p:txBody>
       </p:sp>
@@ -4443,6 +4573,12 @@
               </a:rPr>
               <a:t>июнь – октябрь</a:t>
             </a:r>
+            <a:endParaRPr sz="950" b="0">
+              <a:solidFill>
+                <a:srgbClr val="404040"/>
+              </a:solidFill>
+              <a:latin typeface="Manrope"/>
+            </a:endParaRPr>
           </a:p>
         </p:txBody>
       </p:sp>
@@ -4489,7 +4625,6 @@
           <a:lstStyle/>
           <a:p>
             <a:pPr algn="ctr"/>
-            <a:endParaRPr/>
           </a:p>
         </p:txBody>
       </p:sp>
@@ -4534,7 +4669,6 @@
           <a:lstStyle/>
           <a:p>
             <a:pPr algn="ctr"/>
-            <a:endParaRPr/>
           </a:p>
         </p:txBody>
       </p:sp>
@@ -4570,6 +4704,12 @@
               </a:rPr>
               <a:t>1 865</a:t>
             </a:r>
+            <a:endParaRPr sz="2000" b="1">
+              <a:solidFill>
+                <a:srgbClr val="C99A1E"/>
+              </a:solidFill>
+              <a:latin typeface="Manrope"/>
+            </a:endParaRPr>
           </a:p>
         </p:txBody>
       </p:sp>
@@ -4605,6 +4745,12 @@
               </a:rPr>
               <a:t>подписчиков в 6 соцсетях</a:t>
             </a:r>
+            <a:endParaRPr sz="1100" b="1">
+              <a:solidFill>
+                <a:srgbClr val="1C3E6D"/>
+              </a:solidFill>
+              <a:latin typeface="Manrope"/>
+            </a:endParaRPr>
           </a:p>
         </p:txBody>
       </p:sp>
@@ -4640,6 +4786,12 @@
               </a:rPr>
               <a:t>в т.ч. журналисты и СМИ</a:t>
             </a:r>
+            <a:endParaRPr sz="950" b="0">
+              <a:solidFill>
+                <a:srgbClr val="404040"/>
+              </a:solidFill>
+              <a:latin typeface="Manrope"/>
+            </a:endParaRPr>
           </a:p>
         </p:txBody>
       </p:sp>
@@ -4686,7 +4838,6 @@
           <a:lstStyle/>
           <a:p>
             <a:pPr algn="ctr"/>
-            <a:endParaRPr/>
           </a:p>
         </p:txBody>
       </p:sp>
@@ -4731,7 +4882,6 @@
           <a:lstStyle/>
           <a:p>
             <a:pPr algn="ctr"/>
-            <a:endParaRPr/>
           </a:p>
         </p:txBody>
       </p:sp>
@@ -4767,6 +4917,12 @@
               </a:rPr>
               <a:t>24</a:t>
             </a:r>
+            <a:endParaRPr sz="2000" b="1">
+              <a:solidFill>
+                <a:srgbClr val="3B7D48"/>
+              </a:solidFill>
+              <a:latin typeface="Manrope"/>
+            </a:endParaRPr>
           </a:p>
         </p:txBody>
       </p:sp>
@@ -4802,6 +4958,12 @@
               </a:rPr>
               <a:t>материала на сайте</a:t>
             </a:r>
+            <a:endParaRPr sz="1100" b="1">
+              <a:solidFill>
+                <a:srgbClr val="1C3E6D"/>
+              </a:solidFill>
+              <a:latin typeface="Manrope"/>
+            </a:endParaRPr>
           </a:p>
         </p:txBody>
       </p:sp>
@@ -4837,6 +4999,12 @@
               </a:rPr>
               <a:t>caclimate.fund, июнь – октябрь</a:t>
             </a:r>
+            <a:endParaRPr sz="950" b="0">
+              <a:solidFill>
+                <a:srgbClr val="404040"/>
+              </a:solidFill>
+              <a:latin typeface="Manrope"/>
+            </a:endParaRPr>
           </a:p>
         </p:txBody>
       </p:sp>
@@ -4883,7 +5051,6 @@
           <a:lstStyle/>
           <a:p>
             <a:pPr algn="ctr"/>
-            <a:endParaRPr/>
           </a:p>
         </p:txBody>
       </p:sp>
@@ -4928,7 +5095,6 @@
           <a:lstStyle/>
           <a:p>
             <a:pPr algn="ctr"/>
-            <a:endParaRPr/>
           </a:p>
         </p:txBody>
       </p:sp>
@@ -4964,6 +5130,12 @@
               </a:rPr>
               <a:t>Опубликованные исследования и аналитика</a:t>
             </a:r>
+            <a:endParaRPr sz="1400" b="1">
+              <a:solidFill>
+                <a:srgbClr val="3B7D48"/>
+              </a:solidFill>
+              <a:latin typeface="Manrope"/>
+            </a:endParaRPr>
           </a:p>
         </p:txBody>
       </p:sp>
@@ -5012,6 +5184,12 @@
               </a:rPr>
               <a:t>Климатические риски Казахстана: 12 видов опасностей, оценка 20 регионов – совместно с ESGQ</a:t>
             </a:r>
+            <a:endParaRPr sz="1050" b="0">
+              <a:solidFill>
+                <a:srgbClr val="404040"/>
+              </a:solidFill>
+              <a:latin typeface="Manrope"/>
+            </a:endParaRPr>
           </a:p>
           <a:p>
             <a:pPr algn="l">
@@ -5037,6 +5215,12 @@
               </a:rPr>
               <a:t>Рекомендации KAZENERGY по снижению рисков устойчивого развития для энергетики</a:t>
             </a:r>
+            <a:endParaRPr sz="1050" b="0">
+              <a:solidFill>
+                <a:srgbClr val="404040"/>
+              </a:solidFill>
+              <a:latin typeface="Manrope"/>
+            </a:endParaRPr>
           </a:p>
           <a:p>
             <a:pPr algn="l">
@@ -5062,6 +5246,12 @@
               </a:rPr>
               <a:t>Серия «Как обеспечить Центральную Азию едой, водой, электроэнергией в условиях меняющегося климата», «Чем грозит изменение климата Центральной Азии»</a:t>
             </a:r>
+            <a:endParaRPr sz="1050" b="0">
+              <a:solidFill>
+                <a:srgbClr val="404040"/>
+              </a:solidFill>
+              <a:latin typeface="Manrope"/>
+            </a:endParaRPr>
           </a:p>
           <a:p>
             <a:pPr algn="l">
@@ -5087,6 +5277,12 @@
               </a:rPr>
               <a:t>Центральная Азия потеряла 44% площади ледников</a:t>
             </a:r>
+            <a:endParaRPr sz="1050" b="0">
+              <a:solidFill>
+                <a:srgbClr val="404040"/>
+              </a:solidFill>
+              <a:latin typeface="Manrope"/>
+            </a:endParaRPr>
           </a:p>
           <a:p>
             <a:pPr algn="l">
@@ -5112,6 +5308,12 @@
               </a:rPr>
               <a:t>Климатические аномалии: самое жаркое лето за 80 лет, рост погодных аномалий, последствия жары для здоровья</a:t>
             </a:r>
+            <a:endParaRPr sz="1050" b="0">
+              <a:solidFill>
+                <a:srgbClr val="404040"/>
+              </a:solidFill>
+              <a:latin typeface="Manrope"/>
+            </a:endParaRPr>
           </a:p>
           <a:p>
             <a:pPr algn="l">
@@ -5137,6 +5339,12 @@
               </a:rPr>
               <a:t>Экологические данные: эмиссии (3,4 млн т), нарушения экологического законодательства, лесной фонд, редкие животные, нацпарки</a:t>
             </a:r>
+            <a:endParaRPr sz="1050" b="0">
+              <a:solidFill>
+                <a:srgbClr val="404040"/>
+              </a:solidFill>
+              <a:latin typeface="Manrope"/>
+            </a:endParaRPr>
           </a:p>
         </p:txBody>
       </p:sp>
@@ -5183,7 +5391,6 @@
           <a:lstStyle/>
           <a:p>
             <a:pPr algn="ctr"/>
-            <a:endParaRPr/>
           </a:p>
         </p:txBody>
       </p:sp>
@@ -5228,7 +5435,6 @@
           <a:lstStyle/>
           <a:p>
             <a:pPr algn="ctr"/>
-            <a:endParaRPr/>
           </a:p>
         </p:txBody>
       </p:sp>
@@ -5264,6 +5470,12 @@
               </a:rPr>
               <a:t>Научно-аналитические мероприятия</a:t>
             </a:r>
+            <a:endParaRPr sz="1400" b="1">
+              <a:solidFill>
+                <a:srgbClr val="156082"/>
+              </a:solidFill>
+              <a:latin typeface="Manrope"/>
+            </a:endParaRPr>
           </a:p>
         </p:txBody>
       </p:sp>
@@ -5312,6 +5524,12 @@
               </a:rPr>
               <a:t>Лондон: Высокий консультативный совет ORF по зелёному переходу, глава Фонда вошёл в его состав</a:t>
             </a:r>
+            <a:endParaRPr sz="1050" b="0">
+              <a:solidFill>
+                <a:srgbClr val="404040"/>
+              </a:solidFill>
+              <a:latin typeface="Manrope"/>
+            </a:endParaRPr>
           </a:p>
           <a:p>
             <a:pPr algn="l">
@@ -5337,6 +5555,12 @@
               </a:rPr>
               <a:t>Гамбург: конференция по устойчивому развитию</a:t>
             </a:r>
+            <a:endParaRPr sz="1050" b="0">
+              <a:solidFill>
+                <a:srgbClr val="404040"/>
+              </a:solidFill>
+              <a:latin typeface="Manrope"/>
+            </a:endParaRPr>
           </a:p>
           <a:p>
             <a:pPr algn="l">
@@ -5362,6 +5586,12 @@
               </a:rPr>
               <a:t>Курс «ESG-оценка предприятий Казахстана по официальным экологическим данным» совместно с ИАЦ ООС МЭПР</a:t>
             </a:r>
+            <a:endParaRPr sz="1050" b="0">
+              <a:solidFill>
+                <a:srgbClr val="404040"/>
+              </a:solidFill>
+              <a:latin typeface="Manrope"/>
+            </a:endParaRPr>
           </a:p>
           <a:p>
             <a:pPr algn="l">
@@ -5387,6 +5617,12 @@
               </a:rPr>
               <a:t>Молодёжная климатическая конференция LCOY Kazakhstan 2026, Назарбаев Университет</a:t>
             </a:r>
+            <a:endParaRPr sz="1050" b="0">
+              <a:solidFill>
+                <a:srgbClr val="404040"/>
+              </a:solidFill>
+              <a:latin typeface="Manrope"/>
+            </a:endParaRPr>
           </a:p>
           <a:p>
             <a:pPr algn="l">
@@ -5412,6 +5648,12 @@
               </a:rPr>
               <a:t>Меморандум о сотрудничестве с Рейтинговым агентством ESGQ</a:t>
             </a:r>
+            <a:endParaRPr sz="1050" b="0">
+              <a:solidFill>
+                <a:srgbClr val="404040"/>
+              </a:solidFill>
+              <a:latin typeface="Manrope"/>
+            </a:endParaRPr>
           </a:p>
           <a:p>
             <a:pPr algn="l">
@@ -5437,6 +5679,12 @@
               </a:rPr>
               <a:t>Нью-Дели: 5-й Экономический конклав Каутильи, выступление главы Фонда; аналитическая записка с рекомендациями для Казахстана</a:t>
             </a:r>
+            <a:endParaRPr sz="1050" b="0">
+              <a:solidFill>
+                <a:srgbClr val="404040"/>
+              </a:solidFill>
+              <a:latin typeface="Manrope"/>
+            </a:endParaRPr>
           </a:p>
         </p:txBody>
       </p:sp>
@@ -5476,6 +5724,12 @@
               </a:rPr>
               <a:t>Публикации выходят на трёх языках: казахском, русском и английском.</a:t>
             </a:r>
+            <a:endParaRPr sz="950" b="1">
+              <a:solidFill>
+                <a:srgbClr val="1C3E6D"/>
+              </a:solidFill>
+              <a:latin typeface="Manrope"/>
+            </a:endParaRPr>
           </a:p>
           <a:p>
             <a:pPr algn="l">
@@ -5501,6 +5755,12 @@
               </a:rPr>
               <a:t>Казинформ, KazTag, Kazakhstan Today, Егемен Қазақстан, Egemen Times, Kursiv, Vlast, Orda, BAQ.kz, 24.kz, Улысмедиа, Lifenews, Qumash, Bes.Media, Kapital.kz, Informburo.kz, Exclusive, Inbusiness, DKnews, E-Karaganda, Newsline, Vesti.kz, Spik.kz, AIT Media, Astana Times, Ser-Per.kz, FBRK.kz, CZHR.kz</a:t>
             </a:r>
+            <a:endParaRPr sz="950" b="0">
+              <a:solidFill>
+                <a:srgbClr val="404040"/>
+              </a:solidFill>
+              <a:latin typeface="Manrope"/>
+            </a:endParaRPr>
           </a:p>
           <a:p>
             <a:pPr algn="l">
@@ -5526,6 +5786,12 @@
               </a:rPr>
               <a:t>Euronews, Ultima Bozza (Италия), Travel Tomorrow (Бельгия), Interfax (Россия), Central Asia News, Toshkent.Today (Узбекистан), Open.kg (Кыргызстан), ORIENT.tm (Туркменистан), Imruz и Pamir Inside (Таджикистан), Ekois.net, Getaway (ЮАР), Malaysia News</a:t>
             </a:r>
+            <a:endParaRPr sz="950" b="0">
+              <a:solidFill>
+                <a:srgbClr val="404040"/>
+              </a:solidFill>
+              <a:latin typeface="Manrope"/>
+            </a:endParaRPr>
           </a:p>
         </p:txBody>
       </p:sp>
@@ -5556,13 +5822,157 @@
       </p:grpSpPr>
       <p:pic>
         <p:nvPicPr>
-          <p:cNvPr id="3" name="Рисунок 2">
-            <a:extLst>
-              <a:ext uri="{FF2B5EF4-FFF2-40B4-BE49-F238E27FC236}">
-                <a16:creationId xmlns:a16="http://schemas.microsoft.com/office/drawing/2014/main" xmlns="" id="{4F9C59AF-7B85-FDEB-57D9-0C700C3345BD}"/>
-              </a:ext>
-            </a:extLst>
-          </p:cNvPr>
+          <p:cNvPr id="3" name="Рисунок 2"/>
+          <p:cNvPicPr>
+            <a:picLocks noChangeAspect="1"/>
+          </p:cNvPicPr>
+          <p:nvPr/>
+        </p:nvPicPr>
+        <p:blipFill>
+          <a:blip r:embed="rId1"/>
+          <a:stretch>
+            <a:fillRect/>
+          </a:stretch>
+        </p:blipFill>
+        <p:spPr>
+          <a:xfrm>
+            <a:off x="0" y="0"/>
+            <a:ext cx="12368696" cy="6858000"/>
+          </a:xfrm>
+          <a:prstGeom prst="rect">
+            <a:avLst/>
+          </a:prstGeom>
+        </p:spPr>
+      </p:pic>
+      <p:sp>
+        <p:nvSpPr>
+          <p:cNvPr id="5" name="TextBox 4"/>
+          <p:cNvSpPr txBox="1"/>
+          <p:nvPr/>
+        </p:nvSpPr>
+        <p:spPr>
+          <a:xfrm>
+            <a:off x="733055" y="1032562"/>
+            <a:ext cx="11334897" cy="2585323"/>
+          </a:xfrm>
+          <a:prstGeom prst="rect">
+            <a:avLst/>
+          </a:prstGeom>
+          <a:noFill/>
+        </p:spPr>
+        <p:txBody>
+          <a:bodyPr wrap="square" rtlCol="0">
+            <a:spAutoFit/>
+          </a:bodyPr>
+          <a:lstStyle/>
+          <a:p>
+            <a:r>
+              <a:rPr lang="ru-RU" b="1" dirty="0">
+                <a:solidFill>
+                  <a:schemeClr val="bg1"/>
+                </a:solidFill>
+                <a:latin typeface="Manrope" pitchFamily="2" charset="0"/>
+                <a:cs typeface="Calibri" panose="020F0502020204030204" pitchFamily="34" charset="0"/>
+              </a:rPr>
+              <a:t>Центрально-азиатский </a:t>
+            </a:r>
+            <a:r>
+              <a:rPr lang="ru-RU" b="1" dirty="0">
+                <a:solidFill>
+                  <a:schemeClr val="bg1"/>
+                </a:solidFill>
+                <a:cs typeface="Calibri" panose="020F0502020204030204" pitchFamily="34" charset="0"/>
+              </a:rPr>
+              <a:t>климатический фонд</a:t>
+            </a:r>
+            <a:br>
+              <a:rPr lang="ru-RU" b="1" dirty="0">
+                <a:solidFill>
+                  <a:schemeClr val="bg1"/>
+                </a:solidFill>
+                <a:cs typeface="Calibri" panose="020F0502020204030204" pitchFamily="34" charset="0"/>
+              </a:rPr>
+            </a:br>
+            <a:r>
+              <a:rPr lang="ru-RU" b="1" dirty="0">
+                <a:solidFill>
+                  <a:schemeClr val="bg1"/>
+                </a:solidFill>
+                <a:cs typeface="Calibri" panose="020F0502020204030204" pitchFamily="34" charset="0"/>
+              </a:rPr>
+              <a:t>Проектный офис для Центральной Азии </a:t>
+            </a:r>
+            <a:endParaRPr lang="ru-RU" b="1" dirty="0">
+              <a:solidFill>
+                <a:schemeClr val="bg1"/>
+              </a:solidFill>
+              <a:cs typeface="Calibri" panose="020F0502020204030204" pitchFamily="34" charset="0"/>
+            </a:endParaRPr>
+          </a:p>
+          <a:p>
+            <a:r>
+              <a:rPr lang="ru-RU" b="1" dirty="0">
+                <a:solidFill>
+                  <a:schemeClr val="bg1"/>
+                </a:solidFill>
+                <a:cs typeface="Calibri" panose="020F0502020204030204" pitchFamily="34" charset="0"/>
+              </a:rPr>
+              <a:t>по изменению климата и зеленой энергетике</a:t>
+            </a:r>
+            <a:endParaRPr lang="ru-RU" b="1" dirty="0">
+              <a:solidFill>
+                <a:schemeClr val="bg1"/>
+              </a:solidFill>
+              <a:cs typeface="Calibri" panose="020F0502020204030204" pitchFamily="34" charset="0"/>
+            </a:endParaRPr>
+          </a:p>
+          <a:p>
+            <a:endParaRPr lang="ru-RU" sz="2400" b="1" dirty="0">
+              <a:solidFill>
+                <a:schemeClr val="bg1"/>
+              </a:solidFill>
+              <a:cs typeface="Calibri" panose="020F0502020204030204" pitchFamily="34" charset="0"/>
+            </a:endParaRPr>
+          </a:p>
+          <a:p>
+            <a:pPr algn="ctr"/>
+            <a:endParaRPr lang="ru-RU" sz="2800" b="1" dirty="0">
+              <a:solidFill>
+                <a:schemeClr val="bg1"/>
+              </a:solidFill>
+              <a:cs typeface="Calibri" panose="020F0502020204030204" pitchFamily="34" charset="0"/>
+            </a:endParaRPr>
+          </a:p>
+          <a:p>
+            <a:r>
+              <a:rPr lang="ru-RU" sz="2800" b="1" dirty="0">
+                <a:solidFill>
+                  <a:schemeClr val="bg1"/>
+                </a:solidFill>
+                <a:cs typeface="Calibri" panose="020F0502020204030204" pitchFamily="34" charset="0"/>
+              </a:rPr>
+              <a:t>СТРАТЕГИЧЕСКИЕ ВОЗМОЖНОСТИ</a:t>
+            </a:r>
+            <a:endParaRPr lang="ru-RU" sz="2800" b="1" dirty="0">
+              <a:solidFill>
+                <a:schemeClr val="bg1"/>
+              </a:solidFill>
+              <a:cs typeface="Calibri" panose="020F0502020204030204" pitchFamily="34" charset="0"/>
+            </a:endParaRPr>
+          </a:p>
+          <a:p>
+            <a:endParaRPr lang="ru-RU" sz="2800" b="1" dirty="0">
+              <a:solidFill>
+                <a:schemeClr val="bg1"/>
+              </a:solidFill>
+              <a:cs typeface="Calibri" panose="020F0502020204030204" pitchFamily="34" charset="0"/>
+            </a:endParaRPr>
+          </a:p>
+        </p:txBody>
+      </p:sp>
+      <p:pic>
+        <p:nvPicPr>
+          <p:cNvPr id="8" name="Рисунок 7"/>
           <p:cNvPicPr>
             <a:picLocks noChangeAspect="1"/>
           </p:cNvPicPr>
@@ -5576,150 +5986,6 @@
         </p:blipFill>
         <p:spPr>
           <a:xfrm>
-            <a:off x="0" y="0"/>
-            <a:ext cx="12368696" cy="6858000"/>
-          </a:xfrm>
-          <a:prstGeom prst="rect">
-            <a:avLst/>
-          </a:prstGeom>
-        </p:spPr>
-      </p:pic>
-      <p:sp>
-        <p:nvSpPr>
-          <p:cNvPr id="5" name="TextBox 4">
-            <a:extLst>
-              <a:ext uri="{FF2B5EF4-FFF2-40B4-BE49-F238E27FC236}">
-                <a16:creationId xmlns:a16="http://schemas.microsoft.com/office/drawing/2014/main" xmlns="" id="{0B4072C1-957B-5BBE-2D8B-EF24ED2C184A}"/>
-              </a:ext>
-            </a:extLst>
-          </p:cNvPr>
-          <p:cNvSpPr txBox="1"/>
-          <p:nvPr/>
-        </p:nvSpPr>
-        <p:spPr>
-          <a:xfrm>
-            <a:off x="733055" y="1032562"/>
-            <a:ext cx="11334897" cy="2585323"/>
-          </a:xfrm>
-          <a:prstGeom prst="rect">
-            <a:avLst/>
-          </a:prstGeom>
-          <a:noFill/>
-        </p:spPr>
-        <p:txBody>
-          <a:bodyPr wrap="square" rtlCol="0">
-            <a:spAutoFit/>
-          </a:bodyPr>
-          <a:lstStyle/>
-          <a:p>
-            <a:r>
-              <a:rPr lang="ru-RU" b="1" dirty="0">
-                <a:solidFill>
-                  <a:schemeClr val="bg1"/>
-                </a:solidFill>
-                <a:latin typeface="Manrope" pitchFamily="2" charset="0"/>
-                <a:cs typeface="Calibri" panose="020F0502020204030204" pitchFamily="34" charset="0"/>
-              </a:rPr>
-              <a:t>Центрально-азиатский </a:t>
-            </a:r>
-            <a:r>
-              <a:rPr lang="ru-RU" b="1" dirty="0">
-                <a:solidFill>
-                  <a:schemeClr val="bg1"/>
-                </a:solidFill>
-                <a:cs typeface="Calibri" panose="020F0502020204030204" pitchFamily="34" charset="0"/>
-              </a:rPr>
-              <a:t>климатический фонд</a:t>
-            </a:r>
-            <a:br>
-              <a:rPr lang="ru-RU" b="1" dirty="0">
-                <a:solidFill>
-                  <a:schemeClr val="bg1"/>
-                </a:solidFill>
-                <a:cs typeface="Calibri" panose="020F0502020204030204" pitchFamily="34" charset="0"/>
-              </a:rPr>
-            </a:br>
-            <a:r>
-              <a:rPr lang="ru-RU" b="1" dirty="0">
-                <a:solidFill>
-                  <a:schemeClr val="bg1"/>
-                </a:solidFill>
-                <a:cs typeface="Calibri" panose="020F0502020204030204" pitchFamily="34" charset="0"/>
-              </a:rPr>
-              <a:t>Проектный офис для Центральной Азии </a:t>
-            </a:r>
-          </a:p>
-          <a:p>
-            <a:r>
-              <a:rPr lang="ru-RU" b="1" dirty="0">
-                <a:solidFill>
-                  <a:schemeClr val="bg1"/>
-                </a:solidFill>
-                <a:cs typeface="Calibri" panose="020F0502020204030204" pitchFamily="34" charset="0"/>
-              </a:rPr>
-              <a:t>по изменению климата и зеленой энергетике</a:t>
-            </a:r>
-          </a:p>
-          <a:p>
-            <a:endParaRPr lang="ru-RU" sz="2400" b="1" dirty="0">
-              <a:solidFill>
-                <a:schemeClr val="bg1"/>
-              </a:solidFill>
-              <a:cs typeface="Calibri" panose="020F0502020204030204" pitchFamily="34" charset="0"/>
-            </a:endParaRPr>
-          </a:p>
-          <a:p>
-            <a:pPr algn="ctr"/>
-            <a:endParaRPr lang="ru-RU" sz="2800" b="1" dirty="0">
-              <a:solidFill>
-                <a:schemeClr val="bg1"/>
-              </a:solidFill>
-              <a:cs typeface="Calibri" panose="020F0502020204030204" pitchFamily="34" charset="0"/>
-            </a:endParaRPr>
-          </a:p>
-          <a:p>
-            <a:r>
-              <a:rPr lang="ru-RU" sz="2800" b="1" dirty="0">
-                <a:solidFill>
-                  <a:schemeClr val="bg1"/>
-                </a:solidFill>
-                <a:cs typeface="Calibri" panose="020F0502020204030204" pitchFamily="34" charset="0"/>
-              </a:rPr>
-              <a:t>СТРАТЕГИЧЕСКИЕ ВОЗМОЖНОСТИ</a:t>
-            </a:r>
-          </a:p>
-          <a:p>
-            <a:endParaRPr lang="ru-RU" sz="2800" b="1" dirty="0">
-              <a:solidFill>
-                <a:schemeClr val="bg1"/>
-              </a:solidFill>
-              <a:cs typeface="Calibri" panose="020F0502020204030204" pitchFamily="34" charset="0"/>
-            </a:endParaRPr>
-          </a:p>
-        </p:txBody>
-      </p:sp>
-      <p:pic>
-        <p:nvPicPr>
-          <p:cNvPr id="8" name="Рисунок 7">
-            <a:extLst>
-              <a:ext uri="{FF2B5EF4-FFF2-40B4-BE49-F238E27FC236}">
-                <a16:creationId xmlns:a16="http://schemas.microsoft.com/office/drawing/2014/main" xmlns="" id="{51C0053B-F6D3-EC53-8797-BA61435519EA}"/>
-              </a:ext>
-            </a:extLst>
-          </p:cNvPr>
-          <p:cNvPicPr>
-            <a:picLocks noChangeAspect="1"/>
-          </p:cNvPicPr>
-          <p:nvPr/>
-        </p:nvPicPr>
-        <p:blipFill>
-          <a:blip r:embed="rId3"/>
-          <a:stretch>
-            <a:fillRect/>
-          </a:stretch>
-        </p:blipFill>
-        <p:spPr>
-          <a:xfrm>
             <a:off x="9851113" y="303599"/>
             <a:ext cx="2340887" cy="956791"/>
           </a:xfrm>
@@ -5729,11 +5995,6 @@
         </p:spPr>
       </p:pic>
     </p:spTree>
-    <p:extLst>
-      <p:ext uri="{BB962C8B-B14F-4D97-AF65-F5344CB8AC3E}">
-        <p14:creationId xmlns:p14="http://schemas.microsoft.com/office/powerpoint/2010/main" val="2229270945"/>
-      </p:ext>
-    </p:extLst>
   </p:cSld>
   <p:clrMapOvr>
     <a:masterClrMapping/>
@@ -5767,11 +6028,11 @@
           <p:nvPr/>
         </p:nvPicPr>
         <p:blipFill>
-          <a:blip r:embed="rId2">
+          <a:blip r:embed="rId1">
             <a:extLst>
               <a:ext uri="{BEBA8EAE-BF5A-486C-A8C5-ECC9F3942E4B}">
                 <a14:imgProps xmlns:a14="http://schemas.microsoft.com/office/drawing/2010/main">
-                  <a14:imgLayer r:embed="rId3">
+                  <a14:imgLayer r:embed="rId6">
                     <a14:imgEffect>
                       <a14:brightnessContrast bright="40000"/>
                     </a14:imgEffect>
@@ -5871,7 +6132,6 @@
                   <a:schemeClr val="bg1"/>
                 </a:solidFill>
               </a:rPr>
-              <a:t>12</a:t>
             </a:fld>
             <a:endParaRPr lang="ru-RU" dirty="0">
               <a:solidFill>
@@ -5964,6 +6224,12 @@
               </a:rPr>
               <a:t>Проектный офис для Центральной Азии </a:t>
             </a:r>
+            <a:endParaRPr lang="ru-RU" sz="1400" b="1" i="1" dirty="0">
+              <a:solidFill>
+                <a:srgbClr val="3B7D48"/>
+              </a:solidFill>
+              <a:cs typeface="Calibri" panose="020F0502020204030204" pitchFamily="34" charset="0"/>
+            </a:endParaRPr>
           </a:p>
           <a:p>
             <a:r>
@@ -5975,6 +6241,12 @@
               </a:rPr>
               <a:t>по изменению климата и зеленой энергетике</a:t>
             </a:r>
+            <a:endParaRPr lang="ru-RU" sz="1400" b="1" i="1" dirty="0">
+              <a:solidFill>
+                <a:srgbClr val="3B7D48"/>
+              </a:solidFill>
+              <a:cs typeface="Calibri" panose="020F0502020204030204" pitchFamily="34" charset="0"/>
+            </a:endParaRPr>
           </a:p>
         </p:txBody>
       </p:sp>
@@ -5987,7 +6259,7 @@
           <p:nvPr/>
         </p:nvPicPr>
         <p:blipFill>
-          <a:blip r:embed="rId4"/>
+          <a:blip r:embed="rId3"/>
           <a:stretch>
             <a:fillRect/>
           </a:stretch>
@@ -6062,6 +6334,13 @@
               </a:rPr>
               <a:t>:</a:t>
             </a:r>
+            <a:endParaRPr lang="ru-RU" sz="1600" dirty="0">
+              <a:solidFill>
+                <a:schemeClr val="tx2"/>
+              </a:solidFill>
+              <a:latin typeface="Manrope" pitchFamily="2" charset="0"/>
+              <a:cs typeface="Calibri" panose="020F0502020204030204" pitchFamily="34" charset="0"/>
+            </a:endParaRPr>
           </a:p>
           <a:p>
             <a:pPr algn="ctr"/>
@@ -6075,6 +6354,13 @@
               </a:rPr>
               <a:t> </a:t>
             </a:r>
+            <a:endParaRPr lang="ru-RU" sz="1600" dirty="0">
+              <a:solidFill>
+                <a:schemeClr val="tx2"/>
+              </a:solidFill>
+              <a:latin typeface="Manrope" pitchFamily="2" charset="0"/>
+              <a:cs typeface="Calibri" panose="020F0502020204030204" pitchFamily="34" charset="0"/>
+            </a:endParaRPr>
           </a:p>
           <a:p>
             <a:pPr marL="154305" indent="-154305" algn="l" fontAlgn="auto">
@@ -6094,6 +6380,13 @@
               </a:rPr>
               <a:t>международным позиционированием, </a:t>
             </a:r>
+            <a:endParaRPr lang="ru-RU" sz="1500" i="1" dirty="0">
+              <a:solidFill>
+                <a:schemeClr val="tx2"/>
+              </a:solidFill>
+              <a:latin typeface="Manrope" pitchFamily="2" charset="0"/>
+              <a:cs typeface="Calibri" panose="020F0502020204030204" pitchFamily="34" charset="0"/>
+            </a:endParaRPr>
           </a:p>
           <a:p>
             <a:pPr marL="154305" indent="-154305" algn="l" fontAlgn="auto">
@@ -6113,6 +6406,13 @@
               </a:rPr>
               <a:t>региональным мандатом, </a:t>
             </a:r>
+            <a:endParaRPr lang="ru-RU" sz="1500" i="1" dirty="0">
+              <a:solidFill>
+                <a:schemeClr val="tx2"/>
+              </a:solidFill>
+              <a:latin typeface="Manrope" pitchFamily="2" charset="0"/>
+              <a:cs typeface="Calibri" panose="020F0502020204030204" pitchFamily="34" charset="0"/>
+            </a:endParaRPr>
           </a:p>
           <a:p>
             <a:pPr marL="154305" indent="-154305" algn="l" fontAlgn="auto">
@@ -6132,6 +6432,13 @@
               </a:rPr>
               <a:t>опытом реализации крупнейшего экологического мероприятия Центральной Азии, </a:t>
             </a:r>
+            <a:endParaRPr lang="ru-RU" sz="1500" i="1" dirty="0">
+              <a:solidFill>
+                <a:schemeClr val="tx2"/>
+              </a:solidFill>
+              <a:latin typeface="Manrope" pitchFamily="2" charset="0"/>
+              <a:cs typeface="Calibri" panose="020F0502020204030204" pitchFamily="34" charset="0"/>
+            </a:endParaRPr>
           </a:p>
           <a:p>
             <a:pPr marL="154305" indent="-154305" algn="l" fontAlgn="auto">
@@ -6151,6 +6458,13 @@
               </a:rPr>
               <a:t>функционированием в юрисдикции МФЦА  </a:t>
             </a:r>
+            <a:endParaRPr lang="ru-RU" sz="1500" i="1" dirty="0">
+              <a:solidFill>
+                <a:schemeClr val="tx2"/>
+              </a:solidFill>
+              <a:latin typeface="Manrope" pitchFamily="2" charset="0"/>
+              <a:cs typeface="Calibri" panose="020F0502020204030204" pitchFamily="34" charset="0"/>
+            </a:endParaRPr>
           </a:p>
           <a:p>
             <a:pPr marL="154305" indent="-154305" algn="l" fontAlgn="auto">
@@ -6170,6 +6484,13 @@
               </a:rPr>
               <a:t>сформированной сетью международных партнерств.</a:t>
             </a:r>
+            <a:endParaRPr lang="ru-RU" sz="1500" i="1" dirty="0">
+              <a:solidFill>
+                <a:schemeClr val="tx2"/>
+              </a:solidFill>
+              <a:latin typeface="Manrope" pitchFamily="2" charset="0"/>
+              <a:cs typeface="Calibri" panose="020F0502020204030204" pitchFamily="34" charset="0"/>
+            </a:endParaRPr>
           </a:p>
         </p:txBody>
       </p:sp>
@@ -6182,7 +6503,7 @@
           <p:nvPr/>
         </p:nvPicPr>
         <p:blipFill>
-          <a:blip r:embed="rId5"/>
+          <a:blip r:embed="rId4"/>
           <a:srcRect l="2128" t="15927" r="2032" b="11223"/>
           <a:stretch>
             <a:fillRect/>
@@ -6256,6 +6577,14 @@
               </a:rPr>
               <a:t>Созданная при Фонде «Сеть экспертов Центральной Азии+» позволяет обеспечивать экспертно-аналитическое сопровождение климатической, экологической и энергетической повестки региона, научно-практическое изучение отраслевых вопросов и выработки экспертных заключений, аналитики, рекомендаций и реализации программ по вопросам изменения климата, устойчивого развития и принципов ESG, зеленой энергетики и охраны окружающей среды, в т.ч. отходов, загрязнений, воздуха, деградации земель, опустынивание и т.д.</a:t>
             </a:r>
+            <a:endParaRPr lang="ru-RU" sz="1600" dirty="0">
+              <a:solidFill>
+                <a:schemeClr val="tx1"/>
+              </a:solidFill>
+              <a:latin typeface="Manrope" pitchFamily="2" charset="0"/>
+              <a:cs typeface="Calibri" panose="020F0502020204030204" pitchFamily="34" charset="0"/>
+              <a:sym typeface="+mn-ea"/>
+            </a:endParaRPr>
           </a:p>
         </p:txBody>
       </p:sp>
@@ -6293,19 +6622,7 @@
           <p:nvPr/>
         </p:nvPicPr>
         <p:blipFill>
-          <a:blip r:embed="rId2">
-            <a:extLst>
-              <a:ext uri="{BEBA8EAE-BF5A-486C-A8C5-ECC9F3942E4B}">
-                <a14:imgProps xmlns:a14="http://schemas.microsoft.com/office/drawing/2010/main">
-                  <a14:imgLayer>
-                    <a14:imgEffect>
-                      <a14:brightnessContrast bright="40000"/>
-                    </a14:imgEffect>
-                  </a14:imgLayer>
-                </a14:imgProps>
-              </a:ext>
-            </a:extLst>
-          </a:blip>
+          <a:blip r:embed="rId1"/>
           <a:srcRect l="33301" t="65431" r="13372"/>
           <a:stretch>
             <a:fillRect/>
@@ -6397,7 +6714,6 @@
                   <a:schemeClr val="bg1"/>
                 </a:solidFill>
               </a:rPr>
-              <a:t>13</a:t>
             </a:fld>
             <a:endParaRPr lang="ru-RU" dirty="0">
               <a:solidFill>
@@ -6490,6 +6806,12 @@
               </a:rPr>
               <a:t>Проектный офис для Центральной Азии </a:t>
             </a:r>
+            <a:endParaRPr lang="ru-RU" sz="1400" b="1" i="1" dirty="0">
+              <a:solidFill>
+                <a:srgbClr val="3B7D48"/>
+              </a:solidFill>
+              <a:cs typeface="Calibri" panose="020F0502020204030204" pitchFamily="34" charset="0"/>
+            </a:endParaRPr>
           </a:p>
           <a:p>
             <a:r>
@@ -6501,6 +6823,12 @@
               </a:rPr>
               <a:t>по изменению климата и зеленой энергетике</a:t>
             </a:r>
+            <a:endParaRPr lang="ru-RU" sz="1400" b="1" i="1" dirty="0">
+              <a:solidFill>
+                <a:srgbClr val="3B7D48"/>
+              </a:solidFill>
+              <a:cs typeface="Calibri" panose="020F0502020204030204" pitchFamily="34" charset="0"/>
+            </a:endParaRPr>
           </a:p>
         </p:txBody>
       </p:sp>
@@ -6513,7 +6841,7 @@
           <p:nvPr/>
         </p:nvPicPr>
         <p:blipFill>
-          <a:blip r:embed="rId3"/>
+          <a:blip r:embed="rId2"/>
           <a:stretch>
             <a:fillRect/>
           </a:stretch>
@@ -6560,6 +6888,12 @@
               </a:rPr>
               <a:t>Стратегические цели и этапы развития</a:t>
             </a:r>
+            <a:endParaRPr sz="2000" b="1">
+              <a:solidFill>
+                <a:srgbClr val="1C3E6D"/>
+              </a:solidFill>
+              <a:latin typeface="Manrope"/>
+            </a:endParaRPr>
           </a:p>
         </p:txBody>
       </p:sp>
@@ -6595,6 +6929,12 @@
               </a:rPr>
               <a:t>Цели по уставу Фонда</a:t>
             </a:r>
+            <a:endParaRPr sz="1400" b="1">
+              <a:solidFill>
+                <a:srgbClr val="3B7D48"/>
+              </a:solidFill>
+              <a:latin typeface="Manrope"/>
+            </a:endParaRPr>
           </a:p>
         </p:txBody>
       </p:sp>
@@ -6641,7 +6981,6 @@
           <a:lstStyle/>
           <a:p>
             <a:pPr algn="ctr"/>
-            <a:endParaRPr/>
           </a:p>
         </p:txBody>
       </p:sp>
@@ -6677,6 +7016,12 @@
               </a:rPr>
               <a:t>01</a:t>
             </a:r>
+            <a:endParaRPr sz="1300" b="1">
+              <a:solidFill>
+                <a:srgbClr val="FFFFFF"/>
+              </a:solidFill>
+              <a:latin typeface="Manrope"/>
+            </a:endParaRPr>
           </a:p>
         </p:txBody>
       </p:sp>
@@ -6712,6 +7057,12 @@
               </a:rPr>
               <a:t>Ускорение региональных климатических действий</a:t>
             </a:r>
+            <a:endParaRPr sz="1300" b="0">
+              <a:solidFill>
+                <a:srgbClr val="404040"/>
+              </a:solidFill>
+              <a:latin typeface="Manrope"/>
+            </a:endParaRPr>
           </a:p>
         </p:txBody>
       </p:sp>
@@ -6758,7 +7109,6 @@
           <a:lstStyle/>
           <a:p>
             <a:pPr algn="ctr"/>
-            <a:endParaRPr/>
           </a:p>
         </p:txBody>
       </p:sp>
@@ -6794,6 +7144,12 @@
               </a:rPr>
               <a:t>02</a:t>
             </a:r>
+            <a:endParaRPr sz="1300" b="1">
+              <a:solidFill>
+                <a:srgbClr val="FFFFFF"/>
+              </a:solidFill>
+              <a:latin typeface="Manrope"/>
+            </a:endParaRPr>
           </a:p>
         </p:txBody>
       </p:sp>
@@ -6829,6 +7185,12 @@
               </a:rPr>
               <a:t>Региональная климатическая политика и сотрудничество</a:t>
             </a:r>
+            <a:endParaRPr sz="1300" b="0">
+              <a:solidFill>
+                <a:srgbClr val="404040"/>
+              </a:solidFill>
+              <a:latin typeface="Manrope"/>
+            </a:endParaRPr>
           </a:p>
         </p:txBody>
       </p:sp>
@@ -6875,7 +7237,6 @@
           <a:lstStyle/>
           <a:p>
             <a:pPr algn="ctr"/>
-            <a:endParaRPr/>
           </a:p>
         </p:txBody>
       </p:sp>
@@ -6911,6 +7272,12 @@
               </a:rPr>
               <a:t>03</a:t>
             </a:r>
+            <a:endParaRPr sz="1300" b="1">
+              <a:solidFill>
+                <a:srgbClr val="FFFFFF"/>
+              </a:solidFill>
+              <a:latin typeface="Manrope"/>
+            </a:endParaRPr>
           </a:p>
         </p:txBody>
       </p:sp>
@@ -6946,6 +7313,12 @@
               </a:rPr>
               <a:t>Поддержка разработки политик и регулирования</a:t>
             </a:r>
+            <a:endParaRPr sz="1300" b="0">
+              <a:solidFill>
+                <a:srgbClr val="404040"/>
+              </a:solidFill>
+              <a:latin typeface="Manrope"/>
+            </a:endParaRPr>
           </a:p>
         </p:txBody>
       </p:sp>
@@ -6992,7 +7365,6 @@
           <a:lstStyle/>
           <a:p>
             <a:pPr algn="ctr"/>
-            <a:endParaRPr/>
           </a:p>
         </p:txBody>
       </p:sp>
@@ -7028,6 +7400,12 @@
               </a:rPr>
               <a:t>04</a:t>
             </a:r>
+            <a:endParaRPr sz="1300" b="1">
+              <a:solidFill>
+                <a:srgbClr val="FFFFFF"/>
+              </a:solidFill>
+              <a:latin typeface="Manrope"/>
+            </a:endParaRPr>
           </a:p>
         </p:txBody>
       </p:sp>
@@ -7063,6 +7441,12 @@
               </a:rPr>
               <a:t>Исследования и инновации</a:t>
             </a:r>
+            <a:endParaRPr sz="1300" b="0">
+              <a:solidFill>
+                <a:srgbClr val="404040"/>
+              </a:solidFill>
+              <a:latin typeface="Manrope"/>
+            </a:endParaRPr>
           </a:p>
         </p:txBody>
       </p:sp>
@@ -7109,7 +7493,6 @@
           <a:lstStyle/>
           <a:p>
             <a:pPr algn="ctr"/>
-            <a:endParaRPr/>
           </a:p>
         </p:txBody>
       </p:sp>
@@ -7145,6 +7528,12 @@
               </a:rPr>
               <a:t>05</a:t>
             </a:r>
+            <a:endParaRPr sz="1300" b="1">
+              <a:solidFill>
+                <a:srgbClr val="FFFFFF"/>
+              </a:solidFill>
+              <a:latin typeface="Manrope"/>
+            </a:endParaRPr>
           </a:p>
         </p:txBody>
       </p:sp>
@@ -7180,6 +7569,12 @@
               </a:rPr>
               <a:t>Партнёрства с МФИ, НПО, бизнесом и наукой</a:t>
             </a:r>
+            <a:endParaRPr sz="1300" b="0">
+              <a:solidFill>
+                <a:srgbClr val="404040"/>
+              </a:solidFill>
+              <a:latin typeface="Manrope"/>
+            </a:endParaRPr>
           </a:p>
         </p:txBody>
       </p:sp>
@@ -7226,7 +7621,6 @@
           <a:lstStyle/>
           <a:p>
             <a:pPr algn="ctr"/>
-            <a:endParaRPr/>
           </a:p>
         </p:txBody>
       </p:sp>
@@ -7262,6 +7656,12 @@
               </a:rPr>
               <a:t>06</a:t>
             </a:r>
+            <a:endParaRPr sz="1300" b="1">
+              <a:solidFill>
+                <a:srgbClr val="FFFFFF"/>
+              </a:solidFill>
+              <a:latin typeface="Manrope"/>
+            </a:endParaRPr>
           </a:p>
         </p:txBody>
       </p:sp>
@@ -7297,6 +7697,12 @@
               </a:rPr>
               <a:t>Климатические данные и наука</a:t>
             </a:r>
+            <a:endParaRPr sz="1300" b="0">
+              <a:solidFill>
+                <a:srgbClr val="404040"/>
+              </a:solidFill>
+              <a:latin typeface="Manrope"/>
+            </a:endParaRPr>
           </a:p>
         </p:txBody>
       </p:sp>
@@ -7343,7 +7749,6 @@
           <a:lstStyle/>
           <a:p>
             <a:pPr algn="ctr"/>
-            <a:endParaRPr/>
           </a:p>
         </p:txBody>
       </p:sp>
@@ -7379,6 +7784,12 @@
               </a:rPr>
               <a:t>07</a:t>
             </a:r>
+            <a:endParaRPr sz="1300" b="1">
+              <a:solidFill>
+                <a:srgbClr val="FFFFFF"/>
+              </a:solidFill>
+              <a:latin typeface="Manrope"/>
+            </a:endParaRPr>
           </a:p>
         </p:txBody>
       </p:sp>
@@ -7414,6 +7825,12 @@
               </a:rPr>
               <a:t>Повышение осведомлённости и развитие потенциала</a:t>
             </a:r>
+            <a:endParaRPr sz="1300" b="0">
+              <a:solidFill>
+                <a:srgbClr val="404040"/>
+              </a:solidFill>
+              <a:latin typeface="Manrope"/>
+            </a:endParaRPr>
           </a:p>
         </p:txBody>
       </p:sp>
@@ -7449,6 +7866,12 @@
               </a:rPr>
               <a:t>Стратегия 2026–2035</a:t>
             </a:r>
+            <a:endParaRPr sz="1400" b="1">
+              <a:solidFill>
+                <a:srgbClr val="3B7D48"/>
+              </a:solidFill>
+              <a:latin typeface="Manrope"/>
+            </a:endParaRPr>
           </a:p>
         </p:txBody>
       </p:sp>
@@ -7495,7 +7918,6 @@
           <a:lstStyle/>
           <a:p>
             <a:pPr algn="ctr"/>
-            <a:endParaRPr/>
           </a:p>
         </p:txBody>
       </p:sp>
@@ -7540,7 +7962,6 @@
           <a:lstStyle/>
           <a:p>
             <a:pPr algn="ctr"/>
-            <a:endParaRPr/>
           </a:p>
         </p:txBody>
       </p:sp>
@@ -7576,6 +7997,12 @@
               </a:rPr>
               <a:t>2026–2027</a:t>
             </a:r>
+            <a:endParaRPr sz="1800" b="1">
+              <a:solidFill>
+                <a:srgbClr val="156082"/>
+              </a:solidFill>
+              <a:latin typeface="Manrope"/>
+            </a:endParaRPr>
           </a:p>
         </p:txBody>
       </p:sp>
@@ -7611,6 +8038,12 @@
               </a:rPr>
               <a:t>Устойчивость и проектный портфель</a:t>
             </a:r>
+            <a:endParaRPr sz="1400" b="1">
+              <a:solidFill>
+                <a:srgbClr val="1C3E6D"/>
+              </a:solidFill>
+              <a:latin typeface="Manrope"/>
+            </a:endParaRPr>
           </a:p>
         </p:txBody>
       </p:sp>
@@ -7646,6 +8079,12 @@
               </a:rPr>
               <a:t>Сопровождение решений РЭС, ESG, «Таза Қазақстан», сеть экспертов, международное сотрудничество, тендеры и гранты</a:t>
             </a:r>
+            <a:endParaRPr sz="1200" b="0">
+              <a:solidFill>
+                <a:srgbClr val="404040"/>
+              </a:solidFill>
+              <a:latin typeface="Manrope"/>
+            </a:endParaRPr>
           </a:p>
         </p:txBody>
       </p:sp>
@@ -7692,7 +8131,6 @@
           <a:lstStyle/>
           <a:p>
             <a:pPr algn="ctr"/>
-            <a:endParaRPr/>
           </a:p>
         </p:txBody>
       </p:sp>
@@ -7737,7 +8175,6 @@
           <a:lstStyle/>
           <a:p>
             <a:pPr algn="ctr"/>
-            <a:endParaRPr/>
           </a:p>
         </p:txBody>
       </p:sp>
@@ -7773,6 +8210,12 @@
               </a:rPr>
               <a:t>до 2028</a:t>
             </a:r>
+            <a:endParaRPr sz="1800" b="1">
+              <a:solidFill>
+                <a:srgbClr val="1C3E6D"/>
+              </a:solidFill>
+              <a:latin typeface="Manrope"/>
+            </a:endParaRPr>
           </a:p>
         </p:txBody>
       </p:sp>
@@ -7808,6 +8251,12 @@
               </a:rPr>
               <a:t>«Зелёный Think Tank» Центральной Азии</a:t>
             </a:r>
+            <a:endParaRPr sz="1400" b="1">
+              <a:solidFill>
+                <a:srgbClr val="1C3E6D"/>
+              </a:solidFill>
+              <a:latin typeface="Manrope"/>
+            </a:endParaRPr>
           </a:p>
         </p:txBody>
       </p:sp>
@@ -7843,6 +8292,12 @@
               </a:rPr>
               <a:t>Собственная аналитическая платформа, регулярная аналитика, признанный центр компетенций региона</a:t>
             </a:r>
+            <a:endParaRPr sz="1200" b="0">
+              <a:solidFill>
+                <a:srgbClr val="404040"/>
+              </a:solidFill>
+              <a:latin typeface="Manrope"/>
+            </a:endParaRPr>
           </a:p>
         </p:txBody>
       </p:sp>
@@ -7889,7 +8344,6 @@
           <a:lstStyle/>
           <a:p>
             <a:pPr algn="ctr"/>
-            <a:endParaRPr/>
           </a:p>
         </p:txBody>
       </p:sp>
@@ -7934,7 +8388,6 @@
           <a:lstStyle/>
           <a:p>
             <a:pPr algn="ctr"/>
-            <a:endParaRPr/>
           </a:p>
         </p:txBody>
       </p:sp>
@@ -7970,6 +8423,12 @@
               </a:rPr>
               <a:t>до 2035</a:t>
             </a:r>
+            <a:endParaRPr sz="1800" b="1">
+              <a:solidFill>
+                <a:srgbClr val="C99A1E"/>
+              </a:solidFill>
+              <a:latin typeface="Manrope"/>
+            </a:endParaRPr>
           </a:p>
         </p:txBody>
       </p:sp>
@@ -8005,6 +8464,12 @@
               </a:rPr>
               <a:t>«Суперфонд»</a:t>
             </a:r>
+            <a:endParaRPr sz="1400" b="1">
+              <a:solidFill>
+                <a:srgbClr val="1C3E6D"/>
+              </a:solidFill>
+              <a:latin typeface="Manrope"/>
+            </a:endParaRPr>
           </a:p>
         </p:txBody>
       </p:sp>
@@ -8040,6 +8505,12 @@
               </a:rPr>
               <a:t>Ведущая региональная платформа: ключевой партнёр международных организаций, оператор климатического финансирования, центр координации экологической повестки</a:t>
             </a:r>
+            <a:endParaRPr sz="1200" b="0">
+              <a:solidFill>
+                <a:srgbClr val="404040"/>
+              </a:solidFill>
+              <a:latin typeface="Manrope"/>
+            </a:endParaRPr>
           </a:p>
         </p:txBody>
       </p:sp>
@@ -8077,19 +8548,7 @@
           <p:nvPr/>
         </p:nvPicPr>
         <p:blipFill>
-          <a:blip r:embed="rId2">
-            <a:extLst>
-              <a:ext uri="{BEBA8EAE-BF5A-486C-A8C5-ECC9F3942E4B}">
-                <a14:imgProps xmlns:a14="http://schemas.microsoft.com/office/drawing/2010/main">
-                  <a14:imgLayer>
-                    <a14:imgEffect>
-                      <a14:brightnessContrast bright="40000"/>
-                    </a14:imgEffect>
-                  </a14:imgLayer>
-                </a14:imgProps>
-              </a:ext>
-            </a:extLst>
-          </a:blip>
+          <a:blip r:embed="rId1"/>
           <a:srcRect l="33301" t="65431" r="13372"/>
           <a:stretch>
             <a:fillRect/>
@@ -8181,7 +8640,6 @@
                   <a:schemeClr val="bg1"/>
                 </a:solidFill>
               </a:rPr>
-              <a:t>14</a:t>
             </a:fld>
             <a:endParaRPr lang="ru-RU" dirty="0">
               <a:solidFill>
@@ -8274,6 +8732,12 @@
               </a:rPr>
               <a:t>Проектный офис для Центральной Азии </a:t>
             </a:r>
+            <a:endParaRPr lang="ru-RU" sz="1400" b="1" i="1" dirty="0">
+              <a:solidFill>
+                <a:srgbClr val="3B7D48"/>
+              </a:solidFill>
+              <a:cs typeface="Calibri" panose="020F0502020204030204" pitchFamily="34" charset="0"/>
+            </a:endParaRPr>
           </a:p>
           <a:p>
             <a:r>
@@ -8285,6 +8749,12 @@
               </a:rPr>
               <a:t>по изменению климата и зеленой энергетике</a:t>
             </a:r>
+            <a:endParaRPr lang="ru-RU" sz="1400" b="1" i="1" dirty="0">
+              <a:solidFill>
+                <a:srgbClr val="3B7D48"/>
+              </a:solidFill>
+              <a:cs typeface="Calibri" panose="020F0502020204030204" pitchFamily="34" charset="0"/>
+            </a:endParaRPr>
           </a:p>
         </p:txBody>
       </p:sp>
@@ -8297,7 +8767,7 @@
           <p:nvPr/>
         </p:nvPicPr>
         <p:blipFill>
-          <a:blip r:embed="rId3"/>
+          <a:blip r:embed="rId2"/>
           <a:stretch>
             <a:fillRect/>
           </a:stretch>
@@ -8344,6 +8814,12 @@
               </a:rPr>
               <a:t>Направления деятельности</a:t>
             </a:r>
+            <a:endParaRPr sz="2000" b="1">
+              <a:solidFill>
+                <a:srgbClr val="1C3E6D"/>
+              </a:solidFill>
+              <a:latin typeface="Manrope"/>
+            </a:endParaRPr>
           </a:p>
         </p:txBody>
       </p:sp>
@@ -8379,6 +8855,12 @@
               </a:rPr>
               <a:t>Действующие направления</a:t>
             </a:r>
+            <a:endParaRPr sz="1400" b="1">
+              <a:solidFill>
+                <a:srgbClr val="3B7D48"/>
+              </a:solidFill>
+              <a:latin typeface="Manrope"/>
+            </a:endParaRPr>
           </a:p>
         </p:txBody>
       </p:sp>
@@ -8425,7 +8907,6 @@
           <a:lstStyle/>
           <a:p>
             <a:pPr algn="ctr"/>
-            <a:endParaRPr/>
           </a:p>
         </p:txBody>
       </p:sp>
@@ -8470,7 +8951,6 @@
           <a:lstStyle/>
           <a:p>
             <a:pPr algn="ctr"/>
-            <a:endParaRPr/>
           </a:p>
         </p:txBody>
       </p:sp>
@@ -8506,6 +8986,12 @@
               </a:rPr>
               <a:t>Региональный экологический саммит</a:t>
             </a:r>
+            <a:endParaRPr sz="1300" b="1">
+              <a:solidFill>
+                <a:srgbClr val="3B7D48"/>
+              </a:solidFill>
+              <a:latin typeface="Manrope"/>
+            </a:endParaRPr>
           </a:p>
         </p:txBody>
       </p:sp>
@@ -8518,7 +9004,7 @@
         <p:spPr>
           <a:xfrm>
             <a:off x="360000" y="2196000"/>
-            <a:ext cx="3564000" cy="702000"/>
+            <a:ext cx="3564000" cy="566420"/>
           </a:xfrm>
           <a:prstGeom prst="rect">
             <a:avLst/>
@@ -8537,14 +9023,29 @@
               </a:spcAft>
             </a:pPr>
             <a:r>
+              <a:rPr sz="1150" b="1">
+                <a:solidFill>
+                  <a:srgbClr val="404040"/>
+                </a:solidFill>
+                <a:latin typeface="Manrope"/>
+              </a:rPr>
+              <a:t>Сопровождение </a:t>
+            </a:r>
+            <a:r>
               <a:rPr sz="1150" b="0">
                 <a:solidFill>
                   <a:srgbClr val="404040"/>
                 </a:solidFill>
                 <a:latin typeface="Manrope"/>
               </a:rPr>
-              <a:t>Сопровождение решений и инициатив РЭС-2026: 58 сессий как портфель проектов и программ</a:t>
-            </a:r>
+              <a:t>решений и инициатив РЭС-2026: 58 сессий как портфель проектов и программ</a:t>
+            </a:r>
+            <a:endParaRPr sz="1150" b="0">
+              <a:solidFill>
+                <a:srgbClr val="404040"/>
+              </a:solidFill>
+              <a:latin typeface="Manrope"/>
+            </a:endParaRPr>
           </a:p>
         </p:txBody>
       </p:sp>
@@ -8591,7 +9092,6 @@
           <a:lstStyle/>
           <a:p>
             <a:pPr algn="ctr"/>
-            <a:endParaRPr/>
           </a:p>
         </p:txBody>
       </p:sp>
@@ -8636,7 +9136,6 @@
           <a:lstStyle/>
           <a:p>
             <a:pPr algn="ctr"/>
-            <a:endParaRPr/>
           </a:p>
         </p:txBody>
       </p:sp>
@@ -8672,6 +9171,12 @@
               </a:rPr>
               <a:t>«Таза Қазақстан»</a:t>
             </a:r>
+            <a:endParaRPr sz="1300" b="1">
+              <a:solidFill>
+                <a:srgbClr val="156082"/>
+              </a:solidFill>
+              <a:latin typeface="Manrope"/>
+            </a:endParaRPr>
           </a:p>
         </p:txBody>
       </p:sp>
@@ -8684,7 +9189,7 @@
         <p:spPr>
           <a:xfrm>
             <a:off x="4284000" y="2196000"/>
-            <a:ext cx="3564000" cy="702000"/>
+            <a:ext cx="3564000" cy="566420"/>
           </a:xfrm>
           <a:prstGeom prst="rect">
             <a:avLst/>
@@ -8709,8 +9214,32 @@
                 </a:solidFill>
                 <a:latin typeface="Manrope"/>
               </a:rPr>
-              <a:t>Проектный офис и оператор мероприятий инициативы; адаптация практик для стран Центральной Азии</a:t>
-            </a:r>
+              <a:t>Проектный офис и </a:t>
+            </a:r>
+            <a:r>
+              <a:rPr sz="1150" b="1">
+                <a:solidFill>
+                  <a:srgbClr val="404040"/>
+                </a:solidFill>
+                <a:latin typeface="Manrope"/>
+              </a:rPr>
+              <a:t>оператор </a:t>
+            </a:r>
+            <a:r>
+              <a:rPr sz="1150" b="0">
+                <a:solidFill>
+                  <a:srgbClr val="404040"/>
+                </a:solidFill>
+                <a:latin typeface="Manrope"/>
+              </a:rPr>
+              <a:t>мероприятий инициативы; адаптация практик для стран Центральной Азии</a:t>
+            </a:r>
+            <a:endParaRPr sz="1150" b="0">
+              <a:solidFill>
+                <a:srgbClr val="404040"/>
+              </a:solidFill>
+              <a:latin typeface="Manrope"/>
+            </a:endParaRPr>
           </a:p>
         </p:txBody>
       </p:sp>
@@ -8757,7 +9286,6 @@
           <a:lstStyle/>
           <a:p>
             <a:pPr algn="ctr"/>
-            <a:endParaRPr/>
           </a:p>
         </p:txBody>
       </p:sp>
@@ -8802,7 +9330,6 @@
           <a:lstStyle/>
           <a:p>
             <a:pPr algn="ctr"/>
-            <a:endParaRPr/>
           </a:p>
         </p:txBody>
       </p:sp>
@@ -8838,6 +9365,12 @@
               </a:rPr>
               <a:t>ESG</a:t>
             </a:r>
+            <a:endParaRPr sz="1300" b="1">
+              <a:solidFill>
+                <a:srgbClr val="1C3E6D"/>
+              </a:solidFill>
+              <a:latin typeface="Manrope"/>
+            </a:endParaRPr>
           </a:p>
         </p:txBody>
       </p:sp>
@@ -8850,7 +9383,7 @@
         <p:spPr>
           <a:xfrm>
             <a:off x="8208000" y="2196000"/>
-            <a:ext cx="3564000" cy="702000"/>
+            <a:ext cx="3564000" cy="742950"/>
           </a:xfrm>
           <a:prstGeom prst="rect">
             <a:avLst/>
@@ -8875,8 +9408,32 @@
                 </a:solidFill>
                 <a:latin typeface="Manrope"/>
               </a:rPr>
-              <a:t>Методическая поддержка, оценка, консультирование и обучение по устойчивому развитию и раскрытию нефинансовой информации</a:t>
-            </a:r>
+              <a:t>Методическая поддержка, </a:t>
+            </a:r>
+            <a:r>
+              <a:rPr sz="1150" b="1">
+                <a:solidFill>
+                  <a:srgbClr val="404040"/>
+                </a:solidFill>
+                <a:latin typeface="Manrope"/>
+              </a:rPr>
+              <a:t>оценка</a:t>
+            </a:r>
+            <a:r>
+              <a:rPr sz="1150" b="0">
+                <a:solidFill>
+                  <a:srgbClr val="404040"/>
+                </a:solidFill>
+                <a:latin typeface="Manrope"/>
+              </a:rPr>
+              <a:t>, консультирование и обучение по устойчивому развитию и раскрытию нефинансовой информации</a:t>
+            </a:r>
+            <a:endParaRPr sz="1150" b="0">
+              <a:solidFill>
+                <a:srgbClr val="404040"/>
+              </a:solidFill>
+              <a:latin typeface="Manrope"/>
+            </a:endParaRPr>
           </a:p>
         </p:txBody>
       </p:sp>
@@ -8923,7 +9480,6 @@
           <a:lstStyle/>
           <a:p>
             <a:pPr algn="ctr"/>
-            <a:endParaRPr/>
           </a:p>
         </p:txBody>
       </p:sp>
@@ -8968,7 +9524,6 @@
           <a:lstStyle/>
           <a:p>
             <a:pPr algn="ctr"/>
-            <a:endParaRPr/>
           </a:p>
         </p:txBody>
       </p:sp>
@@ -9004,6 +9559,12 @@
               </a:rPr>
               <a:t>Климатические и экологические риски</a:t>
             </a:r>
+            <a:endParaRPr sz="1300" b="1">
+              <a:solidFill>
+                <a:srgbClr val="156082"/>
+              </a:solidFill>
+              <a:latin typeface="Manrope"/>
+            </a:endParaRPr>
           </a:p>
         </p:txBody>
       </p:sp>
@@ -9016,7 +9577,7 @@
         <p:spPr>
           <a:xfrm>
             <a:off x="360000" y="3546000"/>
-            <a:ext cx="3564000" cy="702000"/>
+            <a:ext cx="3564000" cy="566420"/>
           </a:xfrm>
           <a:prstGeom prst="rect">
             <a:avLst/>
@@ -9035,14 +9596,29 @@
               </a:spcAft>
             </a:pPr>
             <a:r>
+              <a:rPr sz="1150" b="1">
+                <a:solidFill>
+                  <a:srgbClr val="404040"/>
+                </a:solidFill>
+                <a:latin typeface="Manrope"/>
+              </a:rPr>
+              <a:t>Оценка </a:t>
+            </a:r>
+            <a:r>
               <a:rPr sz="1150" b="0">
                 <a:solidFill>
                   <a:srgbClr val="404040"/>
                 </a:solidFill>
                 <a:latin typeface="Manrope"/>
               </a:rPr>
-              <a:t>Оценка физических и переходных рисков для государственных органов, организаций и инвесторов</a:t>
-            </a:r>
+              <a:t>физических и переходных рисков для государственных органов, организаций и инвесторов</a:t>
+            </a:r>
+            <a:endParaRPr sz="1150" b="0">
+              <a:solidFill>
+                <a:srgbClr val="404040"/>
+              </a:solidFill>
+              <a:latin typeface="Manrope"/>
+            </a:endParaRPr>
           </a:p>
         </p:txBody>
       </p:sp>
@@ -9089,7 +9665,6 @@
           <a:lstStyle/>
           <a:p>
             <a:pPr algn="ctr"/>
-            <a:endParaRPr/>
           </a:p>
         </p:txBody>
       </p:sp>
@@ -9134,7 +9709,6 @@
           <a:lstStyle/>
           <a:p>
             <a:pPr algn="ctr"/>
-            <a:endParaRPr/>
           </a:p>
         </p:txBody>
       </p:sp>
@@ -9170,6 +9744,12 @@
               </a:rPr>
               <a:t>Аналитика и «Зелёный Think Tank»</a:t>
             </a:r>
+            <a:endParaRPr sz="1300" b="1">
+              <a:solidFill>
+                <a:srgbClr val="1C3E6D"/>
+              </a:solidFill>
+              <a:latin typeface="Manrope"/>
+            </a:endParaRPr>
           </a:p>
         </p:txBody>
       </p:sp>
@@ -9182,7 +9762,7 @@
         <p:spPr>
           <a:xfrm>
             <a:off x="4284000" y="3546000"/>
-            <a:ext cx="3564000" cy="702000"/>
+            <a:ext cx="3564000" cy="566420"/>
           </a:xfrm>
           <a:prstGeom prst="rect">
             <a:avLst/>
@@ -9201,14 +9781,29 @@
               </a:spcAft>
             </a:pPr>
             <a:r>
+              <a:rPr sz="1150" b="1">
+                <a:solidFill>
+                  <a:srgbClr val="404040"/>
+                </a:solidFill>
+                <a:latin typeface="Manrope"/>
+              </a:rPr>
+              <a:t>Обзоры </a:t>
+            </a:r>
+            <a:r>
               <a:rPr sz="1150" b="0">
                 <a:solidFill>
                   <a:srgbClr val="404040"/>
                 </a:solidFill>
                 <a:latin typeface="Manrope"/>
               </a:rPr>
-              <a:t>Обзоры по Центральной Азии, аналитика по «Таза Қазақстан», климатические риски, ежегодные доклады; сеть экспертов ЦА+</a:t>
-            </a:r>
+              <a:t>по Центральной Азии, аналитика по «Таза Қазақстан», климатические риски, ежегодные доклады; сеть экспертов ЦА+</a:t>
+            </a:r>
+            <a:endParaRPr sz="1150" b="0">
+              <a:solidFill>
+                <a:srgbClr val="404040"/>
+              </a:solidFill>
+              <a:latin typeface="Manrope"/>
+            </a:endParaRPr>
           </a:p>
         </p:txBody>
       </p:sp>
@@ -9255,7 +9850,6 @@
           <a:lstStyle/>
           <a:p>
             <a:pPr algn="ctr"/>
-            <a:endParaRPr/>
           </a:p>
         </p:txBody>
       </p:sp>
@@ -9300,7 +9894,6 @@
           <a:lstStyle/>
           <a:p>
             <a:pPr algn="ctr"/>
-            <a:endParaRPr/>
           </a:p>
         </p:txBody>
       </p:sp>
@@ -9336,6 +9929,12 @@
               </a:rPr>
               <a:t>Обучение</a:t>
             </a:r>
+            <a:endParaRPr sz="1300" b="1">
+              <a:solidFill>
+                <a:srgbClr val="C99A1E"/>
+              </a:solidFill>
+              <a:latin typeface="Manrope"/>
+            </a:endParaRPr>
           </a:p>
         </p:txBody>
       </p:sp>
@@ -9348,7 +9947,7 @@
         <p:spPr>
           <a:xfrm>
             <a:off x="8208000" y="3546000"/>
-            <a:ext cx="3564000" cy="702000"/>
+            <a:ext cx="3564000" cy="566420"/>
           </a:xfrm>
           <a:prstGeom prst="rect">
             <a:avLst/>
@@ -9367,14 +9966,29 @@
               </a:spcAft>
             </a:pPr>
             <a:r>
+              <a:rPr sz="1150" b="1">
+                <a:solidFill>
+                  <a:srgbClr val="404040"/>
+                </a:solidFill>
+                <a:latin typeface="Manrope"/>
+              </a:rPr>
+              <a:t>Учебный центр Фонда</a:t>
+            </a:r>
+            <a:r>
               <a:rPr sz="1150" b="0">
                 <a:solidFill>
                   <a:srgbClr val="404040"/>
                 </a:solidFill>
                 <a:latin typeface="Manrope"/>
               </a:rPr>
-              <a:t>Учебный центр Фонда: обучение и повышение квалификации по экологии, климату, устойчивому развитию и ESG</a:t>
-            </a:r>
+              <a:t>: обучение и повышение квалификации по экологии, климату, устойчивому развитию и ESG</a:t>
+            </a:r>
+            <a:endParaRPr sz="1150" b="0">
+              <a:solidFill>
+                <a:srgbClr val="404040"/>
+              </a:solidFill>
+              <a:latin typeface="Manrope"/>
+            </a:endParaRPr>
           </a:p>
         </p:txBody>
       </p:sp>
@@ -9410,6 +10024,12 @@
               </a:rPr>
               <a:t>Перспективные направления</a:t>
             </a:r>
+            <a:endParaRPr sz="1400" b="1">
+              <a:solidFill>
+                <a:srgbClr val="3B7D48"/>
+              </a:solidFill>
+              <a:latin typeface="Manrope"/>
+            </a:endParaRPr>
           </a:p>
         </p:txBody>
       </p:sp>
@@ -9456,7 +10076,6 @@
           <a:lstStyle/>
           <a:p>
             <a:pPr algn="ctr"/>
-            <a:endParaRPr/>
           </a:p>
         </p:txBody>
       </p:sp>
@@ -9501,7 +10120,6 @@
           <a:lstStyle/>
           <a:p>
             <a:pPr algn="ctr"/>
-            <a:endParaRPr/>
           </a:p>
         </p:txBody>
       </p:sp>
@@ -9537,6 +10155,12 @@
               </a:rPr>
               <a:t>Офсеты и климатическое финансирование</a:t>
             </a:r>
+            <a:endParaRPr sz="1200" b="1">
+              <a:solidFill>
+                <a:srgbClr val="3B7D48"/>
+              </a:solidFill>
+              <a:latin typeface="Manrope"/>
+            </a:endParaRPr>
           </a:p>
         </p:txBody>
       </p:sp>
@@ -9576,6 +10200,12 @@
               </a:rPr>
               <a:t>Отбор и сопровождение офсетных проектов, привлечение климатического и грантового финансирования</a:t>
             </a:r>
+            <a:endParaRPr sz="1100" b="0">
+              <a:solidFill>
+                <a:srgbClr val="404040"/>
+              </a:solidFill>
+              <a:latin typeface="Manrope"/>
+            </a:endParaRPr>
           </a:p>
         </p:txBody>
       </p:sp>
@@ -9622,7 +10252,6 @@
           <a:lstStyle/>
           <a:p>
             <a:pPr algn="ctr"/>
-            <a:endParaRPr/>
           </a:p>
         </p:txBody>
       </p:sp>
@@ -9667,7 +10296,6 @@
           <a:lstStyle/>
           <a:p>
             <a:pPr algn="ctr"/>
-            <a:endParaRPr/>
           </a:p>
         </p:txBody>
       </p:sp>
@@ -9703,6 +10331,12 @@
               </a:rPr>
               <a:t>Озоновый центр</a:t>
             </a:r>
+            <a:endParaRPr sz="1200" b="1">
+              <a:solidFill>
+                <a:srgbClr val="156082"/>
+              </a:solidFill>
+              <a:latin typeface="Manrope"/>
+            </a:endParaRPr>
           </a:p>
         </p:txBody>
       </p:sp>
@@ -9742,6 +10376,12 @@
               </a:rPr>
               <a:t>Мониторинг озоноразрушающих веществ, техническая поддержка, проекты</a:t>
             </a:r>
+            <a:endParaRPr sz="1100" b="0">
+              <a:solidFill>
+                <a:srgbClr val="404040"/>
+              </a:solidFill>
+              <a:latin typeface="Manrope"/>
+            </a:endParaRPr>
           </a:p>
         </p:txBody>
       </p:sp>
@@ -9788,7 +10428,6 @@
           <a:lstStyle/>
           <a:p>
             <a:pPr algn="ctr"/>
-            <a:endParaRPr/>
           </a:p>
         </p:txBody>
       </p:sp>
@@ -9833,7 +10472,6 @@
           <a:lstStyle/>
           <a:p>
             <a:pPr algn="ctr"/>
-            <a:endParaRPr/>
           </a:p>
         </p:txBody>
       </p:sp>
@@ -9869,6 +10507,12 @@
               </a:rPr>
               <a:t>«Зелёные школы» с ЮНИСЕФ</a:t>
             </a:r>
+            <a:endParaRPr sz="1200" b="1">
+              <a:solidFill>
+                <a:srgbClr val="1C3E6D"/>
+              </a:solidFill>
+              <a:latin typeface="Manrope"/>
+            </a:endParaRPr>
           </a:p>
         </p:txBody>
       </p:sp>
@@ -9908,6 +10552,12 @@
               </a:rPr>
               <a:t>Региональная координация программы в Центральной Азии, волонтёрство, экологическое просвещение</a:t>
             </a:r>
+            <a:endParaRPr sz="1100" b="0">
+              <a:solidFill>
+                <a:srgbClr val="404040"/>
+              </a:solidFill>
+              <a:latin typeface="Manrope"/>
+            </a:endParaRPr>
           </a:p>
         </p:txBody>
       </p:sp>
@@ -9954,7 +10604,6 @@
           <a:lstStyle/>
           <a:p>
             <a:pPr algn="ctr"/>
-            <a:endParaRPr/>
           </a:p>
         </p:txBody>
       </p:sp>
@@ -9999,7 +10648,6 @@
           <a:lstStyle/>
           <a:p>
             <a:pPr algn="ctr"/>
-            <a:endParaRPr/>
           </a:p>
         </p:txBody>
       </p:sp>
@@ -10035,6 +10683,12 @@
               </a:rPr>
               <a:t>Цифровые решения</a:t>
             </a:r>
+            <a:endParaRPr sz="1200" b="1">
+              <a:solidFill>
+                <a:srgbClr val="C99A1E"/>
+              </a:solidFill>
+              <a:latin typeface="Manrope"/>
+            </a:endParaRPr>
           </a:p>
         </p:txBody>
       </p:sp>
@@ -10074,6 +10728,12 @@
               </a:rPr>
               <a:t>Платформы на основе ИИ и ГИС для мониторинга экологических и климатических данных</a:t>
             </a:r>
+            <a:endParaRPr sz="1100" b="0">
+              <a:solidFill>
+                <a:srgbClr val="404040"/>
+              </a:solidFill>
+              <a:latin typeface="Manrope"/>
+            </a:endParaRPr>
           </a:p>
         </p:txBody>
       </p:sp>
@@ -10111,19 +10771,7 @@
           <p:nvPr/>
         </p:nvPicPr>
         <p:blipFill>
-          <a:blip r:embed="rId2">
-            <a:extLst>
-              <a:ext uri="{BEBA8EAE-BF5A-486C-A8C5-ECC9F3942E4B}">
-                <a14:imgProps xmlns:a14="http://schemas.microsoft.com/office/drawing/2010/main">
-                  <a14:imgLayer>
-                    <a14:imgEffect>
-                      <a14:brightnessContrast bright="40000"/>
-                    </a14:imgEffect>
-                  </a14:imgLayer>
-                </a14:imgProps>
-              </a:ext>
-            </a:extLst>
-          </a:blip>
+          <a:blip r:embed="rId1"/>
           <a:srcRect l="33301" t="65431" r="13372"/>
           <a:stretch>
             <a:fillRect/>
@@ -10215,7 +10863,6 @@
                   <a:schemeClr val="bg1"/>
                 </a:solidFill>
               </a:rPr>
-              <a:t>15</a:t>
             </a:fld>
             <a:endParaRPr lang="ru-RU" dirty="0">
               <a:solidFill>
@@ -10308,6 +10955,12 @@
               </a:rPr>
               <a:t>Проектный офис для Центральной Азии </a:t>
             </a:r>
+            <a:endParaRPr lang="ru-RU" sz="1400" b="1" i="1" dirty="0">
+              <a:solidFill>
+                <a:srgbClr val="3B7D48"/>
+              </a:solidFill>
+              <a:cs typeface="Calibri" panose="020F0502020204030204" pitchFamily="34" charset="0"/>
+            </a:endParaRPr>
           </a:p>
           <a:p>
             <a:r>
@@ -10319,6 +10972,12 @@
               </a:rPr>
               <a:t>по изменению климата и зеленой энергетике</a:t>
             </a:r>
+            <a:endParaRPr lang="ru-RU" sz="1400" b="1" i="1" dirty="0">
+              <a:solidFill>
+                <a:srgbClr val="3B7D48"/>
+              </a:solidFill>
+              <a:cs typeface="Calibri" panose="020F0502020204030204" pitchFamily="34" charset="0"/>
+            </a:endParaRPr>
           </a:p>
         </p:txBody>
       </p:sp>
@@ -10331,7 +10990,7 @@
           <p:nvPr/>
         </p:nvPicPr>
         <p:blipFill>
-          <a:blip r:embed="rId3"/>
+          <a:blip r:embed="rId2"/>
           <a:stretch>
             <a:fillRect/>
           </a:stretch>
@@ -10378,6 +11037,12 @@
               </a:rPr>
               <a:t>Проектный офис «Таза Қазақстан» на базе Фонда</a:t>
             </a:r>
+            <a:endParaRPr sz="2000" b="1">
+              <a:solidFill>
+                <a:srgbClr val="1C3E6D"/>
+              </a:solidFill>
+              <a:latin typeface="Manrope"/>
+            </a:endParaRPr>
           </a:p>
         </p:txBody>
       </p:sp>
@@ -10424,7 +11089,6 @@
           <a:lstStyle/>
           <a:p>
             <a:pPr algn="ctr"/>
-            <a:endParaRPr/>
           </a:p>
         </p:txBody>
       </p:sp>
@@ -10469,7 +11133,6 @@
           <a:lstStyle/>
           <a:p>
             <a:pPr algn="ctr"/>
-            <a:endParaRPr/>
           </a:p>
         </p:txBody>
       </p:sp>
@@ -10514,6 +11177,12 @@
               </a:rPr>
               <a:t>Эту задачу на национальном уровне решает инициатива Главы государства «Таза Қазақстан».</a:t>
             </a:r>
+            <a:endParaRPr sz="1400" b="1">
+              <a:solidFill>
+                <a:srgbClr val="1C3E6D"/>
+              </a:solidFill>
+              <a:latin typeface="Manrope"/>
+            </a:endParaRPr>
           </a:p>
         </p:txBody>
       </p:sp>
@@ -10560,7 +11229,6 @@
           <a:lstStyle/>
           <a:p>
             <a:pPr algn="ctr"/>
-            <a:endParaRPr/>
           </a:p>
         </p:txBody>
       </p:sp>
@@ -10605,7 +11273,6 @@
           <a:lstStyle/>
           <a:p>
             <a:pPr algn="ctr"/>
-            <a:endParaRPr/>
           </a:p>
         </p:txBody>
       </p:sp>
@@ -10641,6 +11308,12 @@
               </a:rPr>
               <a:t>МЭПР</a:t>
             </a:r>
+            <a:endParaRPr sz="1500" b="1">
+              <a:solidFill>
+                <a:srgbClr val="3B7D48"/>
+              </a:solidFill>
+              <a:latin typeface="Manrope"/>
+            </a:endParaRPr>
           </a:p>
         </p:txBody>
       </p:sp>
@@ -10680,6 +11353,12 @@
               </a:rPr>
               <a:t>Общее руководство, определение приоритетов, координация государственных органов и акиматов</a:t>
             </a:r>
+            <a:endParaRPr sz="1200" b="0">
+              <a:solidFill>
+                <a:srgbClr val="404040"/>
+              </a:solidFill>
+              <a:latin typeface="Manrope"/>
+            </a:endParaRPr>
           </a:p>
         </p:txBody>
       </p:sp>
@@ -10726,7 +11405,6 @@
           <a:lstStyle/>
           <a:p>
             <a:pPr algn="ctr"/>
-            <a:endParaRPr/>
           </a:p>
         </p:txBody>
       </p:sp>
@@ -10771,7 +11449,6 @@
           <a:lstStyle/>
           <a:p>
             <a:pPr algn="ctr"/>
-            <a:endParaRPr/>
           </a:p>
         </p:txBody>
       </p:sp>
@@ -10807,6 +11484,12 @@
               </a:rPr>
               <a:t>Проектный офис</a:t>
             </a:r>
+            <a:endParaRPr sz="1500" b="1">
+              <a:solidFill>
+                <a:srgbClr val="156082"/>
+              </a:solidFill>
+              <a:latin typeface="Manrope"/>
+            </a:endParaRPr>
           </a:p>
         </p:txBody>
       </p:sp>
@@ -10846,6 +11529,12 @@
               </a:rPr>
               <a:t>Реализация задач инициативы: социология, проектное управление и регионы, цифровизация, коммуникация и креатив</a:t>
             </a:r>
+            <a:endParaRPr sz="1200" b="0">
+              <a:solidFill>
+                <a:srgbClr val="404040"/>
+              </a:solidFill>
+              <a:latin typeface="Manrope"/>
+            </a:endParaRPr>
           </a:p>
         </p:txBody>
       </p:sp>
@@ -10892,7 +11581,6 @@
           <a:lstStyle/>
           <a:p>
             <a:pPr algn="ctr"/>
-            <a:endParaRPr/>
           </a:p>
         </p:txBody>
       </p:sp>
@@ -10937,7 +11625,6 @@
           <a:lstStyle/>
           <a:p>
             <a:pPr algn="ctr"/>
-            <a:endParaRPr/>
           </a:p>
         </p:txBody>
       </p:sp>
@@ -10973,6 +11660,12 @@
               </a:rPr>
               <a:t>Фонд</a:t>
             </a:r>
+            <a:endParaRPr sz="1500" b="1">
+              <a:solidFill>
+                <a:srgbClr val="1C3E6D"/>
+              </a:solidFill>
+              <a:latin typeface="Manrope"/>
+            </a:endParaRPr>
           </a:p>
         </p:txBody>
       </p:sp>
@@ -11012,6 +11705,12 @@
               </a:rPr>
               <a:t>Организационная, правовая и финансовая платформа, методология и проверка данных, аналитика, международные методики и партнёрства, привлечение внебюджетных средств</a:t>
             </a:r>
+            <a:endParaRPr sz="1200" b="0">
+              <a:solidFill>
+                <a:srgbClr val="404040"/>
+              </a:solidFill>
+              <a:latin typeface="Manrope"/>
+            </a:endParaRPr>
           </a:p>
         </p:txBody>
       </p:sp>
@@ -11047,6 +11746,12 @@
               </a:rPr>
               <a:t>Итоги Концепции «Таза Қазақстан» 2024–2029 на сегодня</a:t>
             </a:r>
+            <a:endParaRPr sz="1400" b="1">
+              <a:solidFill>
+                <a:srgbClr val="3B7D48"/>
+              </a:solidFill>
+              <a:latin typeface="Manrope"/>
+            </a:endParaRPr>
           </a:p>
         </p:txBody>
       </p:sp>
@@ -11082,6 +11787,12 @@
               </a:rPr>
               <a:t>≈3 млн т</a:t>
             </a:r>
+            <a:endParaRPr sz="2400" b="1">
+              <a:solidFill>
+                <a:srgbClr val="3B7D48"/>
+              </a:solidFill>
+              <a:latin typeface="Manrope"/>
+            </a:endParaRPr>
           </a:p>
         </p:txBody>
       </p:sp>
@@ -11117,6 +11828,12 @@
               </a:rPr>
               <a:t>отходов собрано</a:t>
             </a:r>
+            <a:endParaRPr sz="1200" b="0">
+              <a:solidFill>
+                <a:srgbClr val="404040"/>
+              </a:solidFill>
+              <a:latin typeface="Manrope"/>
+            </a:endParaRPr>
           </a:p>
         </p:txBody>
       </p:sp>
@@ -11152,6 +11869,12 @@
               </a:rPr>
               <a:t>≈3 млн га</a:t>
             </a:r>
+            <a:endParaRPr sz="2400" b="1">
+              <a:solidFill>
+                <a:srgbClr val="156082"/>
+              </a:solidFill>
+              <a:latin typeface="Manrope"/>
+            </a:endParaRPr>
           </a:p>
         </p:txBody>
       </p:sp>
@@ -11187,6 +11910,12 @@
               </a:rPr>
               <a:t>территорий очищено</a:t>
             </a:r>
+            <a:endParaRPr sz="1200" b="0">
+              <a:solidFill>
+                <a:srgbClr val="404040"/>
+              </a:solidFill>
+              <a:latin typeface="Manrope"/>
+            </a:endParaRPr>
           </a:p>
         </p:txBody>
       </p:sp>
@@ -11222,6 +11951,12 @@
               </a:rPr>
               <a:t>≈5,8 млн</a:t>
             </a:r>
+            <a:endParaRPr sz="2400" b="1">
+              <a:solidFill>
+                <a:srgbClr val="1C3E6D"/>
+              </a:solidFill>
+              <a:latin typeface="Manrope"/>
+            </a:endParaRPr>
           </a:p>
         </p:txBody>
       </p:sp>
@@ -11257,6 +11992,12 @@
               </a:rPr>
               <a:t>деревьев высажено</a:t>
             </a:r>
+            <a:endParaRPr sz="1200" b="0">
+              <a:solidFill>
+                <a:srgbClr val="404040"/>
+              </a:solidFill>
+              <a:latin typeface="Manrope"/>
+            </a:endParaRPr>
           </a:p>
         </p:txBody>
       </p:sp>
@@ -11292,6 +12033,12 @@
               </a:rPr>
               <a:t>6+ млн</a:t>
             </a:r>
+            <a:endParaRPr sz="2400" b="1">
+              <a:solidFill>
+                <a:srgbClr val="C99A1E"/>
+              </a:solidFill>
+              <a:latin typeface="Manrope"/>
+            </a:endParaRPr>
           </a:p>
         </p:txBody>
       </p:sp>
@@ -11327,6 +12074,12 @@
               </a:rPr>
               <a:t>участников ежегодно</a:t>
             </a:r>
+            <a:endParaRPr sz="1200" b="0">
+              <a:solidFill>
+                <a:srgbClr val="404040"/>
+              </a:solidFill>
+              <a:latin typeface="Manrope"/>
+            </a:endParaRPr>
           </a:p>
         </p:txBody>
       </p:sp>
@@ -11362,6 +12115,12 @@
               </a:rPr>
               <a:t>Размещение Проектного офиса на базе Фонда не требует создания новой государственной структуры и позволяет сразу использовать инфраструктуру, опыт и международные партнёрства Фонда.</a:t>
             </a:r>
+            <a:endParaRPr sz="1200" b="0">
+              <a:solidFill>
+                <a:srgbClr val="404040"/>
+              </a:solidFill>
+              <a:latin typeface="Manrope"/>
+            </a:endParaRPr>
           </a:p>
         </p:txBody>
       </p:sp>
@@ -11378,13 +12137,7 @@
   <p:cSld>
     <p:spTree>
       <p:nvGrpSpPr>
-        <p:cNvPr id="1" name="">
-          <a:extLst>
-            <a:ext uri="{FF2B5EF4-FFF2-40B4-BE49-F238E27FC236}">
-              <a16:creationId xmlns:a16="http://schemas.microsoft.com/office/drawing/2014/main" xmlns="" id="{1CFF5DC6-B44B-F589-487F-AD4BEC783510}"/>
-            </a:ext>
-          </a:extLst>
-        </p:cNvPr>
+        <p:cNvPr id="1" name=""/>
         <p:cNvGrpSpPr/>
         <p:nvPr/>
       </p:nvGrpSpPr>
@@ -11398,13 +12151,176 @@
       </p:grpSpPr>
       <p:pic>
         <p:nvPicPr>
-          <p:cNvPr id="3" name="Рисунок 2">
-            <a:extLst>
-              <a:ext uri="{FF2B5EF4-FFF2-40B4-BE49-F238E27FC236}">
-                <a16:creationId xmlns:a16="http://schemas.microsoft.com/office/drawing/2014/main" xmlns="" id="{AEFB92CB-8F6A-0703-170C-AB53226745BD}"/>
-              </a:ext>
-            </a:extLst>
-          </p:cNvPr>
+          <p:cNvPr id="3" name="Рисунок 2"/>
+          <p:cNvPicPr>
+            <a:picLocks noChangeAspect="1"/>
+          </p:cNvPicPr>
+          <p:nvPr/>
+        </p:nvPicPr>
+        <p:blipFill>
+          <a:blip r:embed="rId1"/>
+          <a:stretch>
+            <a:fillRect/>
+          </a:stretch>
+        </p:blipFill>
+        <p:spPr>
+          <a:xfrm>
+            <a:off x="0" y="0"/>
+            <a:ext cx="12368696" cy="6858000"/>
+          </a:xfrm>
+          <a:prstGeom prst="rect">
+            <a:avLst/>
+          </a:prstGeom>
+        </p:spPr>
+      </p:pic>
+      <p:sp>
+        <p:nvSpPr>
+          <p:cNvPr id="5" name="TextBox 4"/>
+          <p:cNvSpPr txBox="1"/>
+          <p:nvPr/>
+        </p:nvSpPr>
+        <p:spPr>
+          <a:xfrm>
+            <a:off x="428551" y="303599"/>
+            <a:ext cx="11334897" cy="4647426"/>
+          </a:xfrm>
+          <a:prstGeom prst="rect">
+            <a:avLst/>
+          </a:prstGeom>
+          <a:noFill/>
+        </p:spPr>
+        <p:txBody>
+          <a:bodyPr wrap="square" rtlCol="0">
+            <a:spAutoFit/>
+          </a:bodyPr>
+          <a:lstStyle/>
+          <a:p>
+            <a:r>
+              <a:rPr lang="ru-RU" b="1" dirty="0">
+                <a:solidFill>
+                  <a:schemeClr val="bg1"/>
+                </a:solidFill>
+                <a:latin typeface="Manrope" pitchFamily="2" charset="0"/>
+                <a:cs typeface="Calibri" panose="020F0502020204030204" pitchFamily="34" charset="0"/>
+              </a:rPr>
+              <a:t>Центрально-азиатский </a:t>
+            </a:r>
+            <a:r>
+              <a:rPr lang="ru-RU" b="1" dirty="0">
+                <a:solidFill>
+                  <a:schemeClr val="bg1"/>
+                </a:solidFill>
+                <a:cs typeface="Calibri" panose="020F0502020204030204" pitchFamily="34" charset="0"/>
+              </a:rPr>
+              <a:t>климатический фонд</a:t>
+            </a:r>
+            <a:br>
+              <a:rPr lang="ru-RU" b="1" dirty="0">
+                <a:solidFill>
+                  <a:schemeClr val="bg1"/>
+                </a:solidFill>
+                <a:cs typeface="Calibri" panose="020F0502020204030204" pitchFamily="34" charset="0"/>
+              </a:rPr>
+            </a:br>
+            <a:r>
+              <a:rPr lang="ru-RU" b="1" dirty="0">
+                <a:solidFill>
+                  <a:schemeClr val="bg1"/>
+                </a:solidFill>
+                <a:cs typeface="Calibri" panose="020F0502020204030204" pitchFamily="34" charset="0"/>
+              </a:rPr>
+              <a:t>Проектный офис для Центральной Азии </a:t>
+            </a:r>
+            <a:endParaRPr lang="ru-RU" b="1" dirty="0">
+              <a:solidFill>
+                <a:schemeClr val="bg1"/>
+              </a:solidFill>
+              <a:cs typeface="Calibri" panose="020F0502020204030204" pitchFamily="34" charset="0"/>
+            </a:endParaRPr>
+          </a:p>
+          <a:p>
+            <a:r>
+              <a:rPr lang="ru-RU" b="1" dirty="0">
+                <a:solidFill>
+                  <a:schemeClr val="bg1"/>
+                </a:solidFill>
+                <a:cs typeface="Calibri" panose="020F0502020204030204" pitchFamily="34" charset="0"/>
+              </a:rPr>
+              <a:t>по изменению климата и зеленой энергетике</a:t>
+            </a:r>
+            <a:endParaRPr lang="ru-RU" b="1" dirty="0">
+              <a:solidFill>
+                <a:schemeClr val="bg1"/>
+              </a:solidFill>
+              <a:cs typeface="Calibri" panose="020F0502020204030204" pitchFamily="34" charset="0"/>
+            </a:endParaRPr>
+          </a:p>
+          <a:p>
+            <a:endParaRPr lang="ru-RU" sz="2400" b="1" dirty="0">
+              <a:solidFill>
+                <a:schemeClr val="bg1"/>
+              </a:solidFill>
+              <a:cs typeface="Calibri" panose="020F0502020204030204" pitchFamily="34" charset="0"/>
+            </a:endParaRPr>
+          </a:p>
+          <a:p>
+            <a:pPr algn="ctr"/>
+            <a:endParaRPr lang="ru-RU" sz="5400" b="1" dirty="0">
+              <a:solidFill>
+                <a:schemeClr val="bg1"/>
+              </a:solidFill>
+              <a:cs typeface="Calibri" panose="020F0502020204030204" pitchFamily="34" charset="0"/>
+            </a:endParaRPr>
+          </a:p>
+          <a:p>
+            <a:pPr algn="ctr"/>
+            <a:endParaRPr lang="ru-RU" sz="5400" b="1" dirty="0">
+              <a:solidFill>
+                <a:schemeClr val="bg1"/>
+              </a:solidFill>
+              <a:cs typeface="Calibri" panose="020F0502020204030204" pitchFamily="34" charset="0"/>
+            </a:endParaRPr>
+          </a:p>
+          <a:p>
+            <a:r>
+              <a:rPr lang="ru-RU" sz="5400" b="1" dirty="0">
+                <a:solidFill>
+                  <a:schemeClr val="bg1"/>
+                </a:solidFill>
+                <a:cs typeface="Calibri" panose="020F0502020204030204" pitchFamily="34" charset="0"/>
+              </a:rPr>
+              <a:t>ESG принципы</a:t>
+            </a:r>
+            <a:endParaRPr lang="ru-RU" sz="5400" b="1" dirty="0">
+              <a:solidFill>
+                <a:schemeClr val="bg1"/>
+              </a:solidFill>
+              <a:cs typeface="Calibri" panose="020F0502020204030204" pitchFamily="34" charset="0"/>
+            </a:endParaRPr>
+          </a:p>
+          <a:p>
+            <a:pPr algn="ctr"/>
+            <a:endParaRPr lang="ru-RU" sz="2800" b="1" dirty="0">
+              <a:solidFill>
+                <a:schemeClr val="bg1"/>
+              </a:solidFill>
+              <a:cs typeface="Calibri" panose="020F0502020204030204" pitchFamily="34" charset="0"/>
+            </a:endParaRPr>
+          </a:p>
+          <a:p>
+            <a:pPr algn="ctr"/>
+            <a:endParaRPr lang="ru-RU" sz="2800" b="1" dirty="0">
+              <a:solidFill>
+                <a:schemeClr val="bg1"/>
+              </a:solidFill>
+              <a:cs typeface="Calibri" panose="020F0502020204030204" pitchFamily="34" charset="0"/>
+            </a:endParaRPr>
+          </a:p>
+        </p:txBody>
+      </p:sp>
+      <p:pic>
+        <p:nvPicPr>
+          <p:cNvPr id="8" name="Рисунок 7"/>
           <p:cNvPicPr>
             <a:picLocks noChangeAspect="1"/>
           </p:cNvPicPr>
@@ -11418,169 +12334,6 @@
         </p:blipFill>
         <p:spPr>
           <a:xfrm>
-            <a:off x="0" y="0"/>
-            <a:ext cx="12368696" cy="6858000"/>
-          </a:xfrm>
-          <a:prstGeom prst="rect">
-            <a:avLst/>
-          </a:prstGeom>
-        </p:spPr>
-      </p:pic>
-      <p:sp>
-        <p:nvSpPr>
-          <p:cNvPr id="5" name="TextBox 4">
-            <a:extLst>
-              <a:ext uri="{FF2B5EF4-FFF2-40B4-BE49-F238E27FC236}">
-                <a16:creationId xmlns:a16="http://schemas.microsoft.com/office/drawing/2014/main" xmlns="" id="{74ADC967-6281-DBD8-6DEB-A33556A6415A}"/>
-              </a:ext>
-            </a:extLst>
-          </p:cNvPr>
-          <p:cNvSpPr txBox="1"/>
-          <p:nvPr/>
-        </p:nvSpPr>
-        <p:spPr>
-          <a:xfrm>
-            <a:off x="428551" y="303599"/>
-            <a:ext cx="11334897" cy="4647426"/>
-          </a:xfrm>
-          <a:prstGeom prst="rect">
-            <a:avLst/>
-          </a:prstGeom>
-          <a:noFill/>
-        </p:spPr>
-        <p:txBody>
-          <a:bodyPr wrap="square" rtlCol="0">
-            <a:spAutoFit/>
-          </a:bodyPr>
-          <a:lstStyle/>
-          <a:p>
-            <a:r>
-              <a:rPr lang="ru-RU" b="1" dirty="0">
-                <a:solidFill>
-                  <a:schemeClr val="bg1"/>
-                </a:solidFill>
-                <a:latin typeface="Manrope" pitchFamily="2" charset="0"/>
-                <a:cs typeface="Calibri" panose="020F0502020204030204" pitchFamily="34" charset="0"/>
-              </a:rPr>
-              <a:t>Центрально-азиатский </a:t>
-            </a:r>
-            <a:r>
-              <a:rPr lang="ru-RU" b="1" dirty="0">
-                <a:solidFill>
-                  <a:schemeClr val="bg1"/>
-                </a:solidFill>
-                <a:cs typeface="Calibri" panose="020F0502020204030204" pitchFamily="34" charset="0"/>
-              </a:rPr>
-              <a:t>климатический фонд</a:t>
-            </a:r>
-            <a:br>
-              <a:rPr lang="ru-RU" b="1" dirty="0">
-                <a:solidFill>
-                  <a:schemeClr val="bg1"/>
-                </a:solidFill>
-                <a:cs typeface="Calibri" panose="020F0502020204030204" pitchFamily="34" charset="0"/>
-              </a:rPr>
-            </a:br>
-            <a:r>
-              <a:rPr lang="ru-RU" b="1" dirty="0">
-                <a:solidFill>
-                  <a:schemeClr val="bg1"/>
-                </a:solidFill>
-                <a:cs typeface="Calibri" panose="020F0502020204030204" pitchFamily="34" charset="0"/>
-              </a:rPr>
-              <a:t>Проектный офис для Центральной Азии </a:t>
-            </a:r>
-          </a:p>
-          <a:p>
-            <a:r>
-              <a:rPr lang="ru-RU" b="1" dirty="0">
-                <a:solidFill>
-                  <a:schemeClr val="bg1"/>
-                </a:solidFill>
-                <a:cs typeface="Calibri" panose="020F0502020204030204" pitchFamily="34" charset="0"/>
-              </a:rPr>
-              <a:t>по изменению климата и зеленой энергетике</a:t>
-            </a:r>
-          </a:p>
-          <a:p>
-            <a:endParaRPr lang="ru-RU" sz="2400" b="1" dirty="0">
-              <a:solidFill>
-                <a:schemeClr val="bg1"/>
-              </a:solidFill>
-              <a:cs typeface="Calibri" panose="020F0502020204030204" pitchFamily="34" charset="0"/>
-            </a:endParaRPr>
-          </a:p>
-          <a:p>
-            <a:pPr algn="ctr"/>
-            <a:endParaRPr lang="ru-RU" sz="5400" b="1" dirty="0">
-              <a:solidFill>
-                <a:schemeClr val="bg1"/>
-              </a:solidFill>
-              <a:cs typeface="Calibri" panose="020F0502020204030204" pitchFamily="34" charset="0"/>
-            </a:endParaRPr>
-          </a:p>
-          <a:p>
-            <a:pPr algn="ctr"/>
-            <a:endParaRPr lang="ru-RU" sz="5400" b="1" dirty="0">
-              <a:solidFill>
-                <a:schemeClr val="bg1"/>
-              </a:solidFill>
-              <a:cs typeface="Calibri" panose="020F0502020204030204" pitchFamily="34" charset="0"/>
-            </a:endParaRPr>
-          </a:p>
-          <a:p>
-            <a:r>
-              <a:rPr lang="ru-RU" sz="5400" b="1" dirty="0">
-                <a:solidFill>
-                  <a:schemeClr val="bg1"/>
-                </a:solidFill>
-                <a:cs typeface="Calibri" panose="020F0502020204030204" pitchFamily="34" charset="0"/>
-              </a:rPr>
-              <a:t>ESG принципы</a:t>
-            </a:r>
-          </a:p>
-          <a:p>
-            <a:pPr algn="ctr"/>
-            <a:endParaRPr lang="ru-RU" sz="2800" b="1" dirty="0">
-              <a:solidFill>
-                <a:schemeClr val="bg1"/>
-              </a:solidFill>
-              <a:cs typeface="Calibri" panose="020F0502020204030204" pitchFamily="34" charset="0"/>
-            </a:endParaRPr>
-          </a:p>
-          <a:p>
-            <a:pPr algn="ctr"/>
-            <a:endParaRPr lang="ru-RU" sz="2800" b="1" dirty="0">
-              <a:solidFill>
-                <a:schemeClr val="bg1"/>
-              </a:solidFill>
-              <a:cs typeface="Calibri" panose="020F0502020204030204" pitchFamily="34" charset="0"/>
-            </a:endParaRPr>
-          </a:p>
-        </p:txBody>
-      </p:sp>
-      <p:pic>
-        <p:nvPicPr>
-          <p:cNvPr id="8" name="Рисунок 7">
-            <a:extLst>
-              <a:ext uri="{FF2B5EF4-FFF2-40B4-BE49-F238E27FC236}">
-                <a16:creationId xmlns:a16="http://schemas.microsoft.com/office/drawing/2014/main" xmlns="" id="{EFCDB5C3-CBB5-8546-15BA-49275CE7183E}"/>
-              </a:ext>
-            </a:extLst>
-          </p:cNvPr>
-          <p:cNvPicPr>
-            <a:picLocks noChangeAspect="1"/>
-          </p:cNvPicPr>
-          <p:nvPr/>
-        </p:nvPicPr>
-        <p:blipFill>
-          <a:blip r:embed="rId3"/>
-          <a:stretch>
-            <a:fillRect/>
-          </a:stretch>
-        </p:blipFill>
-        <p:spPr>
-          <a:xfrm>
             <a:off x="9851113" y="303599"/>
             <a:ext cx="2340887" cy="956791"/>
           </a:xfrm>
@@ -11590,11 +12343,6 @@
         </p:spPr>
       </p:pic>
     </p:spTree>
-    <p:extLst>
-      <p:ext uri="{BB962C8B-B14F-4D97-AF65-F5344CB8AC3E}">
-        <p14:creationId xmlns:p14="http://schemas.microsoft.com/office/powerpoint/2010/main" val="1769285630"/>
-      </p:ext>
-    </p:extLst>
   </p:cSld>
   <p:clrMapOvr>
     <a:masterClrMapping/>
@@ -11692,10 +12440,16 @@
                 <a:solidFill>
                   <a:srgbClr val="2E9E6B"/>
                 </a:solidFill>
-                <a:latin typeface="Cambria"/>
+                <a:latin typeface="Cambria" panose="02040503050406030204"/>
               </a:rPr>
               <a:t>02</a:t>
             </a:r>
+            <a:endParaRPr lang="ru-RU" sz="3000" b="1" i="0" dirty="0">
+              <a:solidFill>
+                <a:srgbClr val="2E9E6B"/>
+              </a:solidFill>
+              <a:latin typeface="Cambria" panose="02040503050406030204"/>
+            </a:endParaRPr>
           </a:p>
         </p:txBody>
       </p:sp>
@@ -11727,7 +12481,7 @@
                 <a:solidFill>
                   <a:srgbClr val="1F3864"/>
                 </a:solidFill>
-                <a:latin typeface="Cambria"/>
+                <a:latin typeface="Cambria" panose="02040503050406030204"/>
               </a:rPr>
               <a:t>ESG методология</a:t>
             </a:r>
@@ -11735,7 +12489,7 @@
               <a:solidFill>
                 <a:srgbClr val="1F3864"/>
               </a:solidFill>
-              <a:latin typeface="Cambria"/>
+              <a:latin typeface="Cambria" panose="02040503050406030204"/>
             </a:endParaRPr>
           </a:p>
         </p:txBody>
@@ -11768,7 +12522,7 @@
                 <a:solidFill>
                   <a:srgbClr val="595959"/>
                 </a:solidFill>
-                <a:latin typeface="Calibri"/>
+                <a:latin typeface="Calibri" panose="020F0502020204030204"/>
               </a:rPr>
               <a:t>Rаждый</a:t>
             </a:r>
@@ -11777,10 +12531,16 @@
                 <a:solidFill>
                   <a:srgbClr val="595959"/>
                 </a:solidFill>
-                <a:latin typeface="Calibri"/>
+                <a:latin typeface="Calibri" panose="020F0502020204030204"/>
               </a:rPr>
               <a:t> показатель опирается на признанный стандарт или норму права.</a:t>
             </a:r>
+            <a:endParaRPr lang="ru-RU" sz="1500" b="0" i="0" dirty="0">
+              <a:solidFill>
+                <a:srgbClr val="595959"/>
+              </a:solidFill>
+              <a:latin typeface="Calibri" panose="020F0502020204030204"/>
+            </a:endParaRPr>
           </a:p>
         </p:txBody>
       </p:sp>
@@ -11877,10 +12637,16 @@
                 <a:solidFill>
                   <a:srgbClr val="FFFFFF"/>
                 </a:solidFill>
-                <a:latin typeface="Calibri"/>
+                <a:latin typeface="Calibri" panose="020F0502020204030204"/>
               </a:rPr>
               <a:t>1</a:t>
             </a:r>
+            <a:endParaRPr lang="ru-RU" sz="3200" b="1" dirty="0">
+              <a:solidFill>
+                <a:srgbClr val="FFFFFF"/>
+              </a:solidFill>
+              <a:latin typeface="Calibri" panose="020F0502020204030204"/>
+            </a:endParaRPr>
           </a:p>
         </p:txBody>
       </p:sp>
@@ -11912,10 +12678,16 @@
                 <a:solidFill>
                   <a:srgbClr val="2F5597"/>
                 </a:solidFill>
-                <a:latin typeface="Cambria"/>
+                <a:latin typeface="Cambria" panose="02040503050406030204"/>
               </a:rPr>
               <a:t>Международные стандарты</a:t>
             </a:r>
+            <a:endParaRPr lang="ru-RU" sz="2000" b="1" i="0" dirty="0">
+              <a:solidFill>
+                <a:srgbClr val="2F5597"/>
+              </a:solidFill>
+              <a:latin typeface="Cambria" panose="02040503050406030204"/>
+            </a:endParaRPr>
           </a:p>
         </p:txBody>
       </p:sp>
@@ -11992,10 +12764,16 @@
                 <a:solidFill>
                   <a:srgbClr val="3A3A3A"/>
                 </a:solidFill>
-                <a:latin typeface="Calibri"/>
+                <a:latin typeface="Calibri" panose="020F0502020204030204"/>
               </a:rPr>
               <a:t>IFRS S1 / S2 — раскрытие устойчивости</a:t>
             </a:r>
+            <a:endParaRPr lang="ru-RU" sz="1450" b="0" i="0" dirty="0">
+              <a:solidFill>
+                <a:srgbClr val="3A3A3A"/>
+              </a:solidFill>
+              <a:latin typeface="Calibri" panose="020F0502020204030204"/>
+            </a:endParaRPr>
           </a:p>
         </p:txBody>
       </p:sp>
@@ -12072,10 +12850,16 @@
                 <a:solidFill>
                   <a:srgbClr val="3A3A3A"/>
                 </a:solidFill>
-                <a:latin typeface="Calibri"/>
+                <a:latin typeface="Calibri" panose="020F0502020204030204"/>
               </a:rPr>
               <a:t>SASB — отраслевая существенность</a:t>
             </a:r>
+            <a:endParaRPr lang="ru-RU" sz="1450" b="0" i="0" dirty="0">
+              <a:solidFill>
+                <a:srgbClr val="3A3A3A"/>
+              </a:solidFill>
+              <a:latin typeface="Calibri" panose="020F0502020204030204"/>
+            </a:endParaRPr>
           </a:p>
         </p:txBody>
       </p:sp>
@@ -12152,10 +12936,16 @@
                 <a:solidFill>
                   <a:srgbClr val="3A3A3A"/>
                 </a:solidFill>
-                <a:latin typeface="Calibri"/>
+                <a:latin typeface="Calibri" panose="020F0502020204030204"/>
               </a:rPr>
               <a:t>GRI — стандарты отчётности</a:t>
             </a:r>
+            <a:endParaRPr lang="ru-RU" sz="1450" b="0" i="0" dirty="0">
+              <a:solidFill>
+                <a:srgbClr val="3A3A3A"/>
+              </a:solidFill>
+              <a:latin typeface="Calibri" panose="020F0502020204030204"/>
+            </a:endParaRPr>
           </a:p>
         </p:txBody>
       </p:sp>
@@ -12232,10 +13022,16 @@
                 <a:solidFill>
                   <a:srgbClr val="3A3A3A"/>
                 </a:solidFill>
-                <a:latin typeface="Calibri"/>
+                <a:latin typeface="Calibri" panose="020F0502020204030204"/>
               </a:rPr>
               <a:t>Принцип двойной существенности</a:t>
             </a:r>
+            <a:endParaRPr lang="ru-RU" sz="1450" b="0" i="0" dirty="0">
+              <a:solidFill>
+                <a:srgbClr val="3A3A3A"/>
+              </a:solidFill>
+              <a:latin typeface="Calibri" panose="020F0502020204030204"/>
+            </a:endParaRPr>
           </a:p>
         </p:txBody>
       </p:sp>
@@ -12332,10 +13128,16 @@
                 <a:solidFill>
                   <a:srgbClr val="FFFFFF"/>
                 </a:solidFill>
-                <a:latin typeface="Calibri"/>
+                <a:latin typeface="Calibri" panose="020F0502020204030204"/>
               </a:rPr>
               <a:t>2</a:t>
             </a:r>
+            <a:endParaRPr lang="ru-RU" sz="3200" b="1" dirty="0">
+              <a:solidFill>
+                <a:srgbClr val="FFFFFF"/>
+              </a:solidFill>
+              <a:latin typeface="Calibri" panose="020F0502020204030204"/>
+            </a:endParaRPr>
           </a:p>
         </p:txBody>
       </p:sp>
@@ -12367,10 +13169,16 @@
                 <a:solidFill>
                   <a:srgbClr val="FFFFFF"/>
                 </a:solidFill>
-                <a:latin typeface="Cambria"/>
+                <a:latin typeface="Cambria" panose="02040503050406030204"/>
               </a:rPr>
               <a:t>Право Казахстана</a:t>
             </a:r>
+            <a:endParaRPr lang="ru-RU" sz="2000" b="1" i="0" dirty="0">
+              <a:solidFill>
+                <a:srgbClr val="FFFFFF"/>
+              </a:solidFill>
+              <a:latin typeface="Cambria" panose="02040503050406030204"/>
+            </a:endParaRPr>
           </a:p>
         </p:txBody>
       </p:sp>
@@ -12402,10 +13210,16 @@
                 <a:solidFill>
                   <a:srgbClr val="2E9E6B"/>
                 </a:solidFill>
-                <a:latin typeface="Cambria"/>
+                <a:latin typeface="Cambria" panose="02040503050406030204"/>
               </a:rPr>
               <a:t>≈ 800</a:t>
             </a:r>
+            <a:endParaRPr lang="ru-RU" sz="5400" b="1" i="0" dirty="0">
+              <a:solidFill>
+                <a:srgbClr val="2E9E6B"/>
+              </a:solidFill>
+              <a:latin typeface="Cambria" panose="02040503050406030204"/>
+            </a:endParaRPr>
           </a:p>
         </p:txBody>
       </p:sp>
@@ -12437,10 +13251,16 @@
                 <a:solidFill>
                   <a:srgbClr val="CADCFC"/>
                 </a:solidFill>
-                <a:latin typeface="Calibri"/>
+                <a:latin typeface="Calibri" panose="020F0502020204030204"/>
               </a:rPr>
               <a:t>действующих НПА Республики Казахстан</a:t>
             </a:r>
+            <a:endParaRPr lang="ru-RU" sz="1400" b="1" i="0" dirty="0">
+              <a:solidFill>
+                <a:srgbClr val="CADCFC"/>
+              </a:solidFill>
+              <a:latin typeface="Calibri" panose="020F0502020204030204"/>
+            </a:endParaRPr>
           </a:p>
         </p:txBody>
       </p:sp>
@@ -12476,10 +13296,16 @@
                 <a:solidFill>
                   <a:srgbClr val="B9CCEC"/>
                 </a:solidFill>
-                <a:latin typeface="Calibri"/>
+                <a:latin typeface="Calibri" panose="020F0502020204030204"/>
               </a:rPr>
               <a:t>экология · труд · охрана здоровья · корпоративное управление</a:t>
             </a:r>
+            <a:endParaRPr lang="ru-RU" sz="1300" b="0" i="0" dirty="0">
+              <a:solidFill>
+                <a:srgbClr val="B9CCEC"/>
+              </a:solidFill>
+              <a:latin typeface="Calibri" panose="020F0502020204030204"/>
+            </a:endParaRPr>
           </a:p>
         </p:txBody>
       </p:sp>
@@ -12515,7 +13341,7 @@
                 <a:solidFill>
                   <a:srgbClr val="595959"/>
                 </a:solidFill>
-                <a:latin typeface="Calibri"/>
+                <a:latin typeface="Calibri" panose="020F0502020204030204"/>
               </a:rPr>
               <a:t>Международная рамка задаёт, что оценивать; национальное право — по каким требованиям. </a:t>
             </a:r>
@@ -12524,7 +13350,7 @@
                 <a:solidFill>
                   <a:srgbClr val="595959"/>
                 </a:solidFill>
-                <a:latin typeface="Calibri"/>
+                <a:latin typeface="Calibri" panose="020F0502020204030204"/>
               </a:rPr>
             </a:br>
             <a:r>
@@ -12532,22 +13358,22 @@
                 <a:solidFill>
                   <a:srgbClr val="595959"/>
                 </a:solidFill>
-                <a:latin typeface="Calibri"/>
+                <a:latin typeface="Calibri" panose="020F0502020204030204"/>
               </a:rPr>
               <a:t>Методология сводит их вместе и поддерживается в актуальном состоянии.</a:t>
             </a:r>
-          </a:p>
-        </p:txBody>
-      </p:sp>
-      <p:sp>
-        <p:nvSpPr>
-          <p:cNvPr id="24" name="Прямоугольник с двумя скругленными соседними углами 23">
-            <a:extLst>
-              <a:ext uri="{FF2B5EF4-FFF2-40B4-BE49-F238E27FC236}">
-                <a16:creationId xmlns:a16="http://schemas.microsoft.com/office/drawing/2014/main" xmlns="" id="{5705A50C-CF75-0CB8-6BE0-F695F166D796}"/>
-              </a:ext>
-            </a:extLst>
-          </p:cNvPr>
+            <a:endParaRPr lang="ru-RU" sz="1300" b="0" i="1" dirty="0">
+              <a:solidFill>
+                <a:srgbClr val="595959"/>
+              </a:solidFill>
+              <a:latin typeface="Calibri" panose="020F0502020204030204"/>
+            </a:endParaRPr>
+          </a:p>
+        </p:txBody>
+      </p:sp>
+      <p:sp>
+        <p:nvSpPr>
+          <p:cNvPr id="24" name="Прямоугольник с двумя скругленными соседними углами 23"/>
           <p:cNvSpPr/>
           <p:nvPr/>
         </p:nvSpPr>
@@ -12594,13 +13420,7 @@
       </p:sp>
       <p:sp>
         <p:nvSpPr>
-          <p:cNvPr id="25" name="TextBox 24">
-            <a:extLst>
-              <a:ext uri="{FF2B5EF4-FFF2-40B4-BE49-F238E27FC236}">
-                <a16:creationId xmlns:a16="http://schemas.microsoft.com/office/drawing/2014/main" xmlns="" id="{40427900-6ABD-7435-A521-4B3C82EF8B99}"/>
-              </a:ext>
-            </a:extLst>
-          </p:cNvPr>
+          <p:cNvPr id="25" name="TextBox 24"/>
           <p:cNvSpPr txBox="1"/>
           <p:nvPr/>
         </p:nvSpPr>
@@ -12627,8 +13447,6 @@
                   <a:schemeClr val="bg1"/>
                 </a:solidFill>
               </a:rPr>
-              <a:pPr algn="r"/>
-              <a:t>17</a:t>
             </a:fld>
             <a:endParaRPr lang="ru-RU" dirty="0">
               <a:solidFill>
@@ -12640,20 +13458,14 @@
       </p:sp>
       <p:pic>
         <p:nvPicPr>
-          <p:cNvPr id="26" name="Рисунок 25">
-            <a:extLst>
-              <a:ext uri="{FF2B5EF4-FFF2-40B4-BE49-F238E27FC236}">
-                <a16:creationId xmlns:a16="http://schemas.microsoft.com/office/drawing/2014/main" xmlns="" id="{A6157DF1-F01B-0849-EF48-7CFFAF320D2B}"/>
-              </a:ext>
-            </a:extLst>
-          </p:cNvPr>
+          <p:cNvPr id="26" name="Рисунок 25"/>
           <p:cNvPicPr>
             <a:picLocks noChangeAspect="1"/>
           </p:cNvPicPr>
           <p:nvPr/>
         </p:nvPicPr>
         <p:blipFill>
-          <a:blip r:embed="rId2">
+          <a:blip r:embed="rId1">
             <a:duotone>
               <a:schemeClr val="accent1">
                 <a:shade val="45000"/>
@@ -12664,7 +13476,7 @@
             <a:extLst>
               <a:ext uri="{BEBA8EAE-BF5A-486C-A8C5-ECC9F3942E4B}">
                 <a14:imgProps xmlns:a14="http://schemas.microsoft.com/office/drawing/2010/main">
-                  <a14:imgLayer r:embed="rId3">
+                  <a14:imgLayer r:embed="rId2">
                     <a14:imgEffect>
                       <a14:saturation sat="0"/>
                     </a14:imgEffect>
@@ -12689,13 +13501,7 @@
       </p:pic>
       <p:cxnSp>
         <p:nvCxnSpPr>
-          <p:cNvPr id="27" name="Прямая соединительная линия 26">
-            <a:extLst>
-              <a:ext uri="{FF2B5EF4-FFF2-40B4-BE49-F238E27FC236}">
-                <a16:creationId xmlns:a16="http://schemas.microsoft.com/office/drawing/2014/main" xmlns="" id="{821CCB53-1AB9-6764-1147-1A77D667A70F}"/>
-              </a:ext>
-            </a:extLst>
-          </p:cNvPr>
+          <p:cNvPr id="27" name="Прямая соединительная линия 26"/>
           <p:cNvCxnSpPr/>
           <p:nvPr/>
         </p:nvCxnSpPr>
@@ -12826,10 +13632,16 @@
                 <a:solidFill>
                   <a:srgbClr val="1F3864"/>
                 </a:solidFill>
-                <a:latin typeface="Cambria"/>
+                <a:latin typeface="Cambria" panose="02040503050406030204"/>
               </a:rPr>
               <a:t>Шкала — ступени зрелости</a:t>
             </a:r>
+            <a:endParaRPr lang="ru-RU" sz="3000" b="1" i="0" dirty="0">
+              <a:solidFill>
+                <a:srgbClr val="1F3864"/>
+              </a:solidFill>
+              <a:latin typeface="Cambria" panose="02040503050406030204"/>
+            </a:endParaRPr>
           </a:p>
         </p:txBody>
       </p:sp>
@@ -12861,10 +13673,16 @@
                 <a:solidFill>
                   <a:srgbClr val="595959"/>
                 </a:solidFill>
-                <a:latin typeface="Calibri"/>
+                <a:latin typeface="Calibri" panose="020F0502020204030204"/>
               </a:rPr>
               <a:t>Каждая оценка — достигнутый рубеж и следующий шаг вверх. Даже старт — уже результат: компания вступила на путь.</a:t>
             </a:r>
+            <a:endParaRPr lang="ru-RU" sz="1400" b="0" i="0" dirty="0">
+              <a:solidFill>
+                <a:srgbClr val="595959"/>
+              </a:solidFill>
+              <a:latin typeface="Calibri" panose="020F0502020204030204"/>
+            </a:endParaRPr>
           </a:p>
         </p:txBody>
       </p:sp>
@@ -12990,7 +13808,7 @@
                 <a:solidFill>
                   <a:srgbClr val="FFFFFF"/>
                 </a:solidFill>
-                <a:latin typeface="Cambria"/>
+                <a:latin typeface="Cambria" panose="02040503050406030204"/>
               </a:rPr>
               <a:t>A</a:t>
             </a:r>
@@ -12999,7 +13817,7 @@
                 <a:solidFill>
                   <a:srgbClr val="FFFFFF"/>
                 </a:solidFill>
-                <a:latin typeface="Cambria"/>
+                <a:latin typeface="Cambria" panose="02040503050406030204"/>
               </a:rPr>
               <a:t>+ / </a:t>
             </a:r>
@@ -13008,7 +13826,7 @@
                 <a:solidFill>
                   <a:srgbClr val="FFFFFF"/>
                 </a:solidFill>
-                <a:latin typeface="Cambria"/>
+                <a:latin typeface="Cambria" panose="02040503050406030204"/>
               </a:rPr>
               <a:t>A</a:t>
             </a:r>
@@ -13016,7 +13834,7 @@
               <a:solidFill>
                 <a:srgbClr val="FFFFFF"/>
               </a:solidFill>
-              <a:latin typeface="Cambria"/>
+              <a:latin typeface="Cambria" panose="02040503050406030204"/>
             </a:endParaRPr>
           </a:p>
         </p:txBody>
@@ -13049,10 +13867,16 @@
                 <a:solidFill>
                   <a:srgbClr val="1E6E4A"/>
                 </a:solidFill>
-                <a:latin typeface="Cambria"/>
+                <a:latin typeface="Cambria" panose="02040503050406030204"/>
               </a:rPr>
               <a:t>Лидирующий</a:t>
             </a:r>
+            <a:endParaRPr lang="ru-RU" sz="1800" b="1" i="0" dirty="0">
+              <a:solidFill>
+                <a:srgbClr val="1E6E4A"/>
+              </a:solidFill>
+              <a:latin typeface="Cambria" panose="02040503050406030204"/>
+            </a:endParaRPr>
           </a:p>
         </p:txBody>
       </p:sp>
@@ -13084,10 +13908,16 @@
                 <a:solidFill>
                   <a:srgbClr val="3A3A3A"/>
                 </a:solidFill>
-                <a:latin typeface="Calibri"/>
+                <a:latin typeface="Calibri" panose="020F0502020204030204"/>
               </a:rPr>
               <a:t>эталонные практики, ориентир отрасли</a:t>
             </a:r>
+            <a:endParaRPr lang="ru-RU" sz="1350" b="0" i="0" dirty="0">
+              <a:solidFill>
+                <a:srgbClr val="3A3A3A"/>
+              </a:solidFill>
+              <a:latin typeface="Calibri" panose="020F0502020204030204"/>
+            </a:endParaRPr>
           </a:p>
         </p:txBody>
       </p:sp>
@@ -13213,7 +14043,7 @@
                 <a:solidFill>
                   <a:srgbClr val="FFFFFF"/>
                 </a:solidFill>
-                <a:latin typeface="Cambria"/>
+                <a:latin typeface="Cambria" panose="02040503050406030204"/>
               </a:rPr>
               <a:t>B</a:t>
             </a:r>
@@ -13222,7 +14052,7 @@
                 <a:solidFill>
                   <a:srgbClr val="FFFFFF"/>
                 </a:solidFill>
-                <a:latin typeface="Cambria"/>
+                <a:latin typeface="Cambria" panose="02040503050406030204"/>
               </a:rPr>
               <a:t>+ / </a:t>
             </a:r>
@@ -13231,7 +14061,7 @@
                 <a:solidFill>
                   <a:srgbClr val="FFFFFF"/>
                 </a:solidFill>
-                <a:latin typeface="Cambria"/>
+                <a:latin typeface="Cambria" panose="02040503050406030204"/>
               </a:rPr>
               <a:t>B</a:t>
             </a:r>
@@ -13239,7 +14069,7 @@
               <a:solidFill>
                 <a:srgbClr val="FFFFFF"/>
               </a:solidFill>
-              <a:latin typeface="Cambria"/>
+              <a:latin typeface="Cambria" panose="02040503050406030204"/>
             </a:endParaRPr>
           </a:p>
         </p:txBody>
@@ -13272,10 +14102,16 @@
                 <a:solidFill>
                   <a:srgbClr val="2E9E6B"/>
                 </a:solidFill>
-                <a:latin typeface="Cambria"/>
+                <a:latin typeface="Cambria" panose="02040503050406030204"/>
               </a:rPr>
               <a:t>Зрелый</a:t>
             </a:r>
+            <a:endParaRPr lang="ru-RU" sz="1800" b="1" i="0" dirty="0">
+              <a:solidFill>
+                <a:srgbClr val="2E9E6B"/>
+              </a:solidFill>
+              <a:latin typeface="Cambria" panose="02040503050406030204"/>
+            </a:endParaRPr>
           </a:p>
         </p:txBody>
       </p:sp>
@@ -13307,10 +14143,16 @@
                 <a:solidFill>
                   <a:srgbClr val="3A3A3A"/>
                 </a:solidFill>
-                <a:latin typeface="Calibri"/>
+                <a:latin typeface="Calibri" panose="020F0502020204030204"/>
               </a:rPr>
               <a:t>управление выстроено системно и полно</a:t>
             </a:r>
+            <a:endParaRPr lang="ru-RU" sz="1350" b="0" i="0" dirty="0">
+              <a:solidFill>
+                <a:srgbClr val="3A3A3A"/>
+              </a:solidFill>
+              <a:latin typeface="Calibri" panose="020F0502020204030204"/>
+            </a:endParaRPr>
           </a:p>
         </p:txBody>
       </p:sp>
@@ -13436,7 +14278,7 @@
                 <a:solidFill>
                   <a:srgbClr val="FFFFFF"/>
                 </a:solidFill>
-                <a:latin typeface="Cambria"/>
+                <a:latin typeface="Cambria" panose="02040503050406030204"/>
               </a:rPr>
               <a:t>C</a:t>
             </a:r>
@@ -13445,7 +14287,7 @@
                 <a:solidFill>
                   <a:srgbClr val="FFFFFF"/>
                 </a:solidFill>
-                <a:latin typeface="Cambria"/>
+                <a:latin typeface="Cambria" panose="02040503050406030204"/>
               </a:rPr>
               <a:t>+ / </a:t>
             </a:r>
@@ -13454,7 +14296,7 @@
                 <a:solidFill>
                   <a:srgbClr val="FFFFFF"/>
                 </a:solidFill>
-                <a:latin typeface="Cambria"/>
+                <a:latin typeface="Cambria" panose="02040503050406030204"/>
               </a:rPr>
               <a:t>C</a:t>
             </a:r>
@@ -13462,7 +14304,7 @@
               <a:solidFill>
                 <a:srgbClr val="FFFFFF"/>
               </a:solidFill>
-              <a:latin typeface="Cambria"/>
+              <a:latin typeface="Cambria" panose="02040503050406030204"/>
             </a:endParaRPr>
           </a:p>
         </p:txBody>
@@ -13495,10 +14337,16 @@
                 <a:solidFill>
                   <a:srgbClr val="2F5597"/>
                 </a:solidFill>
-                <a:latin typeface="Cambria"/>
+                <a:latin typeface="Cambria" panose="02040503050406030204"/>
               </a:rPr>
               <a:t>Уверенный</a:t>
             </a:r>
+            <a:endParaRPr lang="ru-RU" sz="1800" b="1" i="0" dirty="0">
+              <a:solidFill>
+                <a:srgbClr val="2F5597"/>
+              </a:solidFill>
+              <a:latin typeface="Cambria" panose="02040503050406030204"/>
+            </a:endParaRPr>
           </a:p>
         </p:txBody>
       </p:sp>
@@ -13530,10 +14378,16 @@
                 <a:solidFill>
                   <a:srgbClr val="3A3A3A"/>
                 </a:solidFill>
-                <a:latin typeface="Calibri"/>
+                <a:latin typeface="Calibri" panose="020F0502020204030204"/>
               </a:rPr>
               <a:t>ключевые аспекты под системным управлением</a:t>
             </a:r>
+            <a:endParaRPr lang="ru-RU" sz="1350" b="0" i="0" dirty="0">
+              <a:solidFill>
+                <a:srgbClr val="3A3A3A"/>
+              </a:solidFill>
+              <a:latin typeface="Calibri" panose="020F0502020204030204"/>
+            </a:endParaRPr>
           </a:p>
         </p:txBody>
       </p:sp>
@@ -13659,7 +14513,7 @@
                 <a:solidFill>
                   <a:srgbClr val="FFFFFF"/>
                 </a:solidFill>
-                <a:latin typeface="Cambria"/>
+                <a:latin typeface="Cambria" panose="02040503050406030204"/>
               </a:rPr>
               <a:t>D</a:t>
             </a:r>
@@ -13668,7 +14522,7 @@
                 <a:solidFill>
                   <a:srgbClr val="FFFFFF"/>
                 </a:solidFill>
-                <a:latin typeface="Cambria"/>
+                <a:latin typeface="Cambria" panose="02040503050406030204"/>
               </a:rPr>
               <a:t>+ / </a:t>
             </a:r>
@@ -13677,7 +14531,7 @@
                 <a:solidFill>
                   <a:srgbClr val="FFFFFF"/>
                 </a:solidFill>
-                <a:latin typeface="Cambria"/>
+                <a:latin typeface="Cambria" panose="02040503050406030204"/>
               </a:rPr>
               <a:t>D</a:t>
             </a:r>
@@ -13685,7 +14539,7 @@
               <a:solidFill>
                 <a:srgbClr val="FFFFFF"/>
               </a:solidFill>
-              <a:latin typeface="Cambria"/>
+              <a:latin typeface="Cambria" panose="02040503050406030204"/>
             </a:endParaRPr>
           </a:p>
         </p:txBody>
@@ -13718,10 +14572,16 @@
                 <a:solidFill>
                   <a:srgbClr val="3E63A8"/>
                 </a:solidFill>
-                <a:latin typeface="Cambria"/>
+                <a:latin typeface="Cambria" panose="02040503050406030204"/>
               </a:rPr>
               <a:t>Развивающийся</a:t>
             </a:r>
+            <a:endParaRPr lang="ru-RU" sz="1800" b="1" i="0" dirty="0">
+              <a:solidFill>
+                <a:srgbClr val="3E63A8"/>
+              </a:solidFill>
+              <a:latin typeface="Cambria" panose="02040503050406030204"/>
+            </a:endParaRPr>
           </a:p>
         </p:txBody>
       </p:sp>
@@ -13753,10 +14613,16 @@
                 <a:solidFill>
                   <a:srgbClr val="3A3A3A"/>
                 </a:solidFill>
-                <a:latin typeface="Calibri"/>
+                <a:latin typeface="Calibri" panose="020F0502020204030204"/>
               </a:rPr>
               <a:t>базовые практики действуют, приоритеты видны</a:t>
             </a:r>
+            <a:endParaRPr lang="ru-RU" sz="1350" b="0" i="0" dirty="0">
+              <a:solidFill>
+                <a:srgbClr val="3A3A3A"/>
+              </a:solidFill>
+              <a:latin typeface="Calibri" panose="020F0502020204030204"/>
+            </a:endParaRPr>
           </a:p>
         </p:txBody>
       </p:sp>
@@ -13882,7 +14748,7 @@
                 <a:solidFill>
                   <a:srgbClr val="FFFFFF"/>
                 </a:solidFill>
-                <a:latin typeface="Cambria"/>
+                <a:latin typeface="Cambria" panose="02040503050406030204"/>
               </a:rPr>
               <a:t>E</a:t>
             </a:r>
@@ -13891,7 +14757,7 @@
                 <a:solidFill>
                   <a:srgbClr val="FFFFFF"/>
                 </a:solidFill>
-                <a:latin typeface="Cambria"/>
+                <a:latin typeface="Cambria" panose="02040503050406030204"/>
               </a:rPr>
               <a:t>+ / </a:t>
             </a:r>
@@ -13900,7 +14766,7 @@
                 <a:solidFill>
                   <a:srgbClr val="FFFFFF"/>
                 </a:solidFill>
-                <a:latin typeface="Cambria"/>
+                <a:latin typeface="Cambria" panose="02040503050406030204"/>
               </a:rPr>
               <a:t>E</a:t>
             </a:r>
@@ -13908,7 +14774,7 @@
               <a:solidFill>
                 <a:srgbClr val="FFFFFF"/>
               </a:solidFill>
-              <a:latin typeface="Cambria"/>
+              <a:latin typeface="Cambria" panose="02040503050406030204"/>
             </a:endParaRPr>
           </a:p>
         </p:txBody>
@@ -13941,10 +14807,16 @@
                 <a:solidFill>
                   <a:srgbClr val="6E8ABE"/>
                 </a:solidFill>
-                <a:latin typeface="Cambria"/>
+                <a:latin typeface="Cambria" panose="02040503050406030204"/>
               </a:rPr>
               <a:t>Стартовый</a:t>
             </a:r>
+            <a:endParaRPr lang="ru-RU" sz="1800" b="1" i="0" dirty="0">
+              <a:solidFill>
+                <a:srgbClr val="6E8ABE"/>
+              </a:solidFill>
+              <a:latin typeface="Cambria" panose="02040503050406030204"/>
+            </a:endParaRPr>
           </a:p>
         </p:txBody>
       </p:sp>
@@ -13976,10 +14848,16 @@
                 <a:solidFill>
                   <a:srgbClr val="3A3A3A"/>
                 </a:solidFill>
-                <a:latin typeface="Calibri"/>
+                <a:latin typeface="Calibri" panose="020F0502020204030204"/>
               </a:rPr>
               <a:t>компания ведёт учёт, формирует процедуры</a:t>
             </a:r>
+            <a:endParaRPr lang="ru-RU" sz="1350" b="0" i="0" dirty="0">
+              <a:solidFill>
+                <a:srgbClr val="3A3A3A"/>
+              </a:solidFill>
+              <a:latin typeface="Calibri" panose="020F0502020204030204"/>
+            </a:endParaRPr>
           </a:p>
         </p:txBody>
       </p:sp>
@@ -14056,22 +14934,22 @@
                 <a:solidFill>
                   <a:srgbClr val="595959"/>
                 </a:solidFill>
-                <a:latin typeface="Calibri"/>
+                <a:latin typeface="Calibri" panose="020F0502020204030204"/>
               </a:rPr>
               <a:t>Темы ниже 60 % — это «зоны роста»: измеримые возможности подняться на следующую ступень.</a:t>
             </a:r>
-          </a:p>
-        </p:txBody>
-      </p:sp>
-      <p:sp>
-        <p:nvSpPr>
-          <p:cNvPr id="33" name="Прямоугольник с двумя скругленными соседними углами 32">
-            <a:extLst>
-              <a:ext uri="{FF2B5EF4-FFF2-40B4-BE49-F238E27FC236}">
-                <a16:creationId xmlns:a16="http://schemas.microsoft.com/office/drawing/2014/main" xmlns="" id="{6AF09D00-E35C-BB84-0A83-E64B2230AE32}"/>
-              </a:ext>
-            </a:extLst>
-          </p:cNvPr>
+            <a:endParaRPr lang="ru-RU" sz="1250" b="0" i="1" dirty="0">
+              <a:solidFill>
+                <a:srgbClr val="595959"/>
+              </a:solidFill>
+              <a:latin typeface="Calibri" panose="020F0502020204030204"/>
+            </a:endParaRPr>
+          </a:p>
+        </p:txBody>
+      </p:sp>
+      <p:sp>
+        <p:nvSpPr>
+          <p:cNvPr id="33" name="Прямоугольник с двумя скругленными соседними углами 32"/>
           <p:cNvSpPr/>
           <p:nvPr/>
         </p:nvSpPr>
@@ -14118,13 +14996,7 @@
       </p:sp>
       <p:sp>
         <p:nvSpPr>
-          <p:cNvPr id="34" name="TextBox 33">
-            <a:extLst>
-              <a:ext uri="{FF2B5EF4-FFF2-40B4-BE49-F238E27FC236}">
-                <a16:creationId xmlns:a16="http://schemas.microsoft.com/office/drawing/2014/main" xmlns="" id="{A04B8B5F-0CF4-6D65-A3A1-76757F9A3E82}"/>
-              </a:ext>
-            </a:extLst>
-          </p:cNvPr>
+          <p:cNvPr id="34" name="TextBox 33"/>
           <p:cNvSpPr txBox="1"/>
           <p:nvPr/>
         </p:nvSpPr>
@@ -14151,8 +15023,6 @@
                   <a:schemeClr val="bg1"/>
                 </a:solidFill>
               </a:rPr>
-              <a:pPr algn="r"/>
-              <a:t>18</a:t>
             </a:fld>
             <a:endParaRPr lang="ru-RU" dirty="0">
               <a:solidFill>
@@ -14164,20 +15034,14 @@
       </p:sp>
       <p:pic>
         <p:nvPicPr>
-          <p:cNvPr id="35" name="Рисунок 34">
-            <a:extLst>
-              <a:ext uri="{FF2B5EF4-FFF2-40B4-BE49-F238E27FC236}">
-                <a16:creationId xmlns:a16="http://schemas.microsoft.com/office/drawing/2014/main" xmlns="" id="{37282EA3-8D51-781C-3E04-81A4AC1AC9A5}"/>
-              </a:ext>
-            </a:extLst>
-          </p:cNvPr>
+          <p:cNvPr id="35" name="Рисунок 34"/>
           <p:cNvPicPr>
             <a:picLocks noChangeAspect="1"/>
           </p:cNvPicPr>
           <p:nvPr/>
         </p:nvPicPr>
         <p:blipFill>
-          <a:blip r:embed="rId2">
+          <a:blip r:embed="rId1">
             <a:duotone>
               <a:schemeClr val="accent1">
                 <a:shade val="45000"/>
@@ -14188,7 +15052,7 @@
             <a:extLst>
               <a:ext uri="{BEBA8EAE-BF5A-486C-A8C5-ECC9F3942E4B}">
                 <a14:imgProps xmlns:a14="http://schemas.microsoft.com/office/drawing/2010/main">
-                  <a14:imgLayer r:embed="rId3">
+                  <a14:imgLayer r:embed="rId2">
                     <a14:imgEffect>
                       <a14:saturation sat="0"/>
                     </a14:imgEffect>
@@ -14213,13 +15077,7 @@
       </p:pic>
       <p:cxnSp>
         <p:nvCxnSpPr>
-          <p:cNvPr id="36" name="Прямая соединительная линия 35">
-            <a:extLst>
-              <a:ext uri="{FF2B5EF4-FFF2-40B4-BE49-F238E27FC236}">
-                <a16:creationId xmlns:a16="http://schemas.microsoft.com/office/drawing/2014/main" xmlns="" id="{605EC80F-4BA5-DACD-7CCA-24FF9952B746}"/>
-              </a:ext>
-            </a:extLst>
-          </p:cNvPr>
+          <p:cNvPr id="36" name="Прямая соединительная линия 35"/>
           <p:cNvCxnSpPr/>
           <p:nvPr/>
         </p:nvCxnSpPr>
@@ -14279,20 +15137,14 @@
       </p:grpSpPr>
       <p:pic>
         <p:nvPicPr>
-          <p:cNvPr id="59" name="Рисунок 58">
-            <a:extLst>
-              <a:ext uri="{FF2B5EF4-FFF2-40B4-BE49-F238E27FC236}">
-                <a16:creationId xmlns:a16="http://schemas.microsoft.com/office/drawing/2014/main" xmlns="" id="{F7BF4247-A254-FCA0-ECE2-FCC81609CABD}"/>
-              </a:ext>
-            </a:extLst>
-          </p:cNvPr>
+          <p:cNvPr id="59" name="Рисунок 58"/>
           <p:cNvPicPr>
             <a:picLocks noChangeAspect="1"/>
           </p:cNvPicPr>
           <p:nvPr/>
         </p:nvPicPr>
         <p:blipFill>
-          <a:blip r:embed="rId2"/>
+          <a:blip r:embed="rId1"/>
           <a:stretch>
             <a:fillRect/>
           </a:stretch>
@@ -14309,13 +15161,7 @@
       </p:pic>
       <p:sp>
         <p:nvSpPr>
-          <p:cNvPr id="2" name="TextBox 1">
-            <a:extLst>
-              <a:ext uri="{FF2B5EF4-FFF2-40B4-BE49-F238E27FC236}">
-                <a16:creationId xmlns:a16="http://schemas.microsoft.com/office/drawing/2014/main" xmlns="" id="{ED6F1DD9-E4A4-4B20-F23F-365BFF630BEA}"/>
-              </a:ext>
-            </a:extLst>
-          </p:cNvPr>
+          <p:cNvPr id="2" name="TextBox 1"/>
           <p:cNvSpPr txBox="1"/>
           <p:nvPr/>
         </p:nvSpPr>
@@ -14341,7 +15187,7 @@
                 <a:solidFill>
                   <a:srgbClr val="156082"/>
                 </a:solidFill>
-                <a:latin typeface="Cambria"/>
+                <a:latin typeface="Cambria" panose="02040503050406030204"/>
               </a:rPr>
               <a:t>Пример оценки </a:t>
             </a:r>
@@ -14350,7 +15196,7 @@
                 <a:solidFill>
                   <a:srgbClr val="156082"/>
                 </a:solidFill>
-                <a:latin typeface="Cambria"/>
+                <a:latin typeface="Cambria" panose="02040503050406030204"/>
               </a:rPr>
               <a:t>ESG</a:t>
             </a:r>
@@ -14359,22 +15205,22 @@
                 <a:solidFill>
                   <a:srgbClr val="156082"/>
                 </a:solidFill>
-                <a:latin typeface="Cambria"/>
+                <a:latin typeface="Cambria" panose="02040503050406030204"/>
               </a:rPr>
               <a:t>-зрелости банка </a:t>
             </a:r>
-          </a:p>
-        </p:txBody>
-      </p:sp>
-      <p:sp>
-        <p:nvSpPr>
-          <p:cNvPr id="3" name="Rounded Rectangle 4">
-            <a:extLst>
-              <a:ext uri="{FF2B5EF4-FFF2-40B4-BE49-F238E27FC236}">
-                <a16:creationId xmlns:a16="http://schemas.microsoft.com/office/drawing/2014/main" xmlns="" id="{3ACF330A-9639-A6A7-0F06-A97280EAF87E}"/>
-              </a:ext>
-            </a:extLst>
-          </p:cNvPr>
+            <a:endParaRPr lang="ru-RU" sz="3200" b="1" i="0" dirty="0">
+              <a:solidFill>
+                <a:srgbClr val="156082"/>
+              </a:solidFill>
+              <a:latin typeface="Cambria" panose="02040503050406030204"/>
+            </a:endParaRPr>
+          </a:p>
+        </p:txBody>
+      </p:sp>
+      <p:sp>
+        <p:nvSpPr>
+          <p:cNvPr id="3" name="Rounded Rectangle 4"/>
           <p:cNvSpPr/>
           <p:nvPr/>
         </p:nvSpPr>
@@ -14423,13 +15269,7 @@
       </p:sp>
       <p:sp>
         <p:nvSpPr>
-          <p:cNvPr id="4" name="TextBox 3">
-            <a:extLst>
-              <a:ext uri="{FF2B5EF4-FFF2-40B4-BE49-F238E27FC236}">
-                <a16:creationId xmlns:a16="http://schemas.microsoft.com/office/drawing/2014/main" xmlns="" id="{5742B1D0-3B0B-217B-C230-22A77C5CAB0C}"/>
-              </a:ext>
-            </a:extLst>
-          </p:cNvPr>
+          <p:cNvPr id="4" name="TextBox 3"/>
           <p:cNvSpPr txBox="1"/>
           <p:nvPr/>
         </p:nvSpPr>
@@ -14455,22 +15295,22 @@
                 <a:solidFill>
                   <a:srgbClr val="CFE0D3"/>
                 </a:solidFill>
-                <a:latin typeface="Calibri"/>
+                <a:latin typeface="Calibri" panose="020F0502020204030204"/>
               </a:rPr>
               <a:t>ИТОГОВАЯ ОЦЕНКА</a:t>
             </a:r>
-          </a:p>
-        </p:txBody>
-      </p:sp>
-      <p:sp>
-        <p:nvSpPr>
-          <p:cNvPr id="5" name="TextBox 4">
-            <a:extLst>
-              <a:ext uri="{FF2B5EF4-FFF2-40B4-BE49-F238E27FC236}">
-                <a16:creationId xmlns:a16="http://schemas.microsoft.com/office/drawing/2014/main" xmlns="" id="{3AC30C7B-9045-A4E0-D7D3-563979A12F6A}"/>
-              </a:ext>
-            </a:extLst>
-          </p:cNvPr>
+            <a:endParaRPr lang="ru-RU" sz="1100" b="1" i="0" dirty="0">
+              <a:solidFill>
+                <a:srgbClr val="CFE0D3"/>
+              </a:solidFill>
+              <a:latin typeface="Calibri" panose="020F0502020204030204"/>
+            </a:endParaRPr>
+          </a:p>
+        </p:txBody>
+      </p:sp>
+      <p:sp>
+        <p:nvSpPr>
+          <p:cNvPr id="5" name="TextBox 4"/>
           <p:cNvSpPr txBox="1"/>
           <p:nvPr/>
         </p:nvSpPr>
@@ -14496,7 +15336,7 @@
                 <a:solidFill>
                   <a:srgbClr val="FFFFFF"/>
                 </a:solidFill>
-                <a:latin typeface="Cambria"/>
+                <a:latin typeface="Cambria" panose="02040503050406030204"/>
               </a:rPr>
               <a:t>C</a:t>
             </a:r>
@@ -14504,20 +15344,14 @@
               <a:solidFill>
                 <a:srgbClr val="FFFFFF"/>
               </a:solidFill>
-              <a:latin typeface="Cambria"/>
-            </a:endParaRPr>
-          </a:p>
-        </p:txBody>
-      </p:sp>
-      <p:sp>
-        <p:nvSpPr>
-          <p:cNvPr id="6" name="TextBox 5">
-            <a:extLst>
-              <a:ext uri="{FF2B5EF4-FFF2-40B4-BE49-F238E27FC236}">
-                <a16:creationId xmlns:a16="http://schemas.microsoft.com/office/drawing/2014/main" xmlns="" id="{44F99CE3-713D-2F7E-E472-45F2237169CE}"/>
-              </a:ext>
-            </a:extLst>
-          </p:cNvPr>
+              <a:latin typeface="Cambria" panose="02040503050406030204"/>
+            </a:endParaRPr>
+          </a:p>
+        </p:txBody>
+      </p:sp>
+      <p:sp>
+        <p:nvSpPr>
+          <p:cNvPr id="6" name="TextBox 5"/>
           <p:cNvSpPr txBox="1"/>
           <p:nvPr/>
         </p:nvSpPr>
@@ -14543,22 +15377,22 @@
                 <a:solidFill>
                   <a:srgbClr val="C8922B"/>
                 </a:solidFill>
-                <a:latin typeface="Calibri"/>
+                <a:latin typeface="Calibri" panose="020F0502020204030204"/>
               </a:rPr>
               <a:t>УВЕРЕННЫЙ · 41–60 %</a:t>
             </a:r>
-          </a:p>
-        </p:txBody>
-      </p:sp>
-      <p:sp>
-        <p:nvSpPr>
-          <p:cNvPr id="7" name="TextBox 6">
-            <a:extLst>
-              <a:ext uri="{FF2B5EF4-FFF2-40B4-BE49-F238E27FC236}">
-                <a16:creationId xmlns:a16="http://schemas.microsoft.com/office/drawing/2014/main" xmlns="" id="{E7430964-4A29-FC7E-75FB-16B0D0C55904}"/>
-              </a:ext>
-            </a:extLst>
-          </p:cNvPr>
+            <a:endParaRPr lang="ru-RU" sz="1400" b="1" i="0" dirty="0">
+              <a:solidFill>
+                <a:srgbClr val="C8922B"/>
+              </a:solidFill>
+              <a:latin typeface="Calibri" panose="020F0502020204030204"/>
+            </a:endParaRPr>
+          </a:p>
+        </p:txBody>
+      </p:sp>
+      <p:sp>
+        <p:nvSpPr>
+          <p:cNvPr id="7" name="TextBox 6"/>
           <p:cNvSpPr txBox="1"/>
           <p:nvPr/>
         </p:nvSpPr>
@@ -14584,22 +15418,22 @@
                 <a:solidFill>
                   <a:srgbClr val="CFE0D3"/>
                 </a:solidFill>
-                <a:latin typeface="Calibri"/>
+                <a:latin typeface="Calibri" panose="020F0502020204030204"/>
               </a:rPr>
               <a:t>EQ ≈ 43 %</a:t>
             </a:r>
-          </a:p>
-        </p:txBody>
-      </p:sp>
-      <p:sp>
-        <p:nvSpPr>
-          <p:cNvPr id="8" name="Rounded Rectangle 9">
-            <a:extLst>
-              <a:ext uri="{FF2B5EF4-FFF2-40B4-BE49-F238E27FC236}">
-                <a16:creationId xmlns:a16="http://schemas.microsoft.com/office/drawing/2014/main" xmlns="" id="{1685601B-479C-8FD8-9C1B-0B5C065E1D8C}"/>
-              </a:ext>
-            </a:extLst>
-          </p:cNvPr>
+            <a:endParaRPr lang="ru-RU" sz="1200" b="0" i="0" dirty="0">
+              <a:solidFill>
+                <a:srgbClr val="CFE0D3"/>
+              </a:solidFill>
+              <a:latin typeface="Calibri" panose="020F0502020204030204"/>
+            </a:endParaRPr>
+          </a:p>
+        </p:txBody>
+      </p:sp>
+      <p:sp>
+        <p:nvSpPr>
+          <p:cNvPr id="8" name="Rounded Rectangle 9"/>
           <p:cNvSpPr/>
           <p:nvPr/>
         </p:nvSpPr>
@@ -14648,13 +15482,7 @@
       </p:sp>
       <p:sp>
         <p:nvSpPr>
-          <p:cNvPr id="9" name="Rounded Rectangle 10">
-            <a:extLst>
-              <a:ext uri="{FF2B5EF4-FFF2-40B4-BE49-F238E27FC236}">
-                <a16:creationId xmlns:a16="http://schemas.microsoft.com/office/drawing/2014/main" xmlns="" id="{A32A5FB8-77ED-9908-BBB0-9EF62CB2907F}"/>
-              </a:ext>
-            </a:extLst>
-          </p:cNvPr>
+          <p:cNvPr id="9" name="Rounded Rectangle 10"/>
           <p:cNvSpPr/>
           <p:nvPr/>
         </p:nvSpPr>
@@ -14701,13 +15529,7 @@
       </p:sp>
       <p:sp>
         <p:nvSpPr>
-          <p:cNvPr id="10" name="TextBox 9">
-            <a:extLst>
-              <a:ext uri="{FF2B5EF4-FFF2-40B4-BE49-F238E27FC236}">
-                <a16:creationId xmlns:a16="http://schemas.microsoft.com/office/drawing/2014/main" xmlns="" id="{365F09CC-F67D-7429-DAC2-0CE9BACAD3EF}"/>
-              </a:ext>
-            </a:extLst>
-          </p:cNvPr>
+          <p:cNvPr id="10" name="TextBox 9"/>
           <p:cNvSpPr txBox="1"/>
           <p:nvPr/>
         </p:nvSpPr>
@@ -14733,7 +15555,7 @@
                 <a:solidFill>
                   <a:srgbClr val="FFFFFF"/>
                 </a:solidFill>
-                <a:latin typeface="Cambria"/>
+                <a:latin typeface="Cambria" panose="02040503050406030204"/>
               </a:rPr>
               <a:t>E</a:t>
             </a:r>
@@ -14741,20 +15563,14 @@
               <a:solidFill>
                 <a:srgbClr val="FFFFFF"/>
               </a:solidFill>
-              <a:latin typeface="Cambria"/>
-            </a:endParaRPr>
-          </a:p>
-        </p:txBody>
-      </p:sp>
-      <p:sp>
-        <p:nvSpPr>
-          <p:cNvPr id="11" name="TextBox 10">
-            <a:extLst>
-              <a:ext uri="{FF2B5EF4-FFF2-40B4-BE49-F238E27FC236}">
-                <a16:creationId xmlns:a16="http://schemas.microsoft.com/office/drawing/2014/main" xmlns="" id="{47B8CEBC-50BE-F374-71B1-600F20472105}"/>
-              </a:ext>
-            </a:extLst>
-          </p:cNvPr>
+              <a:latin typeface="Cambria" panose="02040503050406030204"/>
+            </a:endParaRPr>
+          </a:p>
+        </p:txBody>
+      </p:sp>
+      <p:sp>
+        <p:nvSpPr>
+          <p:cNvPr id="11" name="TextBox 10"/>
           <p:cNvSpPr txBox="1"/>
           <p:nvPr/>
         </p:nvSpPr>
@@ -14780,7 +15596,7 @@
                 <a:solidFill>
                   <a:srgbClr val="1F2A24"/>
                 </a:solidFill>
-                <a:latin typeface="Calibri"/>
+                <a:latin typeface="Calibri" panose="020F0502020204030204"/>
               </a:rPr>
               <a:t>Environmental</a:t>
             </a:r>
@@ -14788,20 +15604,14 @@
               <a:solidFill>
                 <a:srgbClr val="1F2A24"/>
               </a:solidFill>
-              <a:latin typeface="Calibri"/>
-            </a:endParaRPr>
-          </a:p>
-        </p:txBody>
-      </p:sp>
-      <p:sp>
-        <p:nvSpPr>
-          <p:cNvPr id="12" name="TextBox 11">
-            <a:extLst>
-              <a:ext uri="{FF2B5EF4-FFF2-40B4-BE49-F238E27FC236}">
-                <a16:creationId xmlns:a16="http://schemas.microsoft.com/office/drawing/2014/main" xmlns="" id="{33414C82-644E-0D9C-A500-93C5E7BD4A7A}"/>
-              </a:ext>
-            </a:extLst>
-          </p:cNvPr>
+              <a:latin typeface="Calibri" panose="020F0502020204030204"/>
+            </a:endParaRPr>
+          </a:p>
+        </p:txBody>
+      </p:sp>
+      <p:sp>
+        <p:nvSpPr>
+          <p:cNvPr id="12" name="TextBox 11"/>
           <p:cNvSpPr txBox="1"/>
           <p:nvPr/>
         </p:nvSpPr>
@@ -14827,7 +15637,7 @@
                 <a:solidFill>
                   <a:srgbClr val="B26B1E"/>
                 </a:solidFill>
-                <a:latin typeface="Cambria"/>
+                <a:latin typeface="Cambria" panose="02040503050406030204"/>
               </a:rPr>
               <a:t>D</a:t>
             </a:r>
@@ -14835,20 +15645,14 @@
               <a:solidFill>
                 <a:srgbClr val="B26B1E"/>
               </a:solidFill>
-              <a:latin typeface="Cambria"/>
-            </a:endParaRPr>
-          </a:p>
-        </p:txBody>
-      </p:sp>
-      <p:sp>
-        <p:nvSpPr>
-          <p:cNvPr id="13" name="Rounded Rectangle 14">
-            <a:extLst>
-              <a:ext uri="{FF2B5EF4-FFF2-40B4-BE49-F238E27FC236}">
-                <a16:creationId xmlns:a16="http://schemas.microsoft.com/office/drawing/2014/main" xmlns="" id="{765C2C2D-8FA5-DBB2-55D6-E79C002E6C20}"/>
-              </a:ext>
-            </a:extLst>
-          </p:cNvPr>
+              <a:latin typeface="Cambria" panose="02040503050406030204"/>
+            </a:endParaRPr>
+          </a:p>
+        </p:txBody>
+      </p:sp>
+      <p:sp>
+        <p:nvSpPr>
+          <p:cNvPr id="13" name="Rounded Rectangle 14"/>
           <p:cNvSpPr/>
           <p:nvPr/>
         </p:nvSpPr>
@@ -14897,13 +15701,7 @@
       </p:sp>
       <p:sp>
         <p:nvSpPr>
-          <p:cNvPr id="14" name="Rounded Rectangle 15">
-            <a:extLst>
-              <a:ext uri="{FF2B5EF4-FFF2-40B4-BE49-F238E27FC236}">
-                <a16:creationId xmlns:a16="http://schemas.microsoft.com/office/drawing/2014/main" xmlns="" id="{F11DAD37-6452-8792-094D-992866257569}"/>
-              </a:ext>
-            </a:extLst>
-          </p:cNvPr>
+          <p:cNvPr id="14" name="Rounded Rectangle 15"/>
           <p:cNvSpPr/>
           <p:nvPr/>
         </p:nvSpPr>
@@ -14950,13 +15748,7 @@
       </p:sp>
       <p:sp>
         <p:nvSpPr>
-          <p:cNvPr id="15" name="TextBox 14">
-            <a:extLst>
-              <a:ext uri="{FF2B5EF4-FFF2-40B4-BE49-F238E27FC236}">
-                <a16:creationId xmlns:a16="http://schemas.microsoft.com/office/drawing/2014/main" xmlns="" id="{E0CFCEE1-E4EA-928E-F1AE-61245D1E6B9E}"/>
-              </a:ext>
-            </a:extLst>
-          </p:cNvPr>
+          <p:cNvPr id="15" name="TextBox 14"/>
           <p:cNvSpPr txBox="1"/>
           <p:nvPr/>
         </p:nvSpPr>
@@ -14982,7 +15774,7 @@
                 <a:solidFill>
                   <a:srgbClr val="FFFFFF"/>
                 </a:solidFill>
-                <a:latin typeface="Cambria"/>
+                <a:latin typeface="Cambria" panose="02040503050406030204"/>
               </a:rPr>
               <a:t>S</a:t>
             </a:r>
@@ -14990,20 +15782,14 @@
               <a:solidFill>
                 <a:srgbClr val="FFFFFF"/>
               </a:solidFill>
-              <a:latin typeface="Cambria"/>
-            </a:endParaRPr>
-          </a:p>
-        </p:txBody>
-      </p:sp>
-      <p:sp>
-        <p:nvSpPr>
-          <p:cNvPr id="16" name="TextBox 15">
-            <a:extLst>
-              <a:ext uri="{FF2B5EF4-FFF2-40B4-BE49-F238E27FC236}">
-                <a16:creationId xmlns:a16="http://schemas.microsoft.com/office/drawing/2014/main" xmlns="" id="{6295AC99-98C2-3982-72E7-3695538115B2}"/>
-              </a:ext>
-            </a:extLst>
-          </p:cNvPr>
+              <a:latin typeface="Cambria" panose="02040503050406030204"/>
+            </a:endParaRPr>
+          </a:p>
+        </p:txBody>
+      </p:sp>
+      <p:sp>
+        <p:nvSpPr>
+          <p:cNvPr id="16" name="TextBox 15"/>
           <p:cNvSpPr txBox="1"/>
           <p:nvPr/>
         </p:nvSpPr>
@@ -15029,22 +15815,22 @@
                 <a:solidFill>
                   <a:srgbClr val="1F2A24"/>
                 </a:solidFill>
-                <a:latin typeface="Calibri"/>
+                <a:latin typeface="Calibri" panose="020F0502020204030204"/>
               </a:rPr>
               <a:t>Social</a:t>
             </a:r>
-          </a:p>
-        </p:txBody>
-      </p:sp>
-      <p:sp>
-        <p:nvSpPr>
-          <p:cNvPr id="17" name="TextBox 16">
-            <a:extLst>
-              <a:ext uri="{FF2B5EF4-FFF2-40B4-BE49-F238E27FC236}">
-                <a16:creationId xmlns:a16="http://schemas.microsoft.com/office/drawing/2014/main" xmlns="" id="{F4FC2C26-4E02-87FF-24F3-6FE50CB84940}"/>
-              </a:ext>
-            </a:extLst>
-          </p:cNvPr>
+            <a:endParaRPr lang="ru-RU" sz="1600" b="1" i="0" dirty="0">
+              <a:solidFill>
+                <a:srgbClr val="1F2A24"/>
+              </a:solidFill>
+              <a:latin typeface="Calibri" panose="020F0502020204030204"/>
+            </a:endParaRPr>
+          </a:p>
+        </p:txBody>
+      </p:sp>
+      <p:sp>
+        <p:nvSpPr>
+          <p:cNvPr id="17" name="TextBox 16"/>
           <p:cNvSpPr txBox="1"/>
           <p:nvPr/>
         </p:nvSpPr>
@@ -15070,7 +15856,7 @@
                 <a:solidFill>
                   <a:srgbClr val="B26B1E"/>
                 </a:solidFill>
-                <a:latin typeface="Cambria"/>
+                <a:latin typeface="Cambria" panose="02040503050406030204"/>
               </a:rPr>
               <a:t>D</a:t>
             </a:r>
@@ -15078,20 +15864,14 @@
               <a:solidFill>
                 <a:srgbClr val="B26B1E"/>
               </a:solidFill>
-              <a:latin typeface="Cambria"/>
-            </a:endParaRPr>
-          </a:p>
-        </p:txBody>
-      </p:sp>
-      <p:sp>
-        <p:nvSpPr>
-          <p:cNvPr id="18" name="Rounded Rectangle 19">
-            <a:extLst>
-              <a:ext uri="{FF2B5EF4-FFF2-40B4-BE49-F238E27FC236}">
-                <a16:creationId xmlns:a16="http://schemas.microsoft.com/office/drawing/2014/main" xmlns="" id="{0E74C4A9-A774-45B5-0603-C73BEAAF6CBD}"/>
-              </a:ext>
-            </a:extLst>
-          </p:cNvPr>
+              <a:latin typeface="Cambria" panose="02040503050406030204"/>
+            </a:endParaRPr>
+          </a:p>
+        </p:txBody>
+      </p:sp>
+      <p:sp>
+        <p:nvSpPr>
+          <p:cNvPr id="18" name="Rounded Rectangle 19"/>
           <p:cNvSpPr/>
           <p:nvPr/>
         </p:nvSpPr>
@@ -15140,13 +15920,7 @@
       </p:sp>
       <p:sp>
         <p:nvSpPr>
-          <p:cNvPr id="19" name="Rounded Rectangle 20">
-            <a:extLst>
-              <a:ext uri="{FF2B5EF4-FFF2-40B4-BE49-F238E27FC236}">
-                <a16:creationId xmlns:a16="http://schemas.microsoft.com/office/drawing/2014/main" xmlns="" id="{751127C0-3CB3-5372-219E-27ECC134AC0E}"/>
-              </a:ext>
-            </a:extLst>
-          </p:cNvPr>
+          <p:cNvPr id="19" name="Rounded Rectangle 20"/>
           <p:cNvSpPr/>
           <p:nvPr/>
         </p:nvSpPr>
@@ -15193,13 +15967,7 @@
       </p:sp>
       <p:sp>
         <p:nvSpPr>
-          <p:cNvPr id="20" name="TextBox 19">
-            <a:extLst>
-              <a:ext uri="{FF2B5EF4-FFF2-40B4-BE49-F238E27FC236}">
-                <a16:creationId xmlns:a16="http://schemas.microsoft.com/office/drawing/2014/main" xmlns="" id="{7A8791D5-E784-C7B1-DECE-90FB90DDF4C0}"/>
-              </a:ext>
-            </a:extLst>
-          </p:cNvPr>
+          <p:cNvPr id="20" name="TextBox 19"/>
           <p:cNvSpPr txBox="1"/>
           <p:nvPr/>
         </p:nvSpPr>
@@ -15225,7 +15993,7 @@
                 <a:solidFill>
                   <a:srgbClr val="FFFFFF"/>
                 </a:solidFill>
-                <a:latin typeface="Cambria"/>
+                <a:latin typeface="Cambria" panose="02040503050406030204"/>
               </a:rPr>
               <a:t>G</a:t>
             </a:r>
@@ -15233,20 +16001,14 @@
               <a:solidFill>
                 <a:srgbClr val="FFFFFF"/>
               </a:solidFill>
-              <a:latin typeface="Cambria"/>
-            </a:endParaRPr>
-          </a:p>
-        </p:txBody>
-      </p:sp>
-      <p:sp>
-        <p:nvSpPr>
-          <p:cNvPr id="21" name="TextBox 20">
-            <a:extLst>
-              <a:ext uri="{FF2B5EF4-FFF2-40B4-BE49-F238E27FC236}">
-                <a16:creationId xmlns:a16="http://schemas.microsoft.com/office/drawing/2014/main" xmlns="" id="{23A370E7-8B27-5843-0CD4-493D3268974B}"/>
-              </a:ext>
-            </a:extLst>
-          </p:cNvPr>
+              <a:latin typeface="Cambria" panose="02040503050406030204"/>
+            </a:endParaRPr>
+          </a:p>
+        </p:txBody>
+      </p:sp>
+      <p:sp>
+        <p:nvSpPr>
+          <p:cNvPr id="21" name="TextBox 20"/>
           <p:cNvSpPr txBox="1"/>
           <p:nvPr/>
         </p:nvSpPr>
@@ -15272,7 +16034,7 @@
                 <a:solidFill>
                   <a:srgbClr val="1F2A24"/>
                 </a:solidFill>
-                <a:latin typeface="Calibri"/>
+                <a:latin typeface="Calibri" panose="020F0502020204030204"/>
               </a:rPr>
               <a:t>Governance</a:t>
             </a:r>
@@ -15280,20 +16042,14 @@
               <a:solidFill>
                 <a:srgbClr val="1F2A24"/>
               </a:solidFill>
-              <a:latin typeface="Calibri"/>
-            </a:endParaRPr>
-          </a:p>
-        </p:txBody>
-      </p:sp>
-      <p:sp>
-        <p:nvSpPr>
-          <p:cNvPr id="22" name="TextBox 21">
-            <a:extLst>
-              <a:ext uri="{FF2B5EF4-FFF2-40B4-BE49-F238E27FC236}">
-                <a16:creationId xmlns:a16="http://schemas.microsoft.com/office/drawing/2014/main" xmlns="" id="{61FDE2C2-E81F-8B83-794E-44AEE47ABBBE}"/>
-              </a:ext>
-            </a:extLst>
-          </p:cNvPr>
+              <a:latin typeface="Calibri" panose="020F0502020204030204"/>
+            </a:endParaRPr>
+          </a:p>
+        </p:txBody>
+      </p:sp>
+      <p:sp>
+        <p:nvSpPr>
+          <p:cNvPr id="22" name="TextBox 21"/>
           <p:cNvSpPr txBox="1"/>
           <p:nvPr/>
         </p:nvSpPr>
@@ -15319,7 +16075,7 @@
                 <a:solidFill>
                   <a:srgbClr val="2C5F2D"/>
                 </a:solidFill>
-                <a:latin typeface="Cambria"/>
+                <a:latin typeface="Cambria" panose="02040503050406030204"/>
               </a:rPr>
               <a:t>B</a:t>
             </a:r>
@@ -15328,22 +16084,22 @@
                 <a:solidFill>
                   <a:srgbClr val="2C5F2D"/>
                 </a:solidFill>
-                <a:latin typeface="Cambria"/>
+                <a:latin typeface="Cambria" panose="02040503050406030204"/>
               </a:rPr>
               <a:t>+</a:t>
             </a:r>
-          </a:p>
-        </p:txBody>
-      </p:sp>
-      <p:sp>
-        <p:nvSpPr>
-          <p:cNvPr id="23" name="TextBox 22">
-            <a:extLst>
-              <a:ext uri="{FF2B5EF4-FFF2-40B4-BE49-F238E27FC236}">
-                <a16:creationId xmlns:a16="http://schemas.microsoft.com/office/drawing/2014/main" xmlns="" id="{CBB549D6-8402-F177-5F7E-9CD052C2F1CB}"/>
-              </a:ext>
-            </a:extLst>
-          </p:cNvPr>
+            <a:endParaRPr lang="ru-RU" sz="3200" b="1" i="0" dirty="0">
+              <a:solidFill>
+                <a:srgbClr val="2C5F2D"/>
+              </a:solidFill>
+              <a:latin typeface="Cambria" panose="02040503050406030204"/>
+            </a:endParaRPr>
+          </a:p>
+        </p:txBody>
+      </p:sp>
+      <p:sp>
+        <p:nvSpPr>
+          <p:cNvPr id="23" name="TextBox 22"/>
           <p:cNvSpPr txBox="1"/>
           <p:nvPr/>
         </p:nvSpPr>
@@ -15373,10 +16129,16 @@
                 <a:solidFill>
                   <a:srgbClr val="1F2A24"/>
                 </a:solidFill>
-                <a:latin typeface="Calibri"/>
+                <a:latin typeface="Calibri" panose="020F0502020204030204"/>
               </a:rPr>
               <a:t>Казахстан · финансовая отрасль · период оценки 2024</a:t>
             </a:r>
+            <a:endParaRPr lang="ru-RU" sz="1300" b="0" i="0" dirty="0">
+              <a:solidFill>
+                <a:srgbClr val="1F2A24"/>
+              </a:solidFill>
+              <a:latin typeface="Calibri" panose="020F0502020204030204"/>
+            </a:endParaRPr>
           </a:p>
           <a:p>
             <a:pPr algn="l">
@@ -15389,22 +16151,22 @@
                 <a:solidFill>
                   <a:srgbClr val="5B6B62"/>
                 </a:solidFill>
-                <a:latin typeface="Calibri"/>
+                <a:latin typeface="Calibri" panose="020F0502020204030204"/>
               </a:rPr>
               <a:t>Сертификат QZ2024FINESG0001 · дата выдачи 31.01.2025</a:t>
             </a:r>
-          </a:p>
-        </p:txBody>
-      </p:sp>
-      <p:sp>
-        <p:nvSpPr>
-          <p:cNvPr id="24" name="TextBox 23">
-            <a:extLst>
-              <a:ext uri="{FF2B5EF4-FFF2-40B4-BE49-F238E27FC236}">
-                <a16:creationId xmlns:a16="http://schemas.microsoft.com/office/drawing/2014/main" xmlns="" id="{5FF5071D-25BC-801D-2DEA-D797F112BAA7}"/>
-              </a:ext>
-            </a:extLst>
-          </p:cNvPr>
+            <a:endParaRPr lang="ru-RU" sz="1200" b="0" i="0" dirty="0">
+              <a:solidFill>
+                <a:srgbClr val="5B6B62"/>
+              </a:solidFill>
+              <a:latin typeface="Calibri" panose="020F0502020204030204"/>
+            </a:endParaRPr>
+          </a:p>
+        </p:txBody>
+      </p:sp>
+      <p:sp>
+        <p:nvSpPr>
+          <p:cNvPr id="24" name="TextBox 23"/>
           <p:cNvSpPr txBox="1"/>
           <p:nvPr/>
         </p:nvSpPr>
@@ -15430,22 +16192,22 @@
                 <a:solidFill>
                   <a:srgbClr val="5B6B62"/>
                 </a:solidFill>
-                <a:latin typeface="Calibri"/>
+                <a:latin typeface="Calibri" panose="020F0502020204030204"/>
               </a:rPr>
               <a:t>Экспертное мнение ТОО «Рейтинговое агентство ESGQ» · не кредитный рейтинг · не инвестиционная рекомендация</a:t>
             </a:r>
-          </a:p>
-        </p:txBody>
-      </p:sp>
-      <p:sp>
-        <p:nvSpPr>
-          <p:cNvPr id="25" name="Прямоугольник с двумя скругленными соседними углами 24">
-            <a:extLst>
-              <a:ext uri="{FF2B5EF4-FFF2-40B4-BE49-F238E27FC236}">
-                <a16:creationId xmlns:a16="http://schemas.microsoft.com/office/drawing/2014/main" xmlns="" id="{5E859E6B-133A-1158-AE06-91D780655433}"/>
-              </a:ext>
-            </a:extLst>
-          </p:cNvPr>
+            <a:endParaRPr lang="ru-RU" sz="900" b="0" i="1" dirty="0">
+              <a:solidFill>
+                <a:srgbClr val="5B6B62"/>
+              </a:solidFill>
+              <a:latin typeface="Calibri" panose="020F0502020204030204"/>
+            </a:endParaRPr>
+          </a:p>
+        </p:txBody>
+      </p:sp>
+      <p:sp>
+        <p:nvSpPr>
+          <p:cNvPr id="25" name="Прямоугольник с двумя скругленными соседними углами 24"/>
           <p:cNvSpPr/>
           <p:nvPr/>
         </p:nvSpPr>
@@ -15492,13 +16254,7 @@
       </p:sp>
       <p:sp>
         <p:nvSpPr>
-          <p:cNvPr id="26" name="TextBox 25">
-            <a:extLst>
-              <a:ext uri="{FF2B5EF4-FFF2-40B4-BE49-F238E27FC236}">
-                <a16:creationId xmlns:a16="http://schemas.microsoft.com/office/drawing/2014/main" xmlns="" id="{5C16B8E2-E4DE-5ACD-8FA8-DBD2697336D9}"/>
-              </a:ext>
-            </a:extLst>
-          </p:cNvPr>
+          <p:cNvPr id="26" name="TextBox 25"/>
           <p:cNvSpPr txBox="1"/>
           <p:nvPr/>
         </p:nvSpPr>
@@ -15525,7 +16281,6 @@
                   <a:schemeClr val="bg1"/>
                 </a:solidFill>
               </a:rPr>
-              <a:t>19</a:t>
             </a:fld>
             <a:endParaRPr lang="ru-RU" dirty="0">
               <a:solidFill>
@@ -15537,20 +16292,14 @@
       </p:sp>
       <p:pic>
         <p:nvPicPr>
-          <p:cNvPr id="27" name="Рисунок 26">
-            <a:extLst>
-              <a:ext uri="{FF2B5EF4-FFF2-40B4-BE49-F238E27FC236}">
-                <a16:creationId xmlns:a16="http://schemas.microsoft.com/office/drawing/2014/main" xmlns="" id="{634BE39F-2A98-2F03-ADBA-D5A5A06E07FB}"/>
-              </a:ext>
-            </a:extLst>
-          </p:cNvPr>
+          <p:cNvPr id="27" name="Рисунок 26"/>
           <p:cNvPicPr>
             <a:picLocks noChangeAspect="1"/>
           </p:cNvPicPr>
           <p:nvPr/>
         </p:nvPicPr>
         <p:blipFill>
-          <a:blip r:embed="rId3">
+          <a:blip r:embed="rId2">
             <a:duotone>
               <a:schemeClr val="accent1">
                 <a:shade val="45000"/>
@@ -15561,7 +16310,7 @@
             <a:extLst>
               <a:ext uri="{BEBA8EAE-BF5A-486C-A8C5-ECC9F3942E4B}">
                 <a14:imgProps xmlns:a14="http://schemas.microsoft.com/office/drawing/2010/main">
-                  <a14:imgLayer r:embed="rId4">
+                  <a14:imgLayer r:embed="rId3">
                     <a14:imgEffect>
                       <a14:saturation sat="0"/>
                     </a14:imgEffect>
@@ -15586,13 +16335,7 @@
       </p:pic>
       <p:cxnSp>
         <p:nvCxnSpPr>
-          <p:cNvPr id="28" name="Прямая соединительная линия 27">
-            <a:extLst>
-              <a:ext uri="{FF2B5EF4-FFF2-40B4-BE49-F238E27FC236}">
-                <a16:creationId xmlns:a16="http://schemas.microsoft.com/office/drawing/2014/main" xmlns="" id="{D573FF62-DC65-A809-5B13-798AB87F8FCE}"/>
-              </a:ext>
-            </a:extLst>
-          </p:cNvPr>
+          <p:cNvPr id="28" name="Прямая соединительная линия 27"/>
           <p:cNvCxnSpPr/>
           <p:nvPr/>
         </p:nvCxnSpPr>
@@ -15627,13 +16370,7 @@
       </p:cxnSp>
       <p:sp>
         <p:nvSpPr>
-          <p:cNvPr id="30" name="Прямоугольник 29">
-            <a:extLst>
-              <a:ext uri="{FF2B5EF4-FFF2-40B4-BE49-F238E27FC236}">
-                <a16:creationId xmlns:a16="http://schemas.microsoft.com/office/drawing/2014/main" xmlns="" id="{0ECD04AE-2FDB-8EF8-CFF2-23721A8D9E38}"/>
-              </a:ext>
-            </a:extLst>
-          </p:cNvPr>
+          <p:cNvPr id="30" name="Прямоугольник 29"/>
           <p:cNvSpPr/>
           <p:nvPr/>
         </p:nvSpPr>
@@ -15705,11 +16442,11 @@
           <p:nvPr/>
         </p:nvPicPr>
         <p:blipFill>
-          <a:blip r:embed="rId2">
+          <a:blip r:embed="rId1">
             <a:extLst>
               <a:ext uri="{BEBA8EAE-BF5A-486C-A8C5-ECC9F3942E4B}">
                 <a14:imgProps xmlns:a14="http://schemas.microsoft.com/office/drawing/2010/main">
-                  <a14:imgLayer r:embed="rId3">
+                  <a14:imgLayer r:embed="rId6">
                     <a14:imgEffect>
                       <a14:brightnessContrast bright="40000"/>
                     </a14:imgEffect>
@@ -15809,7 +16546,6 @@
                   <a:schemeClr val="bg1"/>
                 </a:solidFill>
               </a:rPr>
-              <a:t>2</a:t>
             </a:fld>
             <a:endParaRPr lang="ru-RU" dirty="0">
               <a:solidFill>
@@ -15896,8 +16632,6 @@
               </a:rPr>
               <a:t>(Фонд) был создан как самостоятельная международная организация в юрисдикции Международного финансового центра «Астана» для реализации региональных проектов в области изменения климата, устойчивого развития, зеленой энергетики и охраны окружающей среды. </a:t>
             </a:r>
-          </a:p>
-          <a:p>
             <a:endParaRPr lang="ru-RU" sz="1700" dirty="0">
               <a:solidFill>
                 <a:schemeClr val="tx2"/>
@@ -15907,6 +16641,15 @@
             </a:endParaRPr>
           </a:p>
           <a:p>
+            <a:endParaRPr lang="ru-RU" sz="1700" dirty="0">
+              <a:solidFill>
+                <a:schemeClr val="tx2"/>
+              </a:solidFill>
+              <a:latin typeface="Manrope" pitchFamily="2" charset="0"/>
+              <a:cs typeface="Calibri" panose="020F0502020204030204" pitchFamily="34" charset="0"/>
+            </a:endParaRPr>
+          </a:p>
+          <a:p>
             <a:r>
               <a:rPr lang="ru-RU" sz="1700" b="1" dirty="0">
                 <a:solidFill>
@@ -15927,6 +16670,13 @@
               </a:rPr>
               <a:t> Токаева К.К., озвученной на 78-ой сессии Генеральной Ассамблеи ООН в 2023 году в рамках Фонда организован Проектный офис для Центральной Азии, занимающийся повестками изменения климата и зеленой энергетики.</a:t>
             </a:r>
+            <a:endParaRPr lang="ru-RU" sz="1700" dirty="0">
+              <a:solidFill>
+                <a:schemeClr val="tx2"/>
+              </a:solidFill>
+              <a:latin typeface="Manrope" pitchFamily="2" charset="0"/>
+              <a:cs typeface="Calibri" panose="020F0502020204030204" pitchFamily="34" charset="0"/>
+            </a:endParaRPr>
           </a:p>
         </p:txBody>
       </p:sp>
@@ -15978,6 +16728,12 @@
               </a:rPr>
               <a:t>Проектный офис для Центральной Азии </a:t>
             </a:r>
+            <a:endParaRPr lang="ru-RU" sz="1400" b="1" i="1" dirty="0">
+              <a:solidFill>
+                <a:srgbClr val="3B7D48"/>
+              </a:solidFill>
+              <a:cs typeface="Calibri" panose="020F0502020204030204" pitchFamily="34" charset="0"/>
+            </a:endParaRPr>
           </a:p>
           <a:p>
             <a:r>
@@ -15989,6 +16745,12 @@
               </a:rPr>
               <a:t>по изменению климата и зеленой энергетике</a:t>
             </a:r>
+            <a:endParaRPr lang="ru-RU" sz="1400" b="1" i="1" dirty="0">
+              <a:solidFill>
+                <a:srgbClr val="3B7D48"/>
+              </a:solidFill>
+              <a:cs typeface="Calibri" panose="020F0502020204030204" pitchFamily="34" charset="0"/>
+            </a:endParaRPr>
           </a:p>
         </p:txBody>
       </p:sp>
@@ -16001,7 +16763,7 @@
           <p:nvPr/>
         </p:nvPicPr>
         <p:blipFill>
-          <a:blip r:embed="rId4"/>
+          <a:blip r:embed="rId3"/>
           <a:stretch>
             <a:fillRect/>
           </a:stretch>
@@ -16089,7 +16851,7 @@
               </a:pathLst>
             </a:custGeom>
             <a:blipFill>
-              <a:blip r:embed="rId5"/>
+              <a:blip r:embed="rId4"/>
               <a:stretch>
                 <a:fillRect l="-57298" r="-57298"/>
               </a:stretch>
@@ -16147,6 +16909,14 @@
               </a:rPr>
               <a:t>«...Постепенный, устойчивый и социально ответственный переход от использования угля стал бы большим преимуществом для достижения глобальных целей в области изменения климата.</a:t>
             </a:r>
+            <a:endParaRPr lang="ru-RU" sz="1700" i="1" dirty="0">
+              <a:solidFill>
+                <a:schemeClr val="tx2"/>
+              </a:solidFill>
+              <a:latin typeface="Manrope" pitchFamily="2" charset="0"/>
+              <a:cs typeface="Calibri" panose="020F0502020204030204" pitchFamily="34" charset="0"/>
+              <a:sym typeface="Inter" panose="020B0502030000000004"/>
+            </a:endParaRPr>
           </a:p>
           <a:p>
             <a:pPr indent="0" algn="just" fontAlgn="auto">
@@ -16221,7 +16991,7 @@
                 <a:solidFill>
                   <a:srgbClr val="FFC000"/>
                 </a:solidFill>
-                <a:latin typeface="Calibri"/>
+                <a:latin typeface="Calibri" panose="020F0502020204030204"/>
               </a:defRPr>
             </a:lvl1pPr>
           </a:lstStyle>
@@ -16238,6 +17008,9 @@
               </a:rPr>
               <a:t>Инициатива Казахстана по открытию Проектного офиса для Центральной Азии по изменению климата и зеленой энергетике может способствовать решению этих вопросов ...»</a:t>
             </a:r>
+            <a:endParaRPr lang="ru-RU" i="1" dirty="0">
+              <a:sym typeface="Inter Bold" panose="020B0802030000000004"/>
+            </a:endParaRPr>
           </a:p>
           <a:p>
             <a:endParaRPr lang="ru-RU" i="1" dirty="0">
@@ -16289,7 +17062,7 @@
           <p:nvPr/>
         </p:nvPicPr>
         <p:blipFill>
-          <a:blip r:embed="rId2"/>
+          <a:blip r:embed="rId1"/>
           <a:stretch>
             <a:fillRect/>
           </a:stretch>
@@ -16313,7 +17086,7 @@
           <p:nvPr/>
         </p:nvPicPr>
         <p:blipFill>
-          <a:blip r:embed="rId3" cstate="print">
+          <a:blip r:embed="rId2" cstate="print">
             <a:duotone>
               <a:schemeClr val="bg2">
                 <a:shade val="45000"/>
@@ -16324,7 +17097,7 @@
             <a:extLst>
               <a:ext uri="{BEBA8EAE-BF5A-486C-A8C5-ECC9F3942E4B}">
                 <a14:imgProps xmlns:a14="http://schemas.microsoft.com/office/drawing/2010/main">
-                  <a14:imgLayer r:embed="rId4">
+                  <a14:imgLayer r:embed="rId3">
                     <a14:imgEffect>
                       <a14:artisticChalkSketch/>
                     </a14:imgEffect>
@@ -16392,12 +17165,48 @@
                   <a:schemeClr val="bg1"/>
                 </a:solidFill>
                 <a:effectLst/>
-                <a:latin typeface="Aptos" panose="020B0004020202020204" pitchFamily="34" charset="0"/>
-                <a:ea typeface="Aptos" panose="020B0004020202020204" pitchFamily="34" charset="0"/>
+                <a:latin typeface="Aptos" charset="0"/>
+                <a:ea typeface="Aptos" charset="0"/>
+                <a:cs typeface="Times New Roman" panose="02020603050405020304" pitchFamily="18" charset="0"/>
+                <a:hlinkClick r:id="rId4"/>
+              </a:rPr>
+              <a:t>office@caclimate.fund</a:t>
+            </a:r>
+            <a:r>
+              <a:rPr lang="ru-RU" sz="1800" kern="100" noProof="1">
+                <a:solidFill>
+                  <a:schemeClr val="bg1"/>
+                </a:solidFill>
+                <a:effectLst/>
+                <a:latin typeface="Aptos" charset="0"/>
+                <a:ea typeface="Aptos" charset="0"/>
+                <a:cs typeface="Times New Roman" panose="02020603050405020304" pitchFamily="18" charset="0"/>
+              </a:rPr>
+              <a:t> </a:t>
+            </a:r>
+            <a:br>
+              <a:rPr lang="ru-RU" sz="1800" kern="100" noProof="1">
+                <a:solidFill>
+                  <a:schemeClr val="bg1"/>
+                </a:solidFill>
+                <a:effectLst/>
+                <a:latin typeface="Aptos" charset="0"/>
+                <a:ea typeface="Aptos" charset="0"/>
+                <a:cs typeface="Times New Roman" panose="02020603050405020304" pitchFamily="18" charset="0"/>
+              </a:rPr>
+            </a:br>
+            <a:r>
+              <a:rPr lang="ru-RU" sz="1800" u="none" strike="noStrike" kern="100" noProof="1">
+                <a:solidFill>
+                  <a:schemeClr val="bg1"/>
+                </a:solidFill>
+                <a:effectLst/>
+                <a:latin typeface="Aptos" charset="0"/>
+                <a:ea typeface="Aptos" charset="0"/>
                 <a:cs typeface="Times New Roman" panose="02020603050405020304" pitchFamily="18" charset="0"/>
                 <a:hlinkClick r:id="rId5"/>
               </a:rPr>
-              <a:t>office@caclimate.fund</a:t>
+              <a:t>www.caclimate.fund</a:t>
             </a:r>
             <a:r>
               <a:rPr lang="ru-RU" sz="1800" kern="100" noProof="1">
@@ -16405,8 +17214,8 @@
                   <a:schemeClr val="bg1"/>
                 </a:solidFill>
                 <a:effectLst/>
-                <a:latin typeface="Aptos" panose="020B0004020202020204" pitchFamily="34" charset="0"/>
-                <a:ea typeface="Aptos" panose="020B0004020202020204" pitchFamily="34" charset="0"/>
+                <a:latin typeface="Aptos" charset="0"/>
+                <a:ea typeface="Aptos" charset="0"/>
                 <a:cs typeface="Times New Roman" panose="02020603050405020304" pitchFamily="18" charset="0"/>
               </a:rPr>
               <a:t> </a:t>
@@ -16417,56 +17226,20 @@
                   <a:schemeClr val="bg1"/>
                 </a:solidFill>
                 <a:effectLst/>
-                <a:latin typeface="Aptos" panose="020B0004020202020204" pitchFamily="34" charset="0"/>
-                <a:ea typeface="Aptos" panose="020B0004020202020204" pitchFamily="34" charset="0"/>
+                <a:latin typeface="Aptos" charset="0"/>
+                <a:ea typeface="Aptos" charset="0"/>
                 <a:cs typeface="Times New Roman" panose="02020603050405020304" pitchFamily="18" charset="0"/>
               </a:rPr>
             </a:br>
             <a:r>
-              <a:rPr lang="ru-RU" sz="1800" u="none" strike="noStrike" kern="100" noProof="1">
+              <a:rPr lang="ru-RU" sz="1800" kern="100" noProof="1">
                 <a:solidFill>
                   <a:schemeClr val="bg1"/>
                 </a:solidFill>
                 <a:effectLst/>
-                <a:latin typeface="Aptos" panose="020B0004020202020204" pitchFamily="34" charset="0"/>
-                <a:ea typeface="Aptos" panose="020B0004020202020204" pitchFamily="34" charset="0"/>
+                <a:latin typeface="Aptos" charset="0"/>
+                <a:ea typeface="Aptos" charset="0"/>
                 <a:cs typeface="Times New Roman" panose="02020603050405020304" pitchFamily="18" charset="0"/>
-                <a:hlinkClick r:id="rId6"/>
-              </a:rPr>
-              <a:t>www.caclimate.fund</a:t>
-            </a:r>
-            <a:r>
-              <a:rPr lang="ru-RU" sz="1800" kern="100" noProof="1">
-                <a:solidFill>
-                  <a:schemeClr val="bg1"/>
-                </a:solidFill>
-                <a:effectLst/>
-                <a:latin typeface="Aptos" panose="020B0004020202020204" pitchFamily="34" charset="0"/>
-                <a:ea typeface="Aptos" panose="020B0004020202020204" pitchFamily="34" charset="0"/>
-                <a:cs typeface="Times New Roman" panose="02020603050405020304" pitchFamily="18" charset="0"/>
-              </a:rPr>
-              <a:t> </a:t>
-            </a:r>
-            <a:br>
-              <a:rPr lang="ru-RU" sz="1800" kern="100" noProof="1">
-                <a:solidFill>
-                  <a:schemeClr val="bg1"/>
-                </a:solidFill>
-                <a:effectLst/>
-                <a:latin typeface="Aptos" panose="020B0004020202020204" pitchFamily="34" charset="0"/>
-                <a:ea typeface="Aptos" panose="020B0004020202020204" pitchFamily="34" charset="0"/>
-                <a:cs typeface="Times New Roman" panose="02020603050405020304" pitchFamily="18" charset="0"/>
-              </a:rPr>
-            </a:br>
-            <a:r>
-              <a:rPr lang="ru-RU" sz="1800" kern="100" noProof="1">
-                <a:solidFill>
-                  <a:schemeClr val="bg1"/>
-                </a:solidFill>
-                <a:effectLst/>
-                <a:latin typeface="Aptos" panose="020B0004020202020204" pitchFamily="34" charset="0"/>
-                <a:ea typeface="Aptos" panose="020B0004020202020204" pitchFamily="34" charset="0"/>
-                <a:cs typeface="Times New Roman" panose="02020603050405020304" pitchFamily="18" charset="0"/>
               </a:rPr>
               <a:t>+77083457971</a:t>
             </a:r>
@@ -16475,8 +17248,8 @@
                 <a:schemeClr val="bg1"/>
               </a:solidFill>
               <a:effectLst/>
-              <a:latin typeface="Aptos" panose="020B0004020202020204" pitchFamily="34" charset="0"/>
-              <a:ea typeface="Aptos" panose="020B0004020202020204" pitchFamily="34" charset="0"/>
+              <a:latin typeface="Aptos" charset="0"/>
+              <a:ea typeface="Aptos" charset="0"/>
               <a:cs typeface="Times New Roman" panose="02020603050405020304" pitchFamily="18" charset="0"/>
             </a:endParaRPr>
           </a:p>
@@ -16496,8 +17269,8 @@
                   <a:schemeClr val="bg1"/>
                 </a:solidFill>
                 <a:effectLst/>
-                <a:latin typeface="Aptos" panose="020B0004020202020204" pitchFamily="34" charset="0"/>
-                <a:ea typeface="Aptos" panose="020B0004020202020204" pitchFamily="34" charset="0"/>
+                <a:latin typeface="Aptos" charset="0"/>
+                <a:ea typeface="Aptos" charset="0"/>
                 <a:cs typeface="Times New Roman" panose="02020603050405020304" pitchFamily="18" charset="0"/>
               </a:rPr>
               <a:t>010000, Қазақстан, Астана, </a:t>
@@ -16508,8 +17281,8 @@
                   <a:schemeClr val="bg1"/>
                 </a:solidFill>
                 <a:effectLst/>
-                <a:latin typeface="Aptos" panose="020B0004020202020204" pitchFamily="34" charset="0"/>
-                <a:ea typeface="Aptos" panose="020B0004020202020204" pitchFamily="34" charset="0"/>
+                <a:latin typeface="Aptos" charset="0"/>
+                <a:ea typeface="Aptos" charset="0"/>
                 <a:cs typeface="Times New Roman" panose="02020603050405020304" pitchFamily="18" charset="0"/>
               </a:rPr>
             </a:br>
@@ -16519,8 +17292,8 @@
                   <a:schemeClr val="bg1"/>
                 </a:solidFill>
                 <a:effectLst/>
-                <a:latin typeface="Aptos" panose="020B0004020202020204" pitchFamily="34" charset="0"/>
-                <a:ea typeface="Aptos" panose="020B0004020202020204" pitchFamily="34" charset="0"/>
+                <a:latin typeface="Aptos" charset="0"/>
+                <a:ea typeface="Aptos" charset="0"/>
                 <a:cs typeface="Times New Roman" panose="02020603050405020304" pitchFamily="18" charset="0"/>
               </a:rPr>
               <a:t>Мәңгілік Ел даң., 11/1, оф. 703 </a:t>
@@ -16530,8 +17303,8 @@
                 <a:schemeClr val="bg1"/>
               </a:solidFill>
               <a:effectLst/>
-              <a:latin typeface="Aptos" panose="020B0004020202020204" pitchFamily="34" charset="0"/>
-              <a:ea typeface="Aptos" panose="020B0004020202020204" pitchFamily="34" charset="0"/>
+              <a:latin typeface="Aptos" charset="0"/>
+              <a:ea typeface="Aptos" charset="0"/>
               <a:cs typeface="Times New Roman" panose="02020603050405020304" pitchFamily="18" charset="0"/>
             </a:endParaRPr>
           </a:p>
@@ -16551,8 +17324,8 @@
                   <a:schemeClr val="bg1"/>
                 </a:solidFill>
                 <a:effectLst/>
-                <a:latin typeface="Aptos" panose="020B0004020202020204" pitchFamily="34" charset="0"/>
-                <a:ea typeface="Aptos" panose="020B0004020202020204" pitchFamily="34" charset="0"/>
+                <a:latin typeface="Aptos" charset="0"/>
+                <a:ea typeface="Aptos" charset="0"/>
                 <a:cs typeface="Times New Roman" panose="02020603050405020304" pitchFamily="18" charset="0"/>
               </a:rPr>
               <a:t>BIN/БИН 240240900538</a:t>
@@ -16562,8 +17335,8 @@
                 <a:schemeClr val="bg1"/>
               </a:solidFill>
               <a:effectLst/>
-              <a:latin typeface="Aptos" panose="020B0004020202020204" pitchFamily="34" charset="0"/>
-              <a:ea typeface="Aptos" panose="020B0004020202020204" pitchFamily="34" charset="0"/>
+              <a:latin typeface="Aptos" charset="0"/>
+              <a:ea typeface="Aptos" charset="0"/>
               <a:cs typeface="Times New Roman" panose="02020603050405020304" pitchFamily="18" charset="0"/>
             </a:endParaRPr>
           </a:p>
@@ -16603,19 +17376,7 @@
           <p:nvPr/>
         </p:nvPicPr>
         <p:blipFill>
-          <a:blip r:embed="rId2">
-            <a:extLst>
-              <a:ext uri="{BEBA8EAE-BF5A-486C-A8C5-ECC9F3942E4B}">
-                <a14:imgProps xmlns:a14="http://schemas.microsoft.com/office/drawing/2010/main">
-                  <a14:imgLayer>
-                    <a14:imgEffect>
-                      <a14:brightnessContrast bright="40000"/>
-                    </a14:imgEffect>
-                  </a14:imgLayer>
-                </a14:imgProps>
-              </a:ext>
-            </a:extLst>
-          </a:blip>
+          <a:blip r:embed="rId1"/>
           <a:srcRect l="33301" t="65431" r="13372"/>
           <a:stretch>
             <a:fillRect/>
@@ -16707,7 +17468,6 @@
                   <a:schemeClr val="bg1"/>
                 </a:solidFill>
               </a:rPr>
-              <a:t>3</a:t>
             </a:fld>
             <a:endParaRPr lang="ru-RU" dirty="0">
               <a:solidFill>
@@ -16800,6 +17560,12 @@
               </a:rPr>
               <a:t>Проектный офис для Центральной Азии </a:t>
             </a:r>
+            <a:endParaRPr lang="ru-RU" sz="1400" b="1" i="1" dirty="0">
+              <a:solidFill>
+                <a:srgbClr val="3B7D48"/>
+              </a:solidFill>
+              <a:cs typeface="Calibri" panose="020F0502020204030204" pitchFamily="34" charset="0"/>
+            </a:endParaRPr>
           </a:p>
           <a:p>
             <a:r>
@@ -16811,6 +17577,12 @@
               </a:rPr>
               <a:t>по изменению климата и зеленой энергетике</a:t>
             </a:r>
+            <a:endParaRPr lang="ru-RU" sz="1400" b="1" i="1" dirty="0">
+              <a:solidFill>
+                <a:srgbClr val="3B7D48"/>
+              </a:solidFill>
+              <a:cs typeface="Calibri" panose="020F0502020204030204" pitchFamily="34" charset="0"/>
+            </a:endParaRPr>
           </a:p>
         </p:txBody>
       </p:sp>
@@ -16823,7 +17595,7 @@
           <p:nvPr/>
         </p:nvPicPr>
         <p:blipFill>
-          <a:blip r:embed="rId3"/>
+          <a:blip r:embed="rId2"/>
           <a:stretch>
             <a:fillRect/>
           </a:stretch>
@@ -16870,6 +17642,12 @@
               </a:rPr>
               <a:t>Структура Фонда</a:t>
             </a:r>
+            <a:endParaRPr sz="2000" b="1">
+              <a:solidFill>
+                <a:srgbClr val="1C3E6D"/>
+              </a:solidFill>
+              <a:latin typeface="Manrope"/>
+            </a:endParaRPr>
           </a:p>
         </p:txBody>
       </p:sp>
@@ -16916,7 +17694,6 @@
           <a:lstStyle/>
           <a:p>
             <a:pPr algn="ctr"/>
-            <a:endParaRPr/>
           </a:p>
         </p:txBody>
       </p:sp>
@@ -16952,6 +17729,12 @@
               </a:rPr>
               <a:t>Верховный попечитель</a:t>
             </a:r>
+            <a:endParaRPr sz="1400" b="1">
+              <a:solidFill>
+                <a:srgbClr val="FFFFFF"/>
+              </a:solidFill>
+              <a:latin typeface="Manrope"/>
+            </a:endParaRPr>
           </a:p>
         </p:txBody>
       </p:sp>
@@ -16996,7 +17779,6 @@
           <a:lstStyle/>
           <a:p>
             <a:pPr algn="ctr"/>
-            <a:endParaRPr/>
           </a:p>
         </p:txBody>
       </p:sp>
@@ -17043,7 +17825,6 @@
           <a:lstStyle/>
           <a:p>
             <a:pPr algn="ctr"/>
-            <a:endParaRPr/>
           </a:p>
         </p:txBody>
       </p:sp>
@@ -17079,6 +17860,12 @@
               </a:rPr>
               <a:t>Главный исполнительный директор</a:t>
             </a:r>
+            <a:endParaRPr sz="1300" b="1">
+              <a:solidFill>
+                <a:srgbClr val="FFFFFF"/>
+              </a:solidFill>
+              <a:latin typeface="Manrope"/>
+            </a:endParaRPr>
           </a:p>
           <a:p>
             <a:pPr algn="ctr"/>
@@ -17091,6 +17878,12 @@
               </a:rPr>
               <a:t>Председатель Управляющего совета</a:t>
             </a:r>
+            <a:endParaRPr sz="1300" b="0">
+              <a:solidFill>
+                <a:srgbClr val="FFFFFF"/>
+              </a:solidFill>
+              <a:latin typeface="Manrope"/>
+            </a:endParaRPr>
           </a:p>
         </p:txBody>
       </p:sp>
@@ -17135,7 +17928,6 @@
           <a:lstStyle/>
           <a:p>
             <a:pPr algn="ctr"/>
-            <a:endParaRPr/>
           </a:p>
         </p:txBody>
       </p:sp>
@@ -17180,7 +17972,6 @@
           <a:lstStyle/>
           <a:p>
             <a:pPr algn="ctr"/>
-            <a:endParaRPr/>
           </a:p>
         </p:txBody>
       </p:sp>
@@ -17225,7 +18016,6 @@
           <a:lstStyle/>
           <a:p>
             <a:pPr algn="ctr"/>
-            <a:endParaRPr/>
           </a:p>
         </p:txBody>
       </p:sp>
@@ -17272,7 +18062,6 @@
           <a:lstStyle/>
           <a:p>
             <a:pPr algn="ctr"/>
-            <a:endParaRPr/>
           </a:p>
         </p:txBody>
       </p:sp>
@@ -17317,7 +18106,6 @@
           <a:lstStyle/>
           <a:p>
             <a:pPr algn="ctr"/>
-            <a:endParaRPr/>
           </a:p>
         </p:txBody>
       </p:sp>
@@ -17353,6 +18141,12 @@
               </a:rPr>
               <a:t>Проектный офис для Центральной Азии по изменению климата и зелёной энергетике</a:t>
             </a:r>
+            <a:endParaRPr sz="1250" b="1">
+              <a:solidFill>
+                <a:srgbClr val="3B7D48"/>
+              </a:solidFill>
+              <a:latin typeface="Manrope"/>
+            </a:endParaRPr>
           </a:p>
         </p:txBody>
       </p:sp>
@@ -17392,6 +18186,12 @@
               </a:rPr>
               <a:t>• региональные климатические проекты</a:t>
             </a:r>
+            <a:endParaRPr sz="1200" b="0">
+              <a:solidFill>
+                <a:srgbClr val="404040"/>
+              </a:solidFill>
+              <a:latin typeface="Manrope"/>
+            </a:endParaRPr>
           </a:p>
           <a:p>
             <a:pPr algn="l">
@@ -17408,6 +18208,12 @@
               </a:rPr>
               <a:t>• климатическая политика и сотрудничество стран ЦА</a:t>
             </a:r>
+            <a:endParaRPr sz="1200" b="0">
+              <a:solidFill>
+                <a:srgbClr val="404040"/>
+              </a:solidFill>
+              <a:latin typeface="Manrope"/>
+            </a:endParaRPr>
           </a:p>
           <a:p>
             <a:pPr algn="l">
@@ -17424,6 +18230,12 @@
               </a:rPr>
               <a:t>• ESG, аналитика и оценка рисков</a:t>
             </a:r>
+            <a:endParaRPr sz="1200" b="0">
+              <a:solidFill>
+                <a:srgbClr val="404040"/>
+              </a:solidFill>
+              <a:latin typeface="Manrope"/>
+            </a:endParaRPr>
           </a:p>
         </p:txBody>
       </p:sp>
@@ -17468,7 +18280,6 @@
           <a:lstStyle/>
           <a:p>
             <a:pPr algn="ctr"/>
-            <a:endParaRPr/>
           </a:p>
         </p:txBody>
       </p:sp>
@@ -17515,7 +18326,6 @@
           <a:lstStyle/>
           <a:p>
             <a:pPr algn="ctr"/>
-            <a:endParaRPr/>
           </a:p>
         </p:txBody>
       </p:sp>
@@ -17560,7 +18370,6 @@
           <a:lstStyle/>
           <a:p>
             <a:pPr algn="ctr"/>
-            <a:endParaRPr/>
           </a:p>
         </p:txBody>
       </p:sp>
@@ -17596,6 +18405,12 @@
               </a:rPr>
               <a:t>Проектный офис «Таза Қазақстан»</a:t>
             </a:r>
+            <a:endParaRPr sz="1250" b="1">
+              <a:solidFill>
+                <a:srgbClr val="156082"/>
+              </a:solidFill>
+              <a:latin typeface="Manrope"/>
+            </a:endParaRPr>
           </a:p>
         </p:txBody>
       </p:sp>
@@ -17635,6 +18450,12 @@
               </a:rPr>
               <a:t>• социология и аналитика</a:t>
             </a:r>
+            <a:endParaRPr sz="1200" b="0">
+              <a:solidFill>
+                <a:srgbClr val="404040"/>
+              </a:solidFill>
+              <a:latin typeface="Manrope"/>
+            </a:endParaRPr>
           </a:p>
           <a:p>
             <a:pPr algn="l">
@@ -17651,6 +18472,12 @@
               </a:rPr>
               <a:t>• проектное управление и региональная координация</a:t>
             </a:r>
+            <a:endParaRPr sz="1200" b="0">
+              <a:solidFill>
+                <a:srgbClr val="404040"/>
+              </a:solidFill>
+              <a:latin typeface="Manrope"/>
+            </a:endParaRPr>
           </a:p>
           <a:p>
             <a:pPr algn="l">
@@ -17667,6 +18494,12 @@
               </a:rPr>
               <a:t>• цифровое развитие</a:t>
             </a:r>
+            <a:endParaRPr sz="1200" b="0">
+              <a:solidFill>
+                <a:srgbClr val="404040"/>
+              </a:solidFill>
+              <a:latin typeface="Manrope"/>
+            </a:endParaRPr>
           </a:p>
           <a:p>
             <a:pPr algn="l">
@@ -17683,6 +18516,12 @@
               </a:rPr>
               <a:t>• коммуникация и креатив</a:t>
             </a:r>
+            <a:endParaRPr sz="1200" b="0">
+              <a:solidFill>
+                <a:srgbClr val="404040"/>
+              </a:solidFill>
+              <a:latin typeface="Manrope"/>
+            </a:endParaRPr>
           </a:p>
         </p:txBody>
       </p:sp>
@@ -17727,7 +18566,6 @@
           <a:lstStyle/>
           <a:p>
             <a:pPr algn="ctr"/>
-            <a:endParaRPr/>
           </a:p>
         </p:txBody>
       </p:sp>
@@ -17774,7 +18612,6 @@
           <a:lstStyle/>
           <a:p>
             <a:pPr algn="ctr"/>
-            <a:endParaRPr/>
           </a:p>
         </p:txBody>
       </p:sp>
@@ -17819,7 +18656,6 @@
           <a:lstStyle/>
           <a:p>
             <a:pPr algn="ctr"/>
-            <a:endParaRPr/>
           </a:p>
         </p:txBody>
       </p:sp>
@@ -17855,6 +18691,12 @@
               </a:rPr>
               <a:t>Сеть экспертов Центральной Азии+</a:t>
             </a:r>
+            <a:endParaRPr sz="1250" b="1">
+              <a:solidFill>
+                <a:srgbClr val="1C3E6D"/>
+              </a:solidFill>
+              <a:latin typeface="Manrope"/>
+            </a:endParaRPr>
           </a:p>
         </p:txBody>
       </p:sp>
@@ -17894,6 +18736,12 @@
               </a:rPr>
               <a:t>• экспертно-аналитическое сопровождение климатической, экологической и энергетической повестки</a:t>
             </a:r>
+            <a:endParaRPr sz="1200" b="0">
+              <a:solidFill>
+                <a:srgbClr val="404040"/>
+              </a:solidFill>
+              <a:latin typeface="Manrope"/>
+            </a:endParaRPr>
           </a:p>
           <a:p>
             <a:pPr algn="l">
@@ -17910,6 +18758,12 @@
               </a:rPr>
               <a:t>• заключения и рекомендации</a:t>
             </a:r>
+            <a:endParaRPr sz="1200" b="0">
+              <a:solidFill>
+                <a:srgbClr val="404040"/>
+              </a:solidFill>
+              <a:latin typeface="Manrope"/>
+            </a:endParaRPr>
           </a:p>
         </p:txBody>
       </p:sp>
@@ -17954,7 +18808,6 @@
           <a:lstStyle/>
           <a:p>
             <a:pPr algn="ctr"/>
-            <a:endParaRPr/>
           </a:p>
         </p:txBody>
       </p:sp>
@@ -18001,7 +18854,6 @@
           <a:lstStyle/>
           <a:p>
             <a:pPr algn="ctr"/>
-            <a:endParaRPr/>
           </a:p>
         </p:txBody>
       </p:sp>
@@ -18046,7 +18898,6 @@
           <a:lstStyle/>
           <a:p>
             <a:pPr algn="ctr"/>
-            <a:endParaRPr/>
           </a:p>
         </p:txBody>
       </p:sp>
@@ -18082,6 +18933,12 @@
               </a:rPr>
               <a:t>Административно-финансовый блок</a:t>
             </a:r>
+            <a:endParaRPr sz="1250" b="1">
+              <a:solidFill>
+                <a:srgbClr val="C99A1E"/>
+              </a:solidFill>
+              <a:latin typeface="Manrope"/>
+            </a:endParaRPr>
           </a:p>
         </p:txBody>
       </p:sp>
@@ -18121,6 +18978,12 @@
               </a:rPr>
               <a:t>• административные вопросы, закупки, кадры</a:t>
             </a:r>
+            <a:endParaRPr sz="1200" b="0">
+              <a:solidFill>
+                <a:srgbClr val="404040"/>
+              </a:solidFill>
+              <a:latin typeface="Manrope"/>
+            </a:endParaRPr>
           </a:p>
           <a:p>
             <a:pPr algn="l">
@@ -18137,6 +19000,12 @@
               </a:rPr>
               <a:t>• финансы и бухгалтерия</a:t>
             </a:r>
+            <a:endParaRPr sz="1200" b="0">
+              <a:solidFill>
+                <a:srgbClr val="404040"/>
+              </a:solidFill>
+              <a:latin typeface="Manrope"/>
+            </a:endParaRPr>
           </a:p>
           <a:p>
             <a:pPr algn="l">
@@ -18153,6 +19022,12 @@
               </a:rPr>
               <a:t>• правовое сопровождение (МФЦА)</a:t>
             </a:r>
+            <a:endParaRPr sz="1200" b="0">
+              <a:solidFill>
+                <a:srgbClr val="404040"/>
+              </a:solidFill>
+              <a:latin typeface="Manrope"/>
+            </a:endParaRPr>
           </a:p>
           <a:p>
             <a:pPr algn="l">
@@ -18169,6 +19044,12 @@
               </a:rPr>
               <a:t>• IT-поддержка</a:t>
             </a:r>
+            <a:endParaRPr sz="1200" b="0">
+              <a:solidFill>
+                <a:srgbClr val="404040"/>
+              </a:solidFill>
+              <a:latin typeface="Manrope"/>
+            </a:endParaRPr>
           </a:p>
         </p:txBody>
       </p:sp>
@@ -18206,11 +19087,11 @@
           <p:nvPr/>
         </p:nvPicPr>
         <p:blipFill>
-          <a:blip r:embed="rId2">
+          <a:blip r:embed="rId1">
             <a:extLst>
               <a:ext uri="{BEBA8EAE-BF5A-486C-A8C5-ECC9F3942E4B}">
                 <a14:imgProps xmlns:a14="http://schemas.microsoft.com/office/drawing/2010/main">
-                  <a14:imgLayer r:embed="rId3">
+                  <a14:imgLayer r:embed="rId7">
                     <a14:imgEffect>
                       <a14:brightnessContrast bright="40000"/>
                     </a14:imgEffect>
@@ -18310,7 +19191,6 @@
                   <a:schemeClr val="bg1"/>
                 </a:solidFill>
               </a:rPr>
-              <a:t>4</a:t>
             </a:fld>
             <a:endParaRPr lang="ru-RU" noProof="1">
               <a:solidFill>
@@ -18329,7 +19209,7 @@
           <p:nvPr/>
         </p:nvPicPr>
         <p:blipFill>
-          <a:blip r:embed="rId4"/>
+          <a:blip r:embed="rId3"/>
           <a:stretch>
             <a:fillRect/>
           </a:stretch>
@@ -18373,6 +19253,10 @@
               </a:rPr>
               <a:t>РЭС 2026</a:t>
             </a:r>
+            <a:endParaRPr lang="ru-RU" sz="1600" b="1" noProof="1">
+              <a:latin typeface="Manrope" pitchFamily="2" charset="0"/>
+              <a:cs typeface="Calibri" panose="020F0502020204030204" pitchFamily="34" charset="0"/>
+            </a:endParaRPr>
           </a:p>
           <a:p>
             <a:pPr marL="342900" indent="-342900">
@@ -18386,6 +19270,10 @@
               </a:rPr>
               <a:t>более 11 300 посещений и проведено 58 ключевых сессий, включая 21 высокого уровня и 4 страновые сессии государств ЦА</a:t>
             </a:r>
+            <a:endParaRPr lang="ru-RU" sz="1600" noProof="1">
+              <a:latin typeface="Manrope Light" pitchFamily="2" charset="0"/>
+              <a:cs typeface="Calibri" panose="020F0502020204030204" pitchFamily="34" charset="0"/>
+            </a:endParaRPr>
           </a:p>
           <a:p>
             <a:pPr marL="342900" indent="-342900">
@@ -18414,6 +19302,10 @@
               </a:rPr>
               <a:t>по экономическим и социальным вопросам, Заместитель Генсека - Исполнительный директор ЮНЕП, Заместитель Генсека ООН - Исполнительный секретарь ЕЭК ООН</a:t>
             </a:r>
+            <a:endParaRPr lang="ru-RU" sz="1600" noProof="1">
+              <a:latin typeface="Manrope Light" pitchFamily="2" charset="0"/>
+              <a:cs typeface="Calibri" panose="020F0502020204030204" pitchFamily="34" charset="0"/>
+            </a:endParaRPr>
           </a:p>
         </p:txBody>
       </p:sp>
@@ -18485,6 +19377,13 @@
               </a:rPr>
               <a:t>Фонд – уже не просто административная надстройка, а уникальная платформа, способная консолидировать межгосударственные интересы с международными институтами (ООН, МФИ) в единый рабочий механизм</a:t>
             </a:r>
+            <a:endParaRPr lang="ru-RU" sz="2000" b="1" noProof="1">
+              <a:solidFill>
+                <a:srgbClr val="3B7D48"/>
+              </a:solidFill>
+              <a:latin typeface="Manrope" pitchFamily="2" charset="0"/>
+              <a:cs typeface="Calibri" panose="020F0502020204030204" pitchFamily="34" charset="0"/>
+            </a:endParaRPr>
           </a:p>
         </p:txBody>
       </p:sp>
@@ -18517,6 +19416,10 @@
               </a:rPr>
               <a:t>Фонд – это актив и мы имеем доказанную эффективность</a:t>
             </a:r>
+            <a:endParaRPr lang="ru-RU" sz="1600" b="1" noProof="1">
+              <a:latin typeface="Manrope" pitchFamily="2" charset="0"/>
+              <a:cs typeface="Calibri" panose="020F0502020204030204" pitchFamily="34" charset="0"/>
+            </a:endParaRPr>
           </a:p>
           <a:p>
             <a:pPr marL="342900" indent="-342900">
@@ -18530,6 +19433,10 @@
               </a:rPr>
               <a:t>Политическая консолидация (Декларация ГГ ЦА)</a:t>
             </a:r>
+            <a:endParaRPr lang="ru-RU" sz="1600" noProof="1">
+              <a:latin typeface="Manrope Light" pitchFamily="2" charset="0"/>
+              <a:cs typeface="Calibri" panose="020F0502020204030204" pitchFamily="34" charset="0"/>
+            </a:endParaRPr>
           </a:p>
           <a:p>
             <a:pPr marL="342900" indent="-342900">
@@ -18543,6 +19450,10 @@
               </a:rPr>
               <a:t>Глобальное партнерство (Программа действий с ООН и МФО)</a:t>
             </a:r>
+            <a:endParaRPr lang="ru-RU" sz="1600" noProof="1">
+              <a:latin typeface="Manrope Light" pitchFamily="2" charset="0"/>
+              <a:cs typeface="Calibri" panose="020F0502020204030204" pitchFamily="34" charset="0"/>
+            </a:endParaRPr>
           </a:p>
           <a:p>
             <a:pPr marL="342900" indent="-342900">
@@ -18556,6 +19467,10 @@
               </a:rPr>
               <a:t>Региональная архитектура (11 консультационных встреч, вкл. Нью-Йорк, Бонн, Белем, Найроби, ЦА)</a:t>
             </a:r>
+            <a:endParaRPr lang="ru-RU" sz="1600" noProof="1">
+              <a:latin typeface="Manrope Light" pitchFamily="2" charset="0"/>
+              <a:cs typeface="Calibri" panose="020F0502020204030204" pitchFamily="34" charset="0"/>
+            </a:endParaRPr>
           </a:p>
           <a:p>
             <a:pPr marL="342900" indent="-342900">
@@ -18582,6 +19497,10 @@
               </a:rPr>
               <a:t>(58 сессий, каждая с ощутимым «результатом»)</a:t>
             </a:r>
+            <a:endParaRPr lang="ru-RU" sz="1600" noProof="1">
+              <a:latin typeface="Manrope Light" pitchFamily="2" charset="0"/>
+              <a:cs typeface="Calibri" panose="020F0502020204030204" pitchFamily="34" charset="0"/>
+            </a:endParaRPr>
           </a:p>
           <a:p>
             <a:pPr marL="342900" indent="-342900">
@@ -18595,6 +19514,10 @@
               </a:rPr>
               <a:t>Проектный офис (Фонд) Поддержан Главами Государств Центральной Азии в Декларации п. 24. </a:t>
             </a:r>
+            <a:endParaRPr lang="ru-RU" sz="1600" noProof="1">
+              <a:latin typeface="Manrope Light" pitchFamily="2" charset="0"/>
+              <a:cs typeface="Calibri" panose="020F0502020204030204" pitchFamily="34" charset="0"/>
+            </a:endParaRPr>
           </a:p>
           <a:p>
             <a:pPr marL="800100" lvl="1" indent="-342900">
@@ -18617,7 +19540,7 @@
           <p:nvPr/>
         </p:nvPicPr>
         <p:blipFill>
-          <a:blip r:embed="rId5"/>
+          <a:blip r:embed="rId4"/>
           <a:stretch>
             <a:fillRect/>
           </a:stretch>
@@ -18665,7 +19588,7 @@
           <p:nvPr/>
         </p:nvPicPr>
         <p:blipFill>
-          <a:blip r:embed="rId6"/>
+          <a:blip r:embed="rId5"/>
           <a:stretch>
             <a:fillRect/>
           </a:stretch>
@@ -18728,6 +19651,12 @@
               </a:rPr>
               <a:t>Проектный офис для Центральной Азии </a:t>
             </a:r>
+            <a:endParaRPr lang="ru-RU" b="1" noProof="1">
+              <a:solidFill>
+                <a:srgbClr val="3B7D48"/>
+              </a:solidFill>
+              <a:cs typeface="Calibri" panose="020F0502020204030204" pitchFamily="34" charset="0"/>
+            </a:endParaRPr>
           </a:p>
           <a:p>
             <a:r>
@@ -18739,6 +19668,12 @@
               </a:rPr>
               <a:t>по изменению климата и зеленой энергетике</a:t>
             </a:r>
+            <a:endParaRPr lang="ru-RU" b="1" noProof="1">
+              <a:solidFill>
+                <a:srgbClr val="3B7D48"/>
+              </a:solidFill>
+              <a:cs typeface="Calibri" panose="020F0502020204030204" pitchFamily="34" charset="0"/>
+            </a:endParaRPr>
           </a:p>
         </p:txBody>
       </p:sp>
@@ -18769,13 +19704,227 @@
       </p:grpSpPr>
       <p:pic>
         <p:nvPicPr>
-          <p:cNvPr id="3" name="Рисунок 2">
-            <a:extLst>
-              <a:ext uri="{FF2B5EF4-FFF2-40B4-BE49-F238E27FC236}">
-                <a16:creationId xmlns:a16="http://schemas.microsoft.com/office/drawing/2014/main" xmlns="" id="{4F9C59AF-7B85-FDEB-57D9-0C700C3345BD}"/>
-              </a:ext>
-            </a:extLst>
-          </p:cNvPr>
+          <p:cNvPr id="3" name="Рисунок 2"/>
+          <p:cNvPicPr>
+            <a:picLocks noChangeAspect="1"/>
+          </p:cNvPicPr>
+          <p:nvPr/>
+        </p:nvPicPr>
+        <p:blipFill>
+          <a:blip r:embed="rId1"/>
+          <a:stretch>
+            <a:fillRect/>
+          </a:stretch>
+        </p:blipFill>
+        <p:spPr>
+          <a:xfrm>
+            <a:off x="0" y="0"/>
+            <a:ext cx="12368696" cy="6858000"/>
+          </a:xfrm>
+          <a:prstGeom prst="rect">
+            <a:avLst/>
+          </a:prstGeom>
+        </p:spPr>
+      </p:pic>
+      <p:sp>
+        <p:nvSpPr>
+          <p:cNvPr id="5" name="TextBox 4"/>
+          <p:cNvSpPr txBox="1"/>
+          <p:nvPr/>
+        </p:nvSpPr>
+        <p:spPr>
+          <a:xfrm>
+            <a:off x="733055" y="1032562"/>
+            <a:ext cx="11334897" cy="4739759"/>
+          </a:xfrm>
+          <a:prstGeom prst="rect">
+            <a:avLst/>
+          </a:prstGeom>
+          <a:noFill/>
+        </p:spPr>
+        <p:txBody>
+          <a:bodyPr wrap="square" rtlCol="0">
+            <a:spAutoFit/>
+          </a:bodyPr>
+          <a:lstStyle/>
+          <a:p>
+            <a:r>
+              <a:rPr lang="ru-RU" b="1" dirty="0">
+                <a:solidFill>
+                  <a:schemeClr val="bg1"/>
+                </a:solidFill>
+                <a:latin typeface="Manrope" pitchFamily="2" charset="0"/>
+                <a:cs typeface="Calibri" panose="020F0502020204030204" pitchFamily="34" charset="0"/>
+              </a:rPr>
+              <a:t>Центрально-азиатский </a:t>
+            </a:r>
+            <a:r>
+              <a:rPr lang="ru-RU" b="1" dirty="0">
+                <a:solidFill>
+                  <a:schemeClr val="bg1"/>
+                </a:solidFill>
+                <a:cs typeface="Calibri" panose="020F0502020204030204" pitchFamily="34" charset="0"/>
+              </a:rPr>
+              <a:t>климатический фонд</a:t>
+            </a:r>
+            <a:br>
+              <a:rPr lang="ru-RU" b="1" dirty="0">
+                <a:solidFill>
+                  <a:schemeClr val="bg1"/>
+                </a:solidFill>
+                <a:cs typeface="Calibri" panose="020F0502020204030204" pitchFamily="34" charset="0"/>
+              </a:rPr>
+            </a:br>
+            <a:r>
+              <a:rPr lang="ru-RU" b="1" dirty="0">
+                <a:solidFill>
+                  <a:schemeClr val="bg1"/>
+                </a:solidFill>
+                <a:cs typeface="Calibri" panose="020F0502020204030204" pitchFamily="34" charset="0"/>
+              </a:rPr>
+              <a:t>Проектный офис для Центральной Азии </a:t>
+            </a:r>
+            <a:endParaRPr lang="ru-RU" b="1" dirty="0">
+              <a:solidFill>
+                <a:schemeClr val="bg1"/>
+              </a:solidFill>
+              <a:cs typeface="Calibri" panose="020F0502020204030204" pitchFamily="34" charset="0"/>
+            </a:endParaRPr>
+          </a:p>
+          <a:p>
+            <a:r>
+              <a:rPr lang="ru-RU" b="1" dirty="0">
+                <a:solidFill>
+                  <a:schemeClr val="bg1"/>
+                </a:solidFill>
+                <a:cs typeface="Calibri" panose="020F0502020204030204" pitchFamily="34" charset="0"/>
+              </a:rPr>
+              <a:t>по изменению климата и зеленой энергетике</a:t>
+            </a:r>
+            <a:endParaRPr lang="ru-RU" b="1" dirty="0">
+              <a:solidFill>
+                <a:schemeClr val="bg1"/>
+              </a:solidFill>
+              <a:cs typeface="Calibri" panose="020F0502020204030204" pitchFamily="34" charset="0"/>
+            </a:endParaRPr>
+          </a:p>
+          <a:p>
+            <a:endParaRPr lang="ru-RU" sz="2400" b="1" dirty="0">
+              <a:solidFill>
+                <a:schemeClr val="bg1"/>
+              </a:solidFill>
+              <a:cs typeface="Calibri" panose="020F0502020204030204" pitchFamily="34" charset="0"/>
+            </a:endParaRPr>
+          </a:p>
+          <a:p>
+            <a:pPr algn="ctr"/>
+            <a:r>
+              <a:rPr lang="ru-RU" sz="2800" b="1" dirty="0">
+                <a:solidFill>
+                  <a:schemeClr val="bg1"/>
+                </a:solidFill>
+                <a:cs typeface="Calibri" panose="020F0502020204030204" pitchFamily="34" charset="0"/>
+              </a:rPr>
+              <a:t>Комплексный анализ </a:t>
+            </a:r>
+            <a:br>
+              <a:rPr lang="ru-RU" sz="2800" b="1" dirty="0">
+                <a:solidFill>
+                  <a:schemeClr val="bg1"/>
+                </a:solidFill>
+                <a:cs typeface="Calibri" panose="020F0502020204030204" pitchFamily="34" charset="0"/>
+              </a:rPr>
+            </a:br>
+            <a:r>
+              <a:rPr lang="ru-RU" sz="2800" b="1" dirty="0">
+                <a:solidFill>
+                  <a:schemeClr val="bg1"/>
+                </a:solidFill>
+                <a:cs typeface="Calibri" panose="020F0502020204030204" pitchFamily="34" charset="0"/>
+              </a:rPr>
+              <a:t>рисков и возможностей устойчивого развития Центральной Азии </a:t>
+            </a:r>
+            <a:br>
+              <a:rPr lang="ru-RU" sz="2800" b="1" dirty="0">
+                <a:solidFill>
+                  <a:schemeClr val="bg1"/>
+                </a:solidFill>
+                <a:cs typeface="Calibri" panose="020F0502020204030204" pitchFamily="34" charset="0"/>
+              </a:rPr>
+            </a:br>
+            <a:r>
+              <a:rPr lang="ru-RU" sz="2800" b="1" dirty="0">
+                <a:solidFill>
+                  <a:schemeClr val="bg1"/>
+                </a:solidFill>
+                <a:cs typeface="Calibri" panose="020F0502020204030204" pitchFamily="34" charset="0"/>
+              </a:rPr>
+              <a:t>для энергетического сектора Казахстана согласно повестке Регионального экологического саммита 2026</a:t>
+            </a:r>
+            <a:endParaRPr lang="ru-RU" sz="2800" b="1" dirty="0">
+              <a:solidFill>
+                <a:schemeClr val="bg1"/>
+              </a:solidFill>
+              <a:cs typeface="Calibri" panose="020F0502020204030204" pitchFamily="34" charset="0"/>
+            </a:endParaRPr>
+          </a:p>
+          <a:p>
+            <a:pPr algn="ctr"/>
+            <a:endParaRPr lang="ru-RU" sz="2800" b="1" dirty="0">
+              <a:solidFill>
+                <a:schemeClr val="bg1"/>
+              </a:solidFill>
+              <a:cs typeface="Calibri" panose="020F0502020204030204" pitchFamily="34" charset="0"/>
+            </a:endParaRPr>
+          </a:p>
+          <a:p>
+            <a:pPr algn="ctr"/>
+            <a:endParaRPr lang="ru-RU" sz="2800" b="1" dirty="0">
+              <a:solidFill>
+                <a:schemeClr val="bg1"/>
+              </a:solidFill>
+              <a:cs typeface="Calibri" panose="020F0502020204030204" pitchFamily="34" charset="0"/>
+            </a:endParaRPr>
+          </a:p>
+          <a:p>
+            <a:r>
+              <a:rPr lang="ru-RU" sz="2800" b="1" dirty="0">
+                <a:solidFill>
+                  <a:schemeClr val="bg1"/>
+                </a:solidFill>
+                <a:cs typeface="Calibri" panose="020F0502020204030204" pitchFamily="34" charset="0"/>
+              </a:rPr>
+              <a:t>АНАЛИТИЧЕСКИЙ ОТЧЕТ </a:t>
+            </a:r>
+            <a:br>
+              <a:rPr lang="ru-RU" sz="2800" b="1" dirty="0">
+                <a:solidFill>
+                  <a:schemeClr val="bg1"/>
+                </a:solidFill>
+                <a:cs typeface="Calibri" panose="020F0502020204030204" pitchFamily="34" charset="0"/>
+              </a:rPr>
+            </a:br>
+            <a:r>
+              <a:rPr lang="ru-RU" sz="2800" b="1" dirty="0">
+                <a:solidFill>
+                  <a:schemeClr val="bg1"/>
+                </a:solidFill>
+                <a:cs typeface="Calibri" panose="020F0502020204030204" pitchFamily="34" charset="0"/>
+              </a:rPr>
+              <a:t>ДЛЯ АССОЦИАЦИИ KAZENERGY</a:t>
+            </a:r>
+            <a:endParaRPr lang="ru-RU" sz="2800" b="1" dirty="0">
+              <a:solidFill>
+                <a:schemeClr val="bg1"/>
+              </a:solidFill>
+              <a:cs typeface="Calibri" panose="020F0502020204030204" pitchFamily="34" charset="0"/>
+            </a:endParaRPr>
+          </a:p>
+        </p:txBody>
+      </p:sp>
+      <p:pic>
+        <p:nvPicPr>
+          <p:cNvPr id="8" name="Рисунок 7"/>
           <p:cNvPicPr>
             <a:picLocks noChangeAspect="1"/>
           </p:cNvPicPr>
@@ -18789,214 +19938,6 @@
         </p:blipFill>
         <p:spPr>
           <a:xfrm>
-            <a:off x="0" y="0"/>
-            <a:ext cx="12368696" cy="6858000"/>
-          </a:xfrm>
-          <a:prstGeom prst="rect">
-            <a:avLst/>
-          </a:prstGeom>
-        </p:spPr>
-      </p:pic>
-      <p:sp>
-        <p:nvSpPr>
-          <p:cNvPr id="5" name="TextBox 4">
-            <a:extLst>
-              <a:ext uri="{FF2B5EF4-FFF2-40B4-BE49-F238E27FC236}">
-                <a16:creationId xmlns:a16="http://schemas.microsoft.com/office/drawing/2014/main" xmlns="" id="{0B4072C1-957B-5BBE-2D8B-EF24ED2C184A}"/>
-              </a:ext>
-            </a:extLst>
-          </p:cNvPr>
-          <p:cNvSpPr txBox="1"/>
-          <p:nvPr/>
-        </p:nvSpPr>
-        <p:spPr>
-          <a:xfrm>
-            <a:off x="733055" y="1032562"/>
-            <a:ext cx="11334897" cy="4739759"/>
-          </a:xfrm>
-          <a:prstGeom prst="rect">
-            <a:avLst/>
-          </a:prstGeom>
-          <a:noFill/>
-        </p:spPr>
-        <p:txBody>
-          <a:bodyPr wrap="square" rtlCol="0">
-            <a:spAutoFit/>
-          </a:bodyPr>
-          <a:lstStyle/>
-          <a:p>
-            <a:r>
-              <a:rPr lang="ru-RU" b="1" dirty="0">
-                <a:solidFill>
-                  <a:schemeClr val="bg1"/>
-                </a:solidFill>
-                <a:latin typeface="Manrope" pitchFamily="2" charset="0"/>
-                <a:cs typeface="Calibri" panose="020F0502020204030204" pitchFamily="34" charset="0"/>
-              </a:rPr>
-              <a:t>Центрально-азиатский </a:t>
-            </a:r>
-            <a:r>
-              <a:rPr lang="ru-RU" b="1" dirty="0">
-                <a:solidFill>
-                  <a:schemeClr val="bg1"/>
-                </a:solidFill>
-                <a:cs typeface="Calibri" panose="020F0502020204030204" pitchFamily="34" charset="0"/>
-              </a:rPr>
-              <a:t>климатический фонд</a:t>
-            </a:r>
-            <a:br>
-              <a:rPr lang="ru-RU" b="1" dirty="0">
-                <a:solidFill>
-                  <a:schemeClr val="bg1"/>
-                </a:solidFill>
-                <a:cs typeface="Calibri" panose="020F0502020204030204" pitchFamily="34" charset="0"/>
-              </a:rPr>
-            </a:br>
-            <a:r>
-              <a:rPr lang="ru-RU" b="1" dirty="0">
-                <a:solidFill>
-                  <a:schemeClr val="bg1"/>
-                </a:solidFill>
-                <a:cs typeface="Calibri" panose="020F0502020204030204" pitchFamily="34" charset="0"/>
-              </a:rPr>
-              <a:t>Проектный офис для Центральной Азии </a:t>
-            </a:r>
-          </a:p>
-          <a:p>
-            <a:r>
-              <a:rPr lang="ru-RU" b="1" dirty="0">
-                <a:solidFill>
-                  <a:schemeClr val="bg1"/>
-                </a:solidFill>
-                <a:cs typeface="Calibri" panose="020F0502020204030204" pitchFamily="34" charset="0"/>
-              </a:rPr>
-              <a:t>по изменению климата и зеленой энергетике</a:t>
-            </a:r>
-          </a:p>
-          <a:p>
-            <a:endParaRPr lang="ru-RU" sz="2400" b="1" dirty="0">
-              <a:solidFill>
-                <a:schemeClr val="bg1"/>
-              </a:solidFill>
-              <a:cs typeface="Calibri" panose="020F0502020204030204" pitchFamily="34" charset="0"/>
-            </a:endParaRPr>
-          </a:p>
-          <a:p>
-            <a:pPr algn="ctr"/>
-            <a:r>
-              <a:rPr lang="ru-RU" sz="2800" b="1" dirty="0">
-                <a:solidFill>
-                  <a:schemeClr val="bg1"/>
-                </a:solidFill>
-                <a:cs typeface="Calibri" panose="020F0502020204030204" pitchFamily="34" charset="0"/>
-              </a:rPr>
-              <a:t>Комплексный анализ </a:t>
-            </a:r>
-            <a:br>
-              <a:rPr lang="ru-RU" sz="2800" b="1" dirty="0">
-                <a:solidFill>
-                  <a:schemeClr val="bg1"/>
-                </a:solidFill>
-                <a:cs typeface="Calibri" panose="020F0502020204030204" pitchFamily="34" charset="0"/>
-              </a:rPr>
-            </a:br>
-            <a:r>
-              <a:rPr lang="ru-RU" sz="2800" b="1" dirty="0">
-                <a:solidFill>
-                  <a:schemeClr val="bg1"/>
-                </a:solidFill>
-                <a:cs typeface="Calibri" panose="020F0502020204030204" pitchFamily="34" charset="0"/>
-              </a:rPr>
-              <a:t>рисков и возможностей устойчивого развития Центральной Азии </a:t>
-            </a:r>
-            <a:br>
-              <a:rPr lang="ru-RU" sz="2800" b="1" dirty="0">
-                <a:solidFill>
-                  <a:schemeClr val="bg1"/>
-                </a:solidFill>
-                <a:cs typeface="Calibri" panose="020F0502020204030204" pitchFamily="34" charset="0"/>
-              </a:rPr>
-            </a:br>
-            <a:r>
-              <a:rPr lang="ru-RU" sz="2800" b="1" dirty="0">
-                <a:solidFill>
-                  <a:schemeClr val="bg1"/>
-                </a:solidFill>
-                <a:cs typeface="Calibri" panose="020F0502020204030204" pitchFamily="34" charset="0"/>
-              </a:rPr>
-              <a:t>для энергетического сектора Казахстана согласно повестке Регионального экологического саммита 2026</a:t>
-            </a:r>
-          </a:p>
-          <a:p>
-            <a:pPr algn="ctr"/>
-            <a:endParaRPr lang="ru-RU" sz="2800" b="1" dirty="0">
-              <a:solidFill>
-                <a:schemeClr val="bg1"/>
-              </a:solidFill>
-              <a:cs typeface="Calibri" panose="020F0502020204030204" pitchFamily="34" charset="0"/>
-            </a:endParaRPr>
-          </a:p>
-          <a:p>
-            <a:pPr algn="ctr"/>
-            <a:endParaRPr lang="ru-RU" sz="2800" b="1" dirty="0">
-              <a:solidFill>
-                <a:schemeClr val="bg1"/>
-              </a:solidFill>
-              <a:cs typeface="Calibri" panose="020F0502020204030204" pitchFamily="34" charset="0"/>
-            </a:endParaRPr>
-          </a:p>
-          <a:p>
-            <a:r>
-              <a:rPr lang="ru-RU" sz="2800" b="1" dirty="0">
-                <a:solidFill>
-                  <a:schemeClr val="bg1"/>
-                </a:solidFill>
-                <a:cs typeface="Calibri" panose="020F0502020204030204" pitchFamily="34" charset="0"/>
-              </a:rPr>
-              <a:t>АНАЛИТИЧЕСКИЙ ОТЧЕТ </a:t>
-            </a:r>
-            <a:br>
-              <a:rPr lang="ru-RU" sz="2800" b="1" dirty="0">
-                <a:solidFill>
-                  <a:schemeClr val="bg1"/>
-                </a:solidFill>
-                <a:cs typeface="Calibri" panose="020F0502020204030204" pitchFamily="34" charset="0"/>
-              </a:rPr>
-            </a:br>
-            <a:r>
-              <a:rPr lang="ru-RU" sz="2800" b="1" dirty="0">
-                <a:solidFill>
-                  <a:schemeClr val="bg1"/>
-                </a:solidFill>
-                <a:cs typeface="Calibri" panose="020F0502020204030204" pitchFamily="34" charset="0"/>
-              </a:rPr>
-              <a:t>ДЛЯ АССОЦИАЦИИ KAZENERGY</a:t>
-            </a:r>
-          </a:p>
-        </p:txBody>
-      </p:sp>
-      <p:pic>
-        <p:nvPicPr>
-          <p:cNvPr id="8" name="Рисунок 7">
-            <a:extLst>
-              <a:ext uri="{FF2B5EF4-FFF2-40B4-BE49-F238E27FC236}">
-                <a16:creationId xmlns:a16="http://schemas.microsoft.com/office/drawing/2014/main" xmlns="" id="{51C0053B-F6D3-EC53-8797-BA61435519EA}"/>
-              </a:ext>
-            </a:extLst>
-          </p:cNvPr>
-          <p:cNvPicPr>
-            <a:picLocks noChangeAspect="1"/>
-          </p:cNvPicPr>
-          <p:nvPr/>
-        </p:nvPicPr>
-        <p:blipFill>
-          <a:blip r:embed="rId3"/>
-          <a:stretch>
-            <a:fillRect/>
-          </a:stretch>
-        </p:blipFill>
-        <p:spPr>
-          <a:xfrm>
             <a:off x="9851113" y="303599"/>
             <a:ext cx="2340887" cy="956791"/>
           </a:xfrm>
@@ -19006,11 +19947,6 @@
         </p:spPr>
       </p:pic>
     </p:spTree>
-    <p:extLst>
-      <p:ext uri="{BB962C8B-B14F-4D97-AF65-F5344CB8AC3E}">
-        <p14:creationId xmlns:p14="http://schemas.microsoft.com/office/powerpoint/2010/main" val="3578511174"/>
-      </p:ext>
-    </p:extLst>
   </p:cSld>
   <p:clrMapOvr>
     <a:masterClrMapping/>
@@ -19037,24 +19973,18 @@
       </p:grpSpPr>
       <p:pic>
         <p:nvPicPr>
-          <p:cNvPr id="6" name="Рисунок 5">
-            <a:extLst>
-              <a:ext uri="{FF2B5EF4-FFF2-40B4-BE49-F238E27FC236}">
-                <a16:creationId xmlns:a16="http://schemas.microsoft.com/office/drawing/2014/main" xmlns="" id="{F7D30E5B-D4DD-C192-B5E2-CA1114F972C9}"/>
-              </a:ext>
-            </a:extLst>
-          </p:cNvPr>
+          <p:cNvPr id="6" name="Рисунок 5"/>
           <p:cNvPicPr>
             <a:picLocks noChangeAspect="1"/>
           </p:cNvPicPr>
           <p:nvPr/>
         </p:nvPicPr>
         <p:blipFill>
-          <a:blip r:embed="rId2">
+          <a:blip r:embed="rId1">
             <a:extLst>
               <a:ext uri="{BEBA8EAE-BF5A-486C-A8C5-ECC9F3942E4B}">
                 <a14:imgProps xmlns:a14="http://schemas.microsoft.com/office/drawing/2010/main">
-                  <a14:imgLayer r:embed="rId3">
+                  <a14:imgLayer r:embed="rId8">
                     <a14:imgEffect>
                       <a14:brightnessContrast bright="40000"/>
                     </a14:imgEffect>
@@ -19080,13 +20010,7 @@
       </p:pic>
       <p:sp>
         <p:nvSpPr>
-          <p:cNvPr id="2" name="Прямоугольник с двумя скругленными соседними углами 1">
-            <a:extLst>
-              <a:ext uri="{FF2B5EF4-FFF2-40B4-BE49-F238E27FC236}">
-                <a16:creationId xmlns:a16="http://schemas.microsoft.com/office/drawing/2014/main" xmlns="" id="{35FFB220-8AF8-C968-D573-382BCC2BD6B5}"/>
-              </a:ext>
-            </a:extLst>
-          </p:cNvPr>
+          <p:cNvPr id="2" name="Прямоугольник с двумя скругленными соседними углами 1"/>
           <p:cNvSpPr/>
           <p:nvPr/>
         </p:nvSpPr>
@@ -19133,13 +20057,7 @@
       </p:sp>
       <p:sp>
         <p:nvSpPr>
-          <p:cNvPr id="3" name="TextBox 2">
-            <a:extLst>
-              <a:ext uri="{FF2B5EF4-FFF2-40B4-BE49-F238E27FC236}">
-                <a16:creationId xmlns:a16="http://schemas.microsoft.com/office/drawing/2014/main" xmlns="" id="{4CD7BB57-4D4A-5DF0-D8AB-3398134D5A4F}"/>
-              </a:ext>
-            </a:extLst>
-          </p:cNvPr>
+          <p:cNvPr id="3" name="TextBox 2"/>
           <p:cNvSpPr txBox="1"/>
           <p:nvPr/>
         </p:nvSpPr>
@@ -19166,8 +20084,6 @@
                   <a:schemeClr val="bg1"/>
                 </a:solidFill>
               </a:rPr>
-              <a:pPr algn="r"/>
-              <a:t>6</a:t>
             </a:fld>
             <a:endParaRPr lang="ru-RU" dirty="0">
               <a:solidFill>
@@ -19179,20 +20095,14 @@
       </p:sp>
       <p:pic>
         <p:nvPicPr>
-          <p:cNvPr id="5" name="Рисунок 4">
-            <a:extLst>
-              <a:ext uri="{FF2B5EF4-FFF2-40B4-BE49-F238E27FC236}">
-                <a16:creationId xmlns:a16="http://schemas.microsoft.com/office/drawing/2014/main" xmlns="" id="{B848484B-BC97-1E39-6C99-598943CDE8D2}"/>
-              </a:ext>
-            </a:extLst>
-          </p:cNvPr>
+          <p:cNvPr id="5" name="Рисунок 4"/>
           <p:cNvPicPr>
             <a:picLocks noChangeAspect="1"/>
           </p:cNvPicPr>
           <p:nvPr/>
         </p:nvPicPr>
         <p:blipFill>
-          <a:blip r:embed="rId4"/>
+          <a:blip r:embed="rId3"/>
           <a:stretch>
             <a:fillRect/>
           </a:stretch>
@@ -19209,13 +20119,7 @@
       </p:pic>
       <p:cxnSp>
         <p:nvCxnSpPr>
-          <p:cNvPr id="13" name="Прямая соединительная линия 12">
-            <a:extLst>
-              <a:ext uri="{FF2B5EF4-FFF2-40B4-BE49-F238E27FC236}">
-                <a16:creationId xmlns:a16="http://schemas.microsoft.com/office/drawing/2014/main" xmlns="" id="{0689EE3D-31BA-FA5B-9B79-87F32EB7F532}"/>
-              </a:ext>
-            </a:extLst>
-          </p:cNvPr>
+          <p:cNvPr id="13" name="Прямая соединительная линия 12"/>
           <p:cNvCxnSpPr/>
           <p:nvPr/>
         </p:nvCxnSpPr>
@@ -19250,13 +20154,31 @@
       </p:cxnSp>
       <p:pic>
         <p:nvPicPr>
-          <p:cNvPr id="9" name="Рисунок 8">
-            <a:extLst>
-              <a:ext uri="{FF2B5EF4-FFF2-40B4-BE49-F238E27FC236}">
-                <a16:creationId xmlns:a16="http://schemas.microsoft.com/office/drawing/2014/main" xmlns="" id="{B0589008-35FE-3692-2253-B800187413FF}"/>
-              </a:ext>
-            </a:extLst>
-          </p:cNvPr>
+          <p:cNvPr id="9" name="Рисунок 8"/>
+          <p:cNvPicPr>
+            <a:picLocks noChangeAspect="1"/>
+          </p:cNvPicPr>
+          <p:nvPr/>
+        </p:nvPicPr>
+        <p:blipFill>
+          <a:blip r:embed="rId4"/>
+          <a:stretch>
+            <a:fillRect/>
+          </a:stretch>
+        </p:blipFill>
+        <p:spPr>
+          <a:xfrm>
+            <a:off x="202858" y="1297748"/>
+            <a:ext cx="5609359" cy="4596425"/>
+          </a:xfrm>
+          <a:prstGeom prst="rect">
+            <a:avLst/>
+          </a:prstGeom>
+        </p:spPr>
+      </p:pic>
+      <p:pic>
+        <p:nvPicPr>
+          <p:cNvPr id="12" name="Рисунок 11"/>
           <p:cNvPicPr>
             <a:picLocks noChangeAspect="1"/>
           </p:cNvPicPr>
@@ -19270,8 +20192,8 @@
         </p:blipFill>
         <p:spPr>
           <a:xfrm>
-            <a:off x="202858" y="1297748"/>
-            <a:ext cx="5609359" cy="4596425"/>
+            <a:off x="6223921" y="4479499"/>
+            <a:ext cx="4759269" cy="1626283"/>
           </a:xfrm>
           <a:prstGeom prst="rect">
             <a:avLst/>
@@ -19280,13 +20202,7 @@
       </p:pic>
       <p:pic>
         <p:nvPicPr>
-          <p:cNvPr id="12" name="Рисунок 11">
-            <a:extLst>
-              <a:ext uri="{FF2B5EF4-FFF2-40B4-BE49-F238E27FC236}">
-                <a16:creationId xmlns:a16="http://schemas.microsoft.com/office/drawing/2014/main" xmlns="" id="{29A4C1E7-56F6-ABD2-F252-3E077E0C2080}"/>
-              </a:ext>
-            </a:extLst>
-          </p:cNvPr>
+          <p:cNvPr id="15" name="Рисунок 14"/>
           <p:cNvPicPr>
             <a:picLocks noChangeAspect="1"/>
           </p:cNvPicPr>
@@ -19300,36 +20216,6 @@
         </p:blipFill>
         <p:spPr>
           <a:xfrm>
-            <a:off x="6223921" y="4479499"/>
-            <a:ext cx="4759269" cy="1626283"/>
-          </a:xfrm>
-          <a:prstGeom prst="rect">
-            <a:avLst/>
-          </a:prstGeom>
-        </p:spPr>
-      </p:pic>
-      <p:pic>
-        <p:nvPicPr>
-          <p:cNvPr id="15" name="Рисунок 14">
-            <a:extLst>
-              <a:ext uri="{FF2B5EF4-FFF2-40B4-BE49-F238E27FC236}">
-                <a16:creationId xmlns:a16="http://schemas.microsoft.com/office/drawing/2014/main" xmlns="" id="{05402AEA-5F36-D701-101D-C70D949A74E7}"/>
-              </a:ext>
-            </a:extLst>
-          </p:cNvPr>
-          <p:cNvPicPr>
-            <a:picLocks noChangeAspect="1"/>
-          </p:cNvPicPr>
-          <p:nvPr/>
-        </p:nvPicPr>
-        <p:blipFill>
-          <a:blip r:embed="rId7"/>
-          <a:stretch>
-            <a:fillRect/>
-          </a:stretch>
-        </p:blipFill>
-        <p:spPr>
-          <a:xfrm>
             <a:off x="6296657" y="1098526"/>
             <a:ext cx="4686533" cy="3374304"/>
           </a:xfrm>
@@ -19340,13 +20226,7 @@
       </p:pic>
       <p:sp>
         <p:nvSpPr>
-          <p:cNvPr id="4" name="TextBox 3">
-            <a:extLst>
-              <a:ext uri="{FF2B5EF4-FFF2-40B4-BE49-F238E27FC236}">
-                <a16:creationId xmlns:a16="http://schemas.microsoft.com/office/drawing/2014/main" xmlns="" id="{3CD45009-E6B7-1CD1-1966-8AB93CAE0E76}"/>
-              </a:ext>
-            </a:extLst>
-          </p:cNvPr>
+          <p:cNvPr id="4" name="TextBox 3"/>
           <p:cNvSpPr txBox="1"/>
           <p:nvPr/>
         </p:nvSpPr>
@@ -19395,15 +20275,17 @@
               </a:rPr>
               <a:t>для энергетического сектора Казахстана согласно РЭС 2026</a:t>
             </a:r>
+            <a:endParaRPr lang="ru-RU" sz="2000" b="1" dirty="0">
+              <a:solidFill>
+                <a:srgbClr val="3B7D48"/>
+              </a:solidFill>
+              <a:latin typeface="Manrope" pitchFamily="2" charset="0"/>
+              <a:cs typeface="Calibri" panose="020F0502020204030204" pitchFamily="34" charset="0"/>
+            </a:endParaRPr>
           </a:p>
         </p:txBody>
       </p:sp>
     </p:spTree>
-    <p:extLst>
-      <p:ext uri="{BB962C8B-B14F-4D97-AF65-F5344CB8AC3E}">
-        <p14:creationId xmlns:p14="http://schemas.microsoft.com/office/powerpoint/2010/main" val="2633755330"/>
-      </p:ext>
-    </p:extLst>
   </p:cSld>
   <p:clrMapOvr>
     <a:masterClrMapping/>
@@ -19430,13 +20312,225 @@
       </p:grpSpPr>
       <p:pic>
         <p:nvPicPr>
-          <p:cNvPr id="3" name="Рисунок 2">
-            <a:extLst>
-              <a:ext uri="{FF2B5EF4-FFF2-40B4-BE49-F238E27FC236}">
-                <a16:creationId xmlns:a16="http://schemas.microsoft.com/office/drawing/2014/main" xmlns="" id="{4F9C59AF-7B85-FDEB-57D9-0C700C3345BD}"/>
-              </a:ext>
-            </a:extLst>
-          </p:cNvPr>
+          <p:cNvPr id="3" name="Рисунок 2"/>
+          <p:cNvPicPr>
+            <a:picLocks noChangeAspect="1"/>
+          </p:cNvPicPr>
+          <p:nvPr/>
+        </p:nvPicPr>
+        <p:blipFill>
+          <a:blip r:embed="rId1"/>
+          <a:stretch>
+            <a:fillRect/>
+          </a:stretch>
+        </p:blipFill>
+        <p:spPr>
+          <a:xfrm>
+            <a:off x="0" y="0"/>
+            <a:ext cx="12368696" cy="6858000"/>
+          </a:xfrm>
+          <a:prstGeom prst="rect">
+            <a:avLst/>
+          </a:prstGeom>
+        </p:spPr>
+      </p:pic>
+      <p:sp>
+        <p:nvSpPr>
+          <p:cNvPr id="5" name="TextBox 4"/>
+          <p:cNvSpPr txBox="1"/>
+          <p:nvPr/>
+        </p:nvSpPr>
+        <p:spPr>
+          <a:xfrm>
+            <a:off x="733055" y="1032562"/>
+            <a:ext cx="11334897" cy="4308872"/>
+          </a:xfrm>
+          <a:prstGeom prst="rect">
+            <a:avLst/>
+          </a:prstGeom>
+          <a:noFill/>
+        </p:spPr>
+        <p:txBody>
+          <a:bodyPr wrap="square" rtlCol="0">
+            <a:spAutoFit/>
+          </a:bodyPr>
+          <a:lstStyle/>
+          <a:p>
+            <a:r>
+              <a:rPr lang="ru-RU" b="1" dirty="0">
+                <a:solidFill>
+                  <a:schemeClr val="bg1"/>
+                </a:solidFill>
+                <a:latin typeface="Manrope" pitchFamily="2" charset="0"/>
+                <a:cs typeface="Calibri" panose="020F0502020204030204" pitchFamily="34" charset="0"/>
+              </a:rPr>
+              <a:t>Центрально-азиатский </a:t>
+            </a:r>
+            <a:r>
+              <a:rPr lang="ru-RU" b="1" dirty="0">
+                <a:solidFill>
+                  <a:schemeClr val="bg1"/>
+                </a:solidFill>
+                <a:cs typeface="Calibri" panose="020F0502020204030204" pitchFamily="34" charset="0"/>
+              </a:rPr>
+              <a:t>климатический фонд</a:t>
+            </a:r>
+            <a:br>
+              <a:rPr lang="ru-RU" b="1" dirty="0">
+                <a:solidFill>
+                  <a:schemeClr val="bg1"/>
+                </a:solidFill>
+                <a:cs typeface="Calibri" panose="020F0502020204030204" pitchFamily="34" charset="0"/>
+              </a:rPr>
+            </a:br>
+            <a:r>
+              <a:rPr lang="ru-RU" b="1" dirty="0">
+                <a:solidFill>
+                  <a:schemeClr val="bg1"/>
+                </a:solidFill>
+                <a:cs typeface="Calibri" panose="020F0502020204030204" pitchFamily="34" charset="0"/>
+              </a:rPr>
+              <a:t>Проектный офис для Центральной Азии </a:t>
+            </a:r>
+            <a:endParaRPr lang="ru-RU" b="1" dirty="0">
+              <a:solidFill>
+                <a:schemeClr val="bg1"/>
+              </a:solidFill>
+              <a:cs typeface="Calibri" panose="020F0502020204030204" pitchFamily="34" charset="0"/>
+            </a:endParaRPr>
+          </a:p>
+          <a:p>
+            <a:r>
+              <a:rPr lang="ru-RU" b="1" dirty="0">
+                <a:solidFill>
+                  <a:schemeClr val="bg1"/>
+                </a:solidFill>
+                <a:cs typeface="Calibri" panose="020F0502020204030204" pitchFamily="34" charset="0"/>
+              </a:rPr>
+              <a:t>по изменению климата и зеленой энергетике</a:t>
+            </a:r>
+            <a:endParaRPr lang="ru-RU" b="1" dirty="0">
+              <a:solidFill>
+                <a:schemeClr val="bg1"/>
+              </a:solidFill>
+              <a:cs typeface="Calibri" panose="020F0502020204030204" pitchFamily="34" charset="0"/>
+            </a:endParaRPr>
+          </a:p>
+          <a:p>
+            <a:endParaRPr lang="ru-RU" sz="2400" b="1" dirty="0">
+              <a:solidFill>
+                <a:schemeClr val="bg1"/>
+              </a:solidFill>
+              <a:cs typeface="Calibri" panose="020F0502020204030204" pitchFamily="34" charset="0"/>
+            </a:endParaRPr>
+          </a:p>
+          <a:p>
+            <a:pPr algn="ctr"/>
+            <a:endParaRPr lang="ru-RU" sz="2800" b="1" dirty="0">
+              <a:solidFill>
+                <a:schemeClr val="bg1"/>
+              </a:solidFill>
+              <a:cs typeface="Calibri" panose="020F0502020204030204" pitchFamily="34" charset="0"/>
+            </a:endParaRPr>
+          </a:p>
+          <a:p>
+            <a:r>
+              <a:rPr lang="ru-RU" sz="2800" b="1" dirty="0">
+                <a:solidFill>
+                  <a:schemeClr val="bg1"/>
+                </a:solidFill>
+                <a:cs typeface="Calibri" panose="020F0502020204030204" pitchFamily="34" charset="0"/>
+              </a:rPr>
+              <a:t>ВЫСОКИЙ УПОЛНОМОЧЕННЫЙ </a:t>
+            </a:r>
+            <a:br>
+              <a:rPr lang="ru-RU" sz="2800" b="1" dirty="0">
+                <a:solidFill>
+                  <a:schemeClr val="bg1"/>
+                </a:solidFill>
+                <a:cs typeface="Calibri" panose="020F0502020204030204" pitchFamily="34" charset="0"/>
+              </a:rPr>
+            </a:br>
+            <a:r>
+              <a:rPr lang="ru-RU" sz="2800" b="1" dirty="0">
+                <a:solidFill>
+                  <a:schemeClr val="bg1"/>
+                </a:solidFill>
+                <a:cs typeface="Calibri" panose="020F0502020204030204" pitchFamily="34" charset="0"/>
+              </a:rPr>
+              <a:t>СОВЕТ ПО ЗЕЛЕНОМУ ПЕРЕХОДУ </a:t>
+            </a:r>
+            <a:br>
+              <a:rPr lang="ru-RU" sz="2800" b="1" dirty="0">
+                <a:solidFill>
+                  <a:schemeClr val="bg1"/>
+                </a:solidFill>
+                <a:cs typeface="Calibri" panose="020F0502020204030204" pitchFamily="34" charset="0"/>
+              </a:rPr>
+            </a:br>
+            <a:br>
+              <a:rPr lang="ru-RU" sz="2800" b="1" dirty="0">
+                <a:solidFill>
+                  <a:schemeClr val="bg1"/>
+                </a:solidFill>
+                <a:cs typeface="Calibri" panose="020F0502020204030204" pitchFamily="34" charset="0"/>
+              </a:rPr>
+            </a:br>
+            <a:r>
+              <a:rPr lang="ru-RU" sz="2800" b="1" dirty="0" err="1">
+                <a:solidFill>
+                  <a:schemeClr val="bg1"/>
+                </a:solidFill>
+                <a:cs typeface="Calibri" panose="020F0502020204030204" pitchFamily="34" charset="0"/>
+              </a:rPr>
+              <a:t>ORF’s</a:t>
+            </a:r>
+            <a:r>
+              <a:rPr lang="ru-RU" sz="2800" b="1" dirty="0">
+                <a:solidFill>
+                  <a:schemeClr val="bg1"/>
+                </a:solidFill>
+                <a:cs typeface="Calibri" panose="020F0502020204030204" pitchFamily="34" charset="0"/>
+              </a:rPr>
+              <a:t> HIGH-LEVEL EMPOWERED </a:t>
+            </a:r>
+            <a:br>
+              <a:rPr lang="ru-RU" sz="2800" b="1" dirty="0">
+                <a:solidFill>
+                  <a:schemeClr val="bg1"/>
+                </a:solidFill>
+                <a:cs typeface="Calibri" panose="020F0502020204030204" pitchFamily="34" charset="0"/>
+              </a:rPr>
+            </a:br>
+            <a:r>
+              <a:rPr lang="ru-RU" sz="2800" b="1" dirty="0">
+                <a:solidFill>
+                  <a:schemeClr val="bg1"/>
+                </a:solidFill>
+                <a:cs typeface="Calibri" panose="020F0502020204030204" pitchFamily="34" charset="0"/>
+              </a:rPr>
+              <a:t>BOARD ON GREEN TRANSITION) </a:t>
+            </a:r>
+            <a:endParaRPr lang="ru-RU" sz="2800" b="1" dirty="0">
+              <a:solidFill>
+                <a:schemeClr val="bg1"/>
+              </a:solidFill>
+              <a:cs typeface="Calibri" panose="020F0502020204030204" pitchFamily="34" charset="0"/>
+            </a:endParaRPr>
+          </a:p>
+          <a:p>
+            <a:endParaRPr lang="ru-RU" sz="2800" b="1" dirty="0">
+              <a:solidFill>
+                <a:schemeClr val="bg1"/>
+              </a:solidFill>
+              <a:cs typeface="Calibri" panose="020F0502020204030204" pitchFamily="34" charset="0"/>
+            </a:endParaRPr>
+          </a:p>
+        </p:txBody>
+      </p:sp>
+      <p:pic>
+        <p:nvPicPr>
+          <p:cNvPr id="8" name="Рисунок 7"/>
           <p:cNvPicPr>
             <a:picLocks noChangeAspect="1"/>
           </p:cNvPicPr>
@@ -19450,227 +20544,6 @@
         </p:blipFill>
         <p:spPr>
           <a:xfrm>
-            <a:off x="0" y="0"/>
-            <a:ext cx="12368696" cy="6858000"/>
-          </a:xfrm>
-          <a:prstGeom prst="rect">
-            <a:avLst/>
-          </a:prstGeom>
-        </p:spPr>
-      </p:pic>
-      <p:sp>
-        <p:nvSpPr>
-          <p:cNvPr id="5" name="TextBox 4">
-            <a:extLst>
-              <a:ext uri="{FF2B5EF4-FFF2-40B4-BE49-F238E27FC236}">
-                <a16:creationId xmlns:a16="http://schemas.microsoft.com/office/drawing/2014/main" xmlns="" id="{0B4072C1-957B-5BBE-2D8B-EF24ED2C184A}"/>
-              </a:ext>
-            </a:extLst>
-          </p:cNvPr>
-          <p:cNvSpPr txBox="1"/>
-          <p:nvPr/>
-        </p:nvSpPr>
-        <p:spPr>
-          <a:xfrm>
-            <a:off x="733055" y="1032562"/>
-            <a:ext cx="11334897" cy="4308872"/>
-          </a:xfrm>
-          <a:prstGeom prst="rect">
-            <a:avLst/>
-          </a:prstGeom>
-          <a:noFill/>
-        </p:spPr>
-        <p:txBody>
-          <a:bodyPr wrap="square" rtlCol="0">
-            <a:spAutoFit/>
-          </a:bodyPr>
-          <a:lstStyle/>
-          <a:p>
-            <a:r>
-              <a:rPr lang="ru-RU" b="1" dirty="0">
-                <a:solidFill>
-                  <a:schemeClr val="bg1"/>
-                </a:solidFill>
-                <a:latin typeface="Manrope" pitchFamily="2" charset="0"/>
-                <a:cs typeface="Calibri" panose="020F0502020204030204" pitchFamily="34" charset="0"/>
-              </a:rPr>
-              <a:t>Центрально-азиатский </a:t>
-            </a:r>
-            <a:r>
-              <a:rPr lang="ru-RU" b="1" dirty="0">
-                <a:solidFill>
-                  <a:schemeClr val="bg1"/>
-                </a:solidFill>
-                <a:cs typeface="Calibri" panose="020F0502020204030204" pitchFamily="34" charset="0"/>
-              </a:rPr>
-              <a:t>климатический фонд</a:t>
-            </a:r>
-            <a:br>
-              <a:rPr lang="ru-RU" b="1" dirty="0">
-                <a:solidFill>
-                  <a:schemeClr val="bg1"/>
-                </a:solidFill>
-                <a:cs typeface="Calibri" panose="020F0502020204030204" pitchFamily="34" charset="0"/>
-              </a:rPr>
-            </a:br>
-            <a:r>
-              <a:rPr lang="ru-RU" b="1" dirty="0">
-                <a:solidFill>
-                  <a:schemeClr val="bg1"/>
-                </a:solidFill>
-                <a:cs typeface="Calibri" panose="020F0502020204030204" pitchFamily="34" charset="0"/>
-              </a:rPr>
-              <a:t>Проектный офис для Центральной Азии </a:t>
-            </a:r>
-          </a:p>
-          <a:p>
-            <a:r>
-              <a:rPr lang="ru-RU" b="1" dirty="0">
-                <a:solidFill>
-                  <a:schemeClr val="bg1"/>
-                </a:solidFill>
-                <a:cs typeface="Calibri" panose="020F0502020204030204" pitchFamily="34" charset="0"/>
-              </a:rPr>
-              <a:t>по изменению климата и зеленой энергетике</a:t>
-            </a:r>
-          </a:p>
-          <a:p>
-            <a:endParaRPr lang="ru-RU" sz="2400" b="1" dirty="0">
-              <a:solidFill>
-                <a:schemeClr val="bg1"/>
-              </a:solidFill>
-              <a:cs typeface="Calibri" panose="020F0502020204030204" pitchFamily="34" charset="0"/>
-            </a:endParaRPr>
-          </a:p>
-          <a:p>
-            <a:pPr algn="ctr"/>
-            <a:endParaRPr lang="ru-RU" sz="2800" b="1" dirty="0">
-              <a:solidFill>
-                <a:schemeClr val="bg1"/>
-              </a:solidFill>
-              <a:cs typeface="Calibri" panose="020F0502020204030204" pitchFamily="34" charset="0"/>
-            </a:endParaRPr>
-          </a:p>
-          <a:p>
-            <a:r>
-              <a:rPr lang="ru-RU" sz="2800" b="1" dirty="0">
-                <a:solidFill>
-                  <a:schemeClr val="bg1"/>
-                </a:solidFill>
-                <a:cs typeface="Calibri" panose="020F0502020204030204" pitchFamily="34" charset="0"/>
-              </a:rPr>
-              <a:t>ВЫСОКИЙ УПОЛНОМОЧЕННЫЙ </a:t>
-            </a:r>
-            <a:br>
-              <a:rPr lang="ru-RU" sz="2800" b="1" dirty="0">
-                <a:solidFill>
-                  <a:schemeClr val="bg1"/>
-                </a:solidFill>
-                <a:cs typeface="Calibri" panose="020F0502020204030204" pitchFamily="34" charset="0"/>
-              </a:rPr>
-            </a:br>
-            <a:r>
-              <a:rPr lang="ru-RU" sz="2800" b="1" dirty="0">
-                <a:solidFill>
-                  <a:schemeClr val="bg1"/>
-                </a:solidFill>
-                <a:cs typeface="Calibri" panose="020F0502020204030204" pitchFamily="34" charset="0"/>
-              </a:rPr>
-              <a:t>СОВЕТ ПО ЗЕЛЕНОМУ ПЕРЕХОДУ </a:t>
-            </a:r>
-            <a:br>
-              <a:rPr lang="ru-RU" sz="2800" b="1" dirty="0">
-                <a:solidFill>
-                  <a:schemeClr val="bg1"/>
-                </a:solidFill>
-                <a:cs typeface="Calibri" panose="020F0502020204030204" pitchFamily="34" charset="0"/>
-              </a:rPr>
-            </a:br>
-            <a:r>
-              <a:rPr lang="ru-RU" sz="2800" b="1" dirty="0">
-                <a:solidFill>
-                  <a:schemeClr val="bg1"/>
-                </a:solidFill>
-                <a:cs typeface="Calibri" panose="020F0502020204030204" pitchFamily="34" charset="0"/>
-              </a:rPr>
-              <a:t/>
-            </a:r>
-            <a:br>
-              <a:rPr lang="ru-RU" sz="2800" b="1" dirty="0">
-                <a:solidFill>
-                  <a:schemeClr val="bg1"/>
-                </a:solidFill>
-                <a:cs typeface="Calibri" panose="020F0502020204030204" pitchFamily="34" charset="0"/>
-              </a:rPr>
-            </a:br>
-            <a:r>
-              <a:rPr lang="ru-RU" sz="2800" b="1" dirty="0" err="1">
-                <a:solidFill>
-                  <a:schemeClr val="bg1"/>
-                </a:solidFill>
-                <a:cs typeface="Calibri" panose="020F0502020204030204" pitchFamily="34" charset="0"/>
-              </a:rPr>
-              <a:t>ORF’s</a:t>
-            </a:r>
-            <a:r>
-              <a:rPr lang="ru-RU" sz="2800" b="1" dirty="0">
-                <a:solidFill>
-                  <a:schemeClr val="bg1"/>
-                </a:solidFill>
-                <a:cs typeface="Calibri" panose="020F0502020204030204" pitchFamily="34" charset="0"/>
-              </a:rPr>
-              <a:t> HIGH-LEVEL EMPOWERED </a:t>
-            </a:r>
-            <a:br>
-              <a:rPr lang="ru-RU" sz="2800" b="1" dirty="0">
-                <a:solidFill>
-                  <a:schemeClr val="bg1"/>
-                </a:solidFill>
-                <a:cs typeface="Calibri" panose="020F0502020204030204" pitchFamily="34" charset="0"/>
-              </a:rPr>
-            </a:br>
-            <a:r>
-              <a:rPr lang="ru-RU" sz="2800" b="1" dirty="0">
-                <a:solidFill>
-                  <a:schemeClr val="bg1"/>
-                </a:solidFill>
-                <a:cs typeface="Calibri" panose="020F0502020204030204" pitchFamily="34" charset="0"/>
-              </a:rPr>
-              <a:t>BOARD ON GREEN TRANSITION) </a:t>
-            </a:r>
-          </a:p>
-          <a:p>
-            <a:endParaRPr lang="ru-RU" sz="2800" b="1" dirty="0">
-              <a:solidFill>
-                <a:schemeClr val="bg1"/>
-              </a:solidFill>
-              <a:cs typeface="Calibri" panose="020F0502020204030204" pitchFamily="34" charset="0"/>
-            </a:endParaRPr>
-          </a:p>
-        </p:txBody>
-      </p:sp>
-      <p:pic>
-        <p:nvPicPr>
-          <p:cNvPr id="8" name="Рисунок 7">
-            <a:extLst>
-              <a:ext uri="{FF2B5EF4-FFF2-40B4-BE49-F238E27FC236}">
-                <a16:creationId xmlns:a16="http://schemas.microsoft.com/office/drawing/2014/main" xmlns="" id="{51C0053B-F6D3-EC53-8797-BA61435519EA}"/>
-              </a:ext>
-            </a:extLst>
-          </p:cNvPr>
-          <p:cNvPicPr>
-            <a:picLocks noChangeAspect="1"/>
-          </p:cNvPicPr>
-          <p:nvPr/>
-        </p:nvPicPr>
-        <p:blipFill>
-          <a:blip r:embed="rId3"/>
-          <a:stretch>
-            <a:fillRect/>
-          </a:stretch>
-        </p:blipFill>
-        <p:spPr>
-          <a:xfrm>
             <a:off x="9851113" y="303599"/>
             <a:ext cx="2340887" cy="956791"/>
           </a:xfrm>
@@ -19680,11 +20553,6 @@
         </p:spPr>
       </p:pic>
     </p:spTree>
-    <p:extLst>
-      <p:ext uri="{BB962C8B-B14F-4D97-AF65-F5344CB8AC3E}">
-        <p14:creationId xmlns:p14="http://schemas.microsoft.com/office/powerpoint/2010/main" val="3251686260"/>
-      </p:ext>
-    </p:extLst>
   </p:cSld>
   <p:clrMapOvr>
     <a:masterClrMapping/>
@@ -19711,24 +20579,18 @@
       </p:grpSpPr>
       <p:pic>
         <p:nvPicPr>
-          <p:cNvPr id="6" name="Рисунок 5">
-            <a:extLst>
-              <a:ext uri="{FF2B5EF4-FFF2-40B4-BE49-F238E27FC236}">
-                <a16:creationId xmlns:a16="http://schemas.microsoft.com/office/drawing/2014/main" xmlns="" id="{F7D30E5B-D4DD-C192-B5E2-CA1114F972C9}"/>
-              </a:ext>
-            </a:extLst>
-          </p:cNvPr>
+          <p:cNvPr id="6" name="Рисунок 5"/>
           <p:cNvPicPr>
             <a:picLocks noChangeAspect="1"/>
           </p:cNvPicPr>
           <p:nvPr/>
         </p:nvPicPr>
         <p:blipFill>
-          <a:blip r:embed="rId2">
+          <a:blip r:embed="rId1">
             <a:extLst>
               <a:ext uri="{BEBA8EAE-BF5A-486C-A8C5-ECC9F3942E4B}">
                 <a14:imgProps xmlns:a14="http://schemas.microsoft.com/office/drawing/2010/main">
-                  <a14:imgLayer r:embed="rId3">
+                  <a14:imgLayer r:embed="rId8">
                     <a14:imgEffect>
                       <a14:brightnessContrast bright="40000"/>
                     </a14:imgEffect>
@@ -19754,13 +20616,7 @@
       </p:pic>
       <p:sp>
         <p:nvSpPr>
-          <p:cNvPr id="2" name="Прямоугольник с двумя скругленными соседними углами 1">
-            <a:extLst>
-              <a:ext uri="{FF2B5EF4-FFF2-40B4-BE49-F238E27FC236}">
-                <a16:creationId xmlns:a16="http://schemas.microsoft.com/office/drawing/2014/main" xmlns="" id="{35FFB220-8AF8-C968-D573-382BCC2BD6B5}"/>
-              </a:ext>
-            </a:extLst>
-          </p:cNvPr>
+          <p:cNvPr id="2" name="Прямоугольник с двумя скругленными соседними углами 1"/>
           <p:cNvSpPr/>
           <p:nvPr/>
         </p:nvSpPr>
@@ -19807,13 +20663,7 @@
       </p:sp>
       <p:sp>
         <p:nvSpPr>
-          <p:cNvPr id="3" name="TextBox 2">
-            <a:extLst>
-              <a:ext uri="{FF2B5EF4-FFF2-40B4-BE49-F238E27FC236}">
-                <a16:creationId xmlns:a16="http://schemas.microsoft.com/office/drawing/2014/main" xmlns="" id="{4CD7BB57-4D4A-5DF0-D8AB-3398134D5A4F}"/>
-              </a:ext>
-            </a:extLst>
-          </p:cNvPr>
+          <p:cNvPr id="3" name="TextBox 2"/>
           <p:cNvSpPr txBox="1"/>
           <p:nvPr/>
         </p:nvSpPr>
@@ -19840,8 +20690,6 @@
                   <a:schemeClr val="bg1"/>
                 </a:solidFill>
               </a:rPr>
-              <a:pPr algn="r"/>
-              <a:t>8</a:t>
             </a:fld>
             <a:endParaRPr lang="ru-RU" dirty="0">
               <a:solidFill>
@@ -19853,20 +20701,14 @@
       </p:sp>
       <p:pic>
         <p:nvPicPr>
-          <p:cNvPr id="5" name="Рисунок 4">
-            <a:extLst>
-              <a:ext uri="{FF2B5EF4-FFF2-40B4-BE49-F238E27FC236}">
-                <a16:creationId xmlns:a16="http://schemas.microsoft.com/office/drawing/2014/main" xmlns="" id="{B848484B-BC97-1E39-6C99-598943CDE8D2}"/>
-              </a:ext>
-            </a:extLst>
-          </p:cNvPr>
+          <p:cNvPr id="5" name="Рисунок 4"/>
           <p:cNvPicPr>
             <a:picLocks noChangeAspect="1"/>
           </p:cNvPicPr>
           <p:nvPr/>
         </p:nvPicPr>
         <p:blipFill>
-          <a:blip r:embed="rId4">
+          <a:blip r:embed="rId3">
             <a:duotone>
               <a:schemeClr val="accent1">
                 <a:shade val="45000"/>
@@ -19877,7 +20719,7 @@
             <a:extLst>
               <a:ext uri="{BEBA8EAE-BF5A-486C-A8C5-ECC9F3942E4B}">
                 <a14:imgProps xmlns:a14="http://schemas.microsoft.com/office/drawing/2010/main">
-                  <a14:imgLayer r:embed="rId5">
+                  <a14:imgLayer r:embed="rId4">
                     <a14:imgEffect>
                       <a14:saturation sat="0"/>
                     </a14:imgEffect>
@@ -19902,13 +20744,7 @@
       </p:pic>
       <p:cxnSp>
         <p:nvCxnSpPr>
-          <p:cNvPr id="13" name="Прямая соединительная линия 12">
-            <a:extLst>
-              <a:ext uri="{FF2B5EF4-FFF2-40B4-BE49-F238E27FC236}">
-                <a16:creationId xmlns:a16="http://schemas.microsoft.com/office/drawing/2014/main" xmlns="" id="{0689EE3D-31BA-FA5B-9B79-87F32EB7F532}"/>
-              </a:ext>
-            </a:extLst>
-          </p:cNvPr>
+          <p:cNvPr id="13" name="Прямая соединительная линия 12"/>
           <p:cNvCxnSpPr/>
           <p:nvPr/>
         </p:nvCxnSpPr>
@@ -19943,13 +20779,7 @@
       </p:cxnSp>
       <p:sp>
         <p:nvSpPr>
-          <p:cNvPr id="14" name="TextBox 13">
-            <a:extLst>
-              <a:ext uri="{FF2B5EF4-FFF2-40B4-BE49-F238E27FC236}">
-                <a16:creationId xmlns:a16="http://schemas.microsoft.com/office/drawing/2014/main" xmlns="" id="{F6E5005C-7082-22F1-E131-484199F2F7FB}"/>
-              </a:ext>
-            </a:extLst>
-          </p:cNvPr>
+          <p:cNvPr id="14" name="TextBox 13"/>
           <p:cNvSpPr txBox="1"/>
           <p:nvPr/>
         </p:nvSpPr>
@@ -20058,18 +20888,19 @@
               </a:rPr>
               <a:t>) </a:t>
             </a:r>
-          </a:p>
-        </p:txBody>
-      </p:sp>
-      <p:sp>
-        <p:nvSpPr>
-          <p:cNvPr id="15" name="TextBox 14">
-            <a:extLst>
-              <a:ext uri="{FF2B5EF4-FFF2-40B4-BE49-F238E27FC236}">
-                <a16:creationId xmlns:a16="http://schemas.microsoft.com/office/drawing/2014/main" xmlns="" id="{F5AFB52B-6216-A102-6616-2B4BA0DD2C11}"/>
-              </a:ext>
-            </a:extLst>
-          </p:cNvPr>
+            <a:endParaRPr lang="ru-RU" sz="2000" b="1" dirty="0">
+              <a:solidFill>
+                <a:srgbClr val="156082"/>
+              </a:solidFill>
+              <a:latin typeface="Manrope" pitchFamily="2" charset="0"/>
+              <a:cs typeface="Calibri" panose="020F0502020204030204" pitchFamily="34" charset="0"/>
+            </a:endParaRPr>
+          </a:p>
+        </p:txBody>
+      </p:sp>
+      <p:sp>
+        <p:nvSpPr>
+          <p:cNvPr id="15" name="TextBox 14"/>
           <p:cNvSpPr txBox="1"/>
           <p:nvPr/>
         </p:nvSpPr>
@@ -20108,6 +20939,10 @@
               </a:rPr>
               <a:t> — один из ведущих международных аналитических центров Индии в сфере геоэкономики, устойчивого развития, климатической политики и диалога стран Глобального Юга.</a:t>
             </a:r>
+            <a:endParaRPr lang="ru-RU" sz="1600" dirty="0">
+              <a:latin typeface="Manrope Light" pitchFamily="2" charset="0"/>
+              <a:cs typeface="Calibri" panose="020F0502020204030204" pitchFamily="34" charset="0"/>
+            </a:endParaRPr>
           </a:p>
           <a:p>
             <a:pPr marL="285750" indent="-285750">
@@ -20138,6 +20973,10 @@
               </a:rPr>
               <a:t>международную стратегическую платформу по вопросам зеленого перехода, климатического финансирования и реформы многосторонних банков развития (MDB).</a:t>
             </a:r>
+            <a:endParaRPr lang="ru-RU" sz="1600" dirty="0">
+              <a:latin typeface="Manrope Light" pitchFamily="2" charset="0"/>
+              <a:cs typeface="Calibri" panose="020F0502020204030204" pitchFamily="34" charset="0"/>
+            </a:endParaRPr>
           </a:p>
           <a:p>
             <a:pPr marL="285750" indent="-285750">
@@ -20182,25 +21021,23 @@
               </a:rPr>
               <a:t>сопредседатель Независимой экспертной группы G20 по реформе многосторонних банков развития.</a:t>
             </a:r>
+            <a:endParaRPr lang="ru-RU" sz="1600" dirty="0">
+              <a:latin typeface="Manrope Light" pitchFamily="2" charset="0"/>
+              <a:cs typeface="Calibri" panose="020F0502020204030204" pitchFamily="34" charset="0"/>
+            </a:endParaRPr>
           </a:p>
         </p:txBody>
       </p:sp>
       <p:pic>
         <p:nvPicPr>
-          <p:cNvPr id="4" name="Рисунок 3">
-            <a:extLst>
-              <a:ext uri="{FF2B5EF4-FFF2-40B4-BE49-F238E27FC236}">
-                <a16:creationId xmlns:a16="http://schemas.microsoft.com/office/drawing/2014/main" xmlns="" id="{EC551E1A-9052-D36D-464D-B5EDE9E0A95C}"/>
-              </a:ext>
-            </a:extLst>
-          </p:cNvPr>
+          <p:cNvPr id="4" name="Рисунок 3"/>
           <p:cNvPicPr>
             <a:picLocks noChangeAspect="1"/>
           </p:cNvPicPr>
           <p:nvPr/>
         </p:nvPicPr>
         <p:blipFill>
-          <a:blip r:embed="rId6"/>
+          <a:blip r:embed="rId5"/>
           <a:stretch>
             <a:fillRect/>
           </a:stretch>
@@ -20241,13 +21078,7 @@
       </p:pic>
       <p:sp>
         <p:nvSpPr>
-          <p:cNvPr id="9" name="TextBox 8">
-            <a:extLst>
-              <a:ext uri="{FF2B5EF4-FFF2-40B4-BE49-F238E27FC236}">
-                <a16:creationId xmlns:a16="http://schemas.microsoft.com/office/drawing/2014/main" xmlns="" id="{C30DA7AF-2018-8059-977E-C55EA9FBD5BC}"/>
-              </a:ext>
-            </a:extLst>
-          </p:cNvPr>
+          <p:cNvPr id="9" name="TextBox 8"/>
           <p:cNvSpPr txBox="1"/>
           <p:nvPr/>
         </p:nvSpPr>
@@ -20279,6 +21110,10 @@
               </a:rPr>
               <a:t>Основные темы работы Совета:</a:t>
             </a:r>
+            <a:endParaRPr lang="ru-RU" sz="1600" b="1" dirty="0">
+              <a:latin typeface="Manrope" pitchFamily="2" charset="0"/>
+              <a:cs typeface="Calibri" panose="020F0502020204030204" pitchFamily="34" charset="0"/>
+            </a:endParaRPr>
           </a:p>
           <a:p>
             <a:pPr marL="285750" indent="-285750">
@@ -20295,6 +21130,10 @@
               </a:rPr>
               <a:t>климатическое финансирование;</a:t>
             </a:r>
+            <a:endParaRPr lang="ru-RU" sz="1600" dirty="0">
+              <a:latin typeface="Manrope Light" pitchFamily="2" charset="0"/>
+              <a:cs typeface="Calibri" panose="020F0502020204030204" pitchFamily="34" charset="0"/>
+            </a:endParaRPr>
           </a:p>
           <a:p>
             <a:pPr marL="285750" indent="-285750">
@@ -20311,6 +21150,10 @@
               </a:rPr>
               <a:t>реформа многосторонних банков развития;</a:t>
             </a:r>
+            <a:endParaRPr lang="ru-RU" sz="1600" dirty="0">
+              <a:latin typeface="Manrope Light" pitchFamily="2" charset="0"/>
+              <a:cs typeface="Calibri" panose="020F0502020204030204" pitchFamily="34" charset="0"/>
+            </a:endParaRPr>
           </a:p>
           <a:p>
             <a:pPr marL="285750" indent="-285750">
@@ -20327,6 +21170,10 @@
               </a:rPr>
               <a:t>привлечение частного капитала;</a:t>
             </a:r>
+            <a:endParaRPr lang="ru-RU" sz="1600" dirty="0">
+              <a:latin typeface="Manrope Light" pitchFamily="2" charset="0"/>
+              <a:cs typeface="Calibri" panose="020F0502020204030204" pitchFamily="34" charset="0"/>
+            </a:endParaRPr>
           </a:p>
           <a:p>
             <a:pPr marL="285750" indent="-285750">
@@ -20343,6 +21190,10 @@
               </a:rPr>
               <a:t>смешанное финансирование;</a:t>
             </a:r>
+            <a:endParaRPr lang="ru-RU" sz="1600" dirty="0">
+              <a:latin typeface="Manrope Light" pitchFamily="2" charset="0"/>
+              <a:cs typeface="Calibri" panose="020F0502020204030204" pitchFamily="34" charset="0"/>
+            </a:endParaRPr>
           </a:p>
           <a:p>
             <a:pPr marL="285750" indent="-285750">
@@ -20359,6 +21210,10 @@
               </a:rPr>
               <a:t>зеленый переход для стран Глобального Юга.</a:t>
             </a:r>
+            <a:endParaRPr lang="ru-RU" sz="1600" dirty="0">
+              <a:latin typeface="Manrope Light" pitchFamily="2" charset="0"/>
+              <a:cs typeface="Calibri" panose="020F0502020204030204" pitchFamily="34" charset="0"/>
+            </a:endParaRPr>
           </a:p>
           <a:p>
             <a:pPr marL="285750" indent="-285750">
@@ -20375,25 +21230,23 @@
               </a:rPr>
               <a:t>Мандат Совета на 2 года и включает подготовку стратегических рекомендаций, экспертных консультаций и развитие международного сотрудничества в сфере устойчивого развития.</a:t>
             </a:r>
+            <a:endParaRPr lang="ru-RU" sz="1600" dirty="0">
+              <a:latin typeface="Manrope Light" pitchFamily="2" charset="0"/>
+              <a:cs typeface="Calibri" panose="020F0502020204030204" pitchFamily="34" charset="0"/>
+            </a:endParaRPr>
           </a:p>
         </p:txBody>
       </p:sp>
       <p:pic>
         <p:nvPicPr>
-          <p:cNvPr id="8" name="Рисунок 7">
-            <a:extLst>
-              <a:ext uri="{FF2B5EF4-FFF2-40B4-BE49-F238E27FC236}">
-                <a16:creationId xmlns:a16="http://schemas.microsoft.com/office/drawing/2014/main" xmlns="" id="{081615E3-75C0-0BF9-5206-98DECE2DD358}"/>
-              </a:ext>
-            </a:extLst>
-          </p:cNvPr>
+          <p:cNvPr id="8" name="Рисунок 7"/>
           <p:cNvPicPr>
             <a:picLocks noChangeAspect="1"/>
           </p:cNvPicPr>
           <p:nvPr/>
         </p:nvPicPr>
         <p:blipFill>
-          <a:blip r:embed="rId7"/>
+          <a:blip r:embed="rId6"/>
           <a:stretch>
             <a:fillRect/>
           </a:stretch>
@@ -20409,11 +21262,6 @@
         </p:spPr>
       </p:pic>
     </p:spTree>
-    <p:extLst>
-      <p:ext uri="{BB962C8B-B14F-4D97-AF65-F5344CB8AC3E}">
-        <p14:creationId xmlns:p14="http://schemas.microsoft.com/office/powerpoint/2010/main" val="538943892"/>
-      </p:ext>
-    </p:extLst>
   </p:cSld>
   <p:clrMapOvr>
     <a:masterClrMapping/>
@@ -20497,10 +21345,16 @@
                 <a:solidFill>
                   <a:srgbClr val="156082"/>
                 </a:solidFill>
-                <a:latin typeface="Calibri"/>
+                <a:latin typeface="Calibri" panose="020F0502020204030204"/>
               </a:rPr>
               <a:t>Н.К. Сингх — Председатель</a:t>
             </a:r>
+            <a:endParaRPr lang="ru-RU" b="1" i="0" dirty="0">
+              <a:solidFill>
+                <a:srgbClr val="156082"/>
+              </a:solidFill>
+              <a:latin typeface="Calibri" panose="020F0502020204030204"/>
+            </a:endParaRPr>
           </a:p>
           <a:p>
             <a:pPr algn="l"/>
@@ -20509,7 +21363,7 @@
                 <a:solidFill>
                   <a:srgbClr val="156082"/>
                 </a:solidFill>
-                <a:latin typeface="Calibri"/>
+                <a:latin typeface="Calibri" panose="020F0502020204030204"/>
               </a:rPr>
               <a:t>Глава 15-й </a:t>
             </a:r>
@@ -20518,7 +21372,7 @@
                 <a:solidFill>
                   <a:srgbClr val="156082"/>
                 </a:solidFill>
-                <a:latin typeface="Calibri"/>
+                <a:latin typeface="Calibri" panose="020F0502020204030204"/>
               </a:rPr>
               <a:t>Финкомиссии</a:t>
             </a:r>
@@ -20527,10 +21381,16 @@
                 <a:solidFill>
                   <a:srgbClr val="156082"/>
                 </a:solidFill>
-                <a:latin typeface="Calibri"/>
+                <a:latin typeface="Calibri" panose="020F0502020204030204"/>
               </a:rPr>
               <a:t> Индии; соавтор «Тройной повестки» G20 по реформе банков развития.</a:t>
             </a:r>
+            <a:endParaRPr lang="ru-RU" sz="1200" b="0" i="0" dirty="0">
+              <a:solidFill>
+                <a:srgbClr val="156082"/>
+              </a:solidFill>
+              <a:latin typeface="Calibri" panose="020F0502020204030204"/>
+            </a:endParaRPr>
           </a:p>
         </p:txBody>
       </p:sp>
@@ -20564,10 +21424,16 @@
                 <a:solidFill>
                   <a:srgbClr val="156082"/>
                 </a:solidFill>
-                <a:latin typeface="Calibri"/>
+                <a:latin typeface="Calibri" panose="020F0502020204030204"/>
               </a:rPr>
               <a:t>Лорд Николас Стерн</a:t>
             </a:r>
+            <a:endParaRPr lang="ru-RU" b="1" i="0" dirty="0">
+              <a:solidFill>
+                <a:srgbClr val="156082"/>
+              </a:solidFill>
+              <a:latin typeface="Calibri" panose="020F0502020204030204"/>
+            </a:endParaRPr>
           </a:p>
           <a:p>
             <a:pPr algn="l"/>
@@ -20576,7 +21442,7 @@
                 <a:solidFill>
                   <a:srgbClr val="156082"/>
                 </a:solidFill>
-                <a:latin typeface="Calibri"/>
+                <a:latin typeface="Calibri" panose="020F0502020204030204"/>
               </a:rPr>
               <a:t>LSE / </a:t>
             </a:r>
@@ -20585,7 +21451,7 @@
                 <a:solidFill>
                   <a:srgbClr val="156082"/>
                 </a:solidFill>
-                <a:latin typeface="Calibri"/>
+                <a:latin typeface="Calibri" panose="020F0502020204030204"/>
               </a:rPr>
               <a:t>Grantham</a:t>
             </a:r>
@@ -20594,10 +21460,16 @@
                 <a:solidFill>
                   <a:srgbClr val="156082"/>
                 </a:solidFill>
-                <a:latin typeface="Calibri"/>
+                <a:latin typeface="Calibri" panose="020F0502020204030204"/>
               </a:rPr>
               <a:t> Research Institute; автор «Обзора Стерна» по экономике климата.</a:t>
             </a:r>
+            <a:endParaRPr lang="ru-RU" sz="1200" b="0" i="0" dirty="0">
+              <a:solidFill>
+                <a:srgbClr val="156082"/>
+              </a:solidFill>
+              <a:latin typeface="Calibri" panose="020F0502020204030204"/>
+            </a:endParaRPr>
           </a:p>
         </p:txBody>
       </p:sp>
@@ -20631,10 +21503,16 @@
                 <a:solidFill>
                   <a:srgbClr val="156082"/>
                 </a:solidFill>
-                <a:latin typeface="Calibri"/>
+                <a:latin typeface="Calibri" panose="020F0502020204030204"/>
               </a:rPr>
               <a:t>Рэйчел Кайт</a:t>
             </a:r>
+            <a:endParaRPr lang="ru-RU" b="1" i="0" dirty="0">
+              <a:solidFill>
+                <a:srgbClr val="156082"/>
+              </a:solidFill>
+              <a:latin typeface="Calibri" panose="020F0502020204030204"/>
+            </a:endParaRPr>
           </a:p>
           <a:p>
             <a:pPr algn="l"/>
@@ -20643,7 +21521,7 @@
                 <a:solidFill>
                   <a:srgbClr val="156082"/>
                 </a:solidFill>
-                <a:latin typeface="Calibri"/>
+                <a:latin typeface="Calibri" panose="020F0502020204030204"/>
               </a:rPr>
               <a:t>Спецпредставитель Великобритании по климату; экс-вице-президент Всемирного банка, глава </a:t>
             </a:r>
@@ -20652,7 +21530,7 @@
                 <a:solidFill>
                   <a:srgbClr val="156082"/>
                 </a:solidFill>
-                <a:latin typeface="Calibri"/>
+                <a:latin typeface="Calibri" panose="020F0502020204030204"/>
               </a:rPr>
               <a:t>SEforALL</a:t>
             </a:r>
@@ -20661,10 +21539,16 @@
                 <a:solidFill>
                   <a:srgbClr val="156082"/>
                 </a:solidFill>
-                <a:latin typeface="Calibri"/>
+                <a:latin typeface="Calibri" panose="020F0502020204030204"/>
               </a:rPr>
               <a:t>.</a:t>
             </a:r>
+            <a:endParaRPr lang="ru-RU" sz="1200" b="0" i="0" dirty="0">
+              <a:solidFill>
+                <a:srgbClr val="156082"/>
+              </a:solidFill>
+              <a:latin typeface="Calibri" panose="020F0502020204030204"/>
+            </a:endParaRPr>
           </a:p>
         </p:txBody>
       </p:sp>
@@ -20698,7 +21582,7 @@
                 <a:solidFill>
                   <a:srgbClr val="156082"/>
                 </a:solidFill>
-                <a:latin typeface="Calibri"/>
+                <a:latin typeface="Calibri" panose="020F0502020204030204"/>
               </a:rPr>
               <a:t>Том </a:t>
             </a:r>
@@ -20707,7 +21591,7 @@
                 <a:solidFill>
                   <a:srgbClr val="156082"/>
                 </a:solidFill>
-                <a:latin typeface="Calibri"/>
+                <a:latin typeface="Calibri" panose="020F0502020204030204"/>
               </a:rPr>
               <a:t>Тугендхат</a:t>
             </a:r>
@@ -20715,7 +21599,7 @@
               <a:solidFill>
                 <a:srgbClr val="156082"/>
               </a:solidFill>
-              <a:latin typeface="Calibri"/>
+              <a:latin typeface="Calibri" panose="020F0502020204030204"/>
             </a:endParaRPr>
           </a:p>
           <a:p>
@@ -20725,10 +21609,16 @@
                 <a:solidFill>
                   <a:srgbClr val="156082"/>
                 </a:solidFill>
-                <a:latin typeface="Calibri"/>
+                <a:latin typeface="Calibri" panose="020F0502020204030204"/>
               </a:rPr>
               <a:t>Член парламента Великобритании; политика и надёжность поставок в зелёном переходе.</a:t>
             </a:r>
+            <a:endParaRPr lang="ru-RU" sz="1200" b="0" i="0" dirty="0">
+              <a:solidFill>
+                <a:srgbClr val="156082"/>
+              </a:solidFill>
+              <a:latin typeface="Calibri" panose="020F0502020204030204"/>
+            </a:endParaRPr>
           </a:p>
         </p:txBody>
       </p:sp>
@@ -20762,10 +21652,16 @@
                 <a:solidFill>
                   <a:srgbClr val="156082"/>
                 </a:solidFill>
-                <a:latin typeface="Calibri"/>
+                <a:latin typeface="Calibri" panose="020F0502020204030204"/>
               </a:rPr>
               <a:t>Андре Корреа ду Лагу — Президент COP30</a:t>
             </a:r>
+            <a:endParaRPr lang="ru-RU" b="1" i="0" dirty="0">
+              <a:solidFill>
+                <a:srgbClr val="156082"/>
+              </a:solidFill>
+              <a:latin typeface="Calibri" panose="020F0502020204030204"/>
+            </a:endParaRPr>
           </a:p>
           <a:p>
             <a:pPr algn="l"/>
@@ -20774,10 +21670,16 @@
                 <a:solidFill>
                   <a:srgbClr val="156082"/>
                 </a:solidFill>
-                <a:latin typeface="Calibri"/>
+                <a:latin typeface="Calibri" panose="020F0502020204030204"/>
               </a:rPr>
               <a:t>Климатическое финансирование и страновые платформы после Белена.</a:t>
             </a:r>
+            <a:endParaRPr lang="ru-RU" sz="1200" b="0" i="0" dirty="0">
+              <a:solidFill>
+                <a:srgbClr val="156082"/>
+              </a:solidFill>
+              <a:latin typeface="Calibri" panose="020F0502020204030204"/>
+            </a:endParaRPr>
           </a:p>
         </p:txBody>
       </p:sp>
@@ -20811,10 +21713,16 @@
                 <a:solidFill>
                   <a:srgbClr val="156082"/>
                 </a:solidFill>
-                <a:latin typeface="Calibri"/>
+                <a:latin typeface="Calibri" panose="020F0502020204030204"/>
               </a:rPr>
               <a:t>Сэр Масуд Ахмед</a:t>
             </a:r>
+            <a:endParaRPr lang="ru-RU" b="1" i="0" dirty="0">
+              <a:solidFill>
+                <a:srgbClr val="156082"/>
+              </a:solidFill>
+              <a:latin typeface="Calibri" panose="020F0502020204030204"/>
+            </a:endParaRPr>
           </a:p>
           <a:p>
             <a:pPr algn="l"/>
@@ -20823,7 +21731,7 @@
                 <a:solidFill>
                   <a:srgbClr val="156082"/>
                 </a:solidFill>
-                <a:latin typeface="Calibri"/>
+                <a:latin typeface="Calibri" panose="020F0502020204030204"/>
               </a:rPr>
               <a:t>Почётный президент Center </a:t>
             </a:r>
@@ -20832,7 +21740,7 @@
                 <a:solidFill>
                   <a:srgbClr val="156082"/>
                 </a:solidFill>
-                <a:latin typeface="Calibri"/>
+                <a:latin typeface="Calibri" panose="020F0502020204030204"/>
               </a:rPr>
               <a:t>for</a:t>
             </a:r>
@@ -20841,10 +21749,16 @@
                 <a:solidFill>
                   <a:srgbClr val="156082"/>
                 </a:solidFill>
-                <a:latin typeface="Calibri"/>
+                <a:latin typeface="Calibri" panose="020F0502020204030204"/>
               </a:rPr>
               <a:t> Global Development; экс-МВФ и DFID.</a:t>
             </a:r>
+            <a:endParaRPr lang="ru-RU" sz="1200" b="0" i="0" dirty="0">
+              <a:solidFill>
+                <a:srgbClr val="156082"/>
+              </a:solidFill>
+              <a:latin typeface="Calibri" panose="020F0502020204030204"/>
+            </a:endParaRPr>
           </a:p>
         </p:txBody>
       </p:sp>
@@ -20878,10 +21792,16 @@
                 <a:solidFill>
                   <a:srgbClr val="156082"/>
                 </a:solidFill>
-                <a:latin typeface="Calibri"/>
+                <a:latin typeface="Calibri" panose="020F0502020204030204"/>
               </a:rPr>
               <a:t>Самир Саран — Президент ORF</a:t>
             </a:r>
+            <a:endParaRPr lang="ru-RU" b="1" i="0" dirty="0">
+              <a:solidFill>
+                <a:srgbClr val="156082"/>
+              </a:solidFill>
+              <a:latin typeface="Calibri" panose="020F0502020204030204"/>
+            </a:endParaRPr>
           </a:p>
           <a:p>
             <a:pPr algn="l"/>
@@ -20890,7 +21810,7 @@
                 <a:solidFill>
                   <a:srgbClr val="156082"/>
                 </a:solidFill>
-                <a:latin typeface="Calibri"/>
+                <a:latin typeface="Calibri" panose="020F0502020204030204"/>
               </a:rPr>
               <a:t>Куратор </a:t>
             </a:r>
@@ -20899,7 +21819,7 @@
                 <a:solidFill>
                   <a:srgbClr val="156082"/>
                 </a:solidFill>
-                <a:latin typeface="Calibri"/>
+                <a:latin typeface="Calibri" panose="020F0502020204030204"/>
               </a:rPr>
               <a:t>Raisina</a:t>
             </a:r>
@@ -20908,7 +21828,7 @@
                 <a:solidFill>
                   <a:srgbClr val="156082"/>
                 </a:solidFill>
-                <a:latin typeface="Calibri"/>
+                <a:latin typeface="Calibri" panose="020F0502020204030204"/>
               </a:rPr>
               <a:t> </a:t>
             </a:r>
@@ -20917,7 +21837,7 @@
                 <a:solidFill>
                   <a:srgbClr val="156082"/>
                 </a:solidFill>
-                <a:latin typeface="Calibri"/>
+                <a:latin typeface="Calibri" panose="020F0502020204030204"/>
               </a:rPr>
               <a:t>Dialogue</a:t>
             </a:r>
@@ -20926,10 +21846,16 @@
                 <a:solidFill>
                   <a:srgbClr val="156082"/>
                 </a:solidFill>
-                <a:latin typeface="Calibri"/>
+                <a:latin typeface="Calibri" panose="020F0502020204030204"/>
               </a:rPr>
               <a:t>; сеть инвесторов Глобального Юга.</a:t>
             </a:r>
+            <a:endParaRPr lang="ru-RU" sz="1200" b="0" i="0" dirty="0">
+              <a:solidFill>
+                <a:srgbClr val="156082"/>
+              </a:solidFill>
+              <a:latin typeface="Calibri" panose="020F0502020204030204"/>
+            </a:endParaRPr>
           </a:p>
         </p:txBody>
       </p:sp>
@@ -20992,7 +21918,7 @@
                 <a:solidFill>
                   <a:srgbClr val="FFC000"/>
                 </a:solidFill>
-                <a:latin typeface="Calibri"/>
+                <a:latin typeface="Calibri" panose="020F0502020204030204"/>
               </a:rPr>
               <a:t>Ерлік</a:t>
             </a:r>
@@ -21001,7 +21927,7 @@
                 <a:solidFill>
                   <a:srgbClr val="FFC000"/>
                 </a:solidFill>
-                <a:latin typeface="Calibri"/>
+                <a:latin typeface="Calibri" panose="020F0502020204030204"/>
               </a:rPr>
               <a:t> Қаражан </a:t>
             </a:r>
@@ -21010,7 +21936,7 @@
                 <a:solidFill>
                   <a:srgbClr val="FFC000"/>
                 </a:solidFill>
-                <a:latin typeface="Calibri"/>
+                <a:latin typeface="Calibri" panose="020F0502020204030204"/>
               </a:rPr>
             </a:br>
             <a:r>
@@ -21018,7 +21944,7 @@
                 <a:solidFill>
                   <a:srgbClr val="FFFFFF"/>
                 </a:solidFill>
-                <a:latin typeface="Calibri"/>
+                <a:latin typeface="Calibri" panose="020F0502020204030204"/>
               </a:rPr>
               <a:t>Представитель Центральной Азии в Совете</a:t>
             </a:r>
@@ -21027,22 +21953,22 @@
                 <a:solidFill>
                   <a:srgbClr val="FFFFFF"/>
                 </a:solidFill>
-                <a:latin typeface="Calibri"/>
+                <a:latin typeface="Calibri" panose="020F0502020204030204"/>
               </a:rPr>
               <a:t>, генеральный директор Фонда климата Центральной Азии (CACF).</a:t>
             </a:r>
-          </a:p>
-        </p:txBody>
-      </p:sp>
-      <p:sp>
-        <p:nvSpPr>
-          <p:cNvPr id="3" name="Прямоугольник с двумя скругленными соседними углами 2">
-            <a:extLst>
-              <a:ext uri="{FF2B5EF4-FFF2-40B4-BE49-F238E27FC236}">
-                <a16:creationId xmlns:a16="http://schemas.microsoft.com/office/drawing/2014/main" xmlns="" id="{5FCD3824-A6AA-7E96-93D0-501F54935C59}"/>
-              </a:ext>
-            </a:extLst>
-          </p:cNvPr>
+            <a:endParaRPr lang="ru-RU" sz="1600" b="0" i="0" dirty="0">
+              <a:solidFill>
+                <a:srgbClr val="FFFFFF"/>
+              </a:solidFill>
+              <a:latin typeface="Calibri" panose="020F0502020204030204"/>
+            </a:endParaRPr>
+          </a:p>
+        </p:txBody>
+      </p:sp>
+      <p:sp>
+        <p:nvSpPr>
+          <p:cNvPr id="3" name="Прямоугольник с двумя скругленными соседними углами 2"/>
           <p:cNvSpPr/>
           <p:nvPr/>
         </p:nvSpPr>
@@ -21089,13 +22015,7 @@
       </p:sp>
       <p:sp>
         <p:nvSpPr>
-          <p:cNvPr id="4" name="TextBox 3">
-            <a:extLst>
-              <a:ext uri="{FF2B5EF4-FFF2-40B4-BE49-F238E27FC236}">
-                <a16:creationId xmlns:a16="http://schemas.microsoft.com/office/drawing/2014/main" xmlns="" id="{A8CE9E32-B962-4E98-14A0-8B0E293057AA}"/>
-              </a:ext>
-            </a:extLst>
-          </p:cNvPr>
+          <p:cNvPr id="4" name="TextBox 3"/>
           <p:cNvSpPr txBox="1"/>
           <p:nvPr/>
         </p:nvSpPr>
@@ -21122,8 +22042,6 @@
                   <a:schemeClr val="bg1"/>
                 </a:solidFill>
               </a:rPr>
-              <a:pPr algn="r"/>
-              <a:t>9</a:t>
             </a:fld>
             <a:endParaRPr lang="ru-RU" dirty="0">
               <a:solidFill>
@@ -21135,20 +22053,14 @@
       </p:sp>
       <p:pic>
         <p:nvPicPr>
-          <p:cNvPr id="5" name="Рисунок 4">
-            <a:extLst>
-              <a:ext uri="{FF2B5EF4-FFF2-40B4-BE49-F238E27FC236}">
-                <a16:creationId xmlns:a16="http://schemas.microsoft.com/office/drawing/2014/main" xmlns="" id="{927F85C6-D400-0799-D94A-72D8A6F600DF}"/>
-              </a:ext>
-            </a:extLst>
-          </p:cNvPr>
+          <p:cNvPr id="5" name="Рисунок 4"/>
           <p:cNvPicPr>
             <a:picLocks noChangeAspect="1"/>
           </p:cNvPicPr>
           <p:nvPr/>
         </p:nvPicPr>
         <p:blipFill>
-          <a:blip r:embed="rId2">
+          <a:blip r:embed="rId1">
             <a:duotone>
               <a:schemeClr val="accent1">
                 <a:shade val="45000"/>
@@ -21159,7 +22071,7 @@
             <a:extLst>
               <a:ext uri="{BEBA8EAE-BF5A-486C-A8C5-ECC9F3942E4B}">
                 <a14:imgProps xmlns:a14="http://schemas.microsoft.com/office/drawing/2010/main">
-                  <a14:imgLayer r:embed="rId3">
+                  <a14:imgLayer r:embed="rId2">
                     <a14:imgEffect>
                       <a14:saturation sat="0"/>
                     </a14:imgEffect>
@@ -21184,13 +22096,7 @@
       </p:pic>
       <p:cxnSp>
         <p:nvCxnSpPr>
-          <p:cNvPr id="6" name="Прямая соединительная линия 5">
-            <a:extLst>
-              <a:ext uri="{FF2B5EF4-FFF2-40B4-BE49-F238E27FC236}">
-                <a16:creationId xmlns:a16="http://schemas.microsoft.com/office/drawing/2014/main" xmlns="" id="{43BD834F-5E75-485B-717F-CB928EC3E2AE}"/>
-              </a:ext>
-            </a:extLst>
-          </p:cNvPr>
+          <p:cNvPr id="6" name="Прямая соединительная линия 5"/>
           <p:cNvCxnSpPr/>
           <p:nvPr/>
         </p:nvCxnSpPr>
@@ -21225,13 +22131,7 @@
       </p:cxnSp>
       <p:sp>
         <p:nvSpPr>
-          <p:cNvPr id="7" name="TextBox 6">
-            <a:extLst>
-              <a:ext uri="{FF2B5EF4-FFF2-40B4-BE49-F238E27FC236}">
-                <a16:creationId xmlns:a16="http://schemas.microsoft.com/office/drawing/2014/main" xmlns="" id="{AF8DD949-34B0-1055-26BA-514C164465AE}"/>
-              </a:ext>
-            </a:extLst>
-          </p:cNvPr>
+          <p:cNvPr id="7" name="TextBox 6"/>
           <p:cNvSpPr txBox="1"/>
           <p:nvPr/>
         </p:nvSpPr>
@@ -21340,18 +22240,19 @@
               </a:rPr>
               <a:t>) </a:t>
             </a:r>
-          </a:p>
-        </p:txBody>
-      </p:sp>
-      <p:sp>
-        <p:nvSpPr>
-          <p:cNvPr id="9" name="RR 48">
-            <a:extLst>
-              <a:ext uri="{FF2B5EF4-FFF2-40B4-BE49-F238E27FC236}">
-                <a16:creationId xmlns:a16="http://schemas.microsoft.com/office/drawing/2014/main" xmlns="" id="{CB6E2D82-F434-6298-EC4B-76A616A00C45}"/>
-              </a:ext>
-            </a:extLst>
-          </p:cNvPr>
+            <a:endParaRPr lang="ru-RU" sz="2000" b="1" dirty="0">
+              <a:solidFill>
+                <a:srgbClr val="156082"/>
+              </a:solidFill>
+              <a:latin typeface="Manrope" pitchFamily="2" charset="0"/>
+              <a:cs typeface="Calibri" panose="020F0502020204030204" pitchFamily="34" charset="0"/>
+            </a:endParaRPr>
+          </a:p>
+        </p:txBody>
+      </p:sp>
+      <p:sp>
+        <p:nvSpPr>
+          <p:cNvPr id="9" name="RR 48"/>
           <p:cNvSpPr/>
           <p:nvPr/>
         </p:nvSpPr>
@@ -21384,13 +22285,7 @@
       </p:sp>
       <p:sp>
         <p:nvSpPr>
-          <p:cNvPr id="10" name="TextBox 49">
-            <a:extLst>
-              <a:ext uri="{FF2B5EF4-FFF2-40B4-BE49-F238E27FC236}">
-                <a16:creationId xmlns:a16="http://schemas.microsoft.com/office/drawing/2014/main" xmlns="" id="{2FA3498C-D765-7C6E-94CA-BCA996261496}"/>
-              </a:ext>
-            </a:extLst>
-          </p:cNvPr>
+          <p:cNvPr id="10" name="TextBox 49"/>
           <p:cNvSpPr txBox="1"/>
           <p:nvPr/>
         </p:nvSpPr>
@@ -21414,7 +22309,7 @@
                 <a:solidFill>
                   <a:schemeClr val="bg1"/>
                 </a:solidFill>
-                <a:latin typeface="Calibri"/>
+                <a:latin typeface="Calibri" panose="020F0502020204030204"/>
               </a:rPr>
               <a:t>Голос региона на глобальной площадке | Экспертный вход и связи | PR и позиционирование </a:t>
             </a:r>
@@ -21423,7 +22318,7 @@
                 <a:solidFill>
                   <a:schemeClr val="bg1"/>
                 </a:solidFill>
-                <a:latin typeface="Calibri"/>
+                <a:latin typeface="Calibri" panose="020F0502020204030204"/>
               </a:rPr>
             </a:br>
             <a:r>
@@ -21431,7 +22326,7 @@
                 <a:solidFill>
                   <a:schemeClr val="bg1"/>
                 </a:solidFill>
-                <a:latin typeface="Calibri"/>
+                <a:latin typeface="Calibri" panose="020F0502020204030204"/>
               </a:rPr>
               <a:t>Доступ к </a:t>
             </a:r>
@@ -21440,7 +22335,7 @@
                 <a:solidFill>
                   <a:schemeClr val="bg1"/>
                 </a:solidFill>
-                <a:latin typeface="Calibri"/>
+                <a:latin typeface="Calibri" panose="020F0502020204030204"/>
               </a:rPr>
               <a:t>blended</a:t>
             </a:r>
@@ -21449,7 +22344,7 @@
                 <a:solidFill>
                   <a:schemeClr val="bg1"/>
                 </a:solidFill>
-                <a:latin typeface="Calibri"/>
+                <a:latin typeface="Calibri" panose="020F0502020204030204"/>
               </a:rPr>
               <a:t> </a:t>
             </a:r>
@@ -21458,7 +22353,7 @@
                 <a:solidFill>
                   <a:schemeClr val="bg1"/>
                 </a:solidFill>
-                <a:latin typeface="Calibri"/>
+                <a:latin typeface="Calibri" panose="020F0502020204030204"/>
               </a:rPr>
               <a:t>finance</a:t>
             </a:r>
@@ -21467,7 +22362,7 @@
                 <a:solidFill>
                   <a:schemeClr val="bg1"/>
                 </a:solidFill>
-                <a:latin typeface="Calibri"/>
+                <a:latin typeface="Calibri" panose="020F0502020204030204"/>
               </a:rPr>
               <a:t>, частному капиталу и экспертизе MDB для зелёных/переходных инструментов</a:t>
             </a:r>
@@ -21475,27 +22370,21 @@
               <a:solidFill>
                 <a:schemeClr val="bg1"/>
               </a:solidFill>
-              <a:latin typeface="Calibri"/>
+              <a:latin typeface="Calibri" panose="020F0502020204030204"/>
             </a:endParaRPr>
           </a:p>
         </p:txBody>
       </p:sp>
       <p:pic>
         <p:nvPicPr>
-          <p:cNvPr id="8" name="Рисунок 7">
-            <a:extLst>
-              <a:ext uri="{FF2B5EF4-FFF2-40B4-BE49-F238E27FC236}">
-                <a16:creationId xmlns:a16="http://schemas.microsoft.com/office/drawing/2014/main" xmlns="" id="{90D92AD2-EF4E-8EA4-7E1D-3F03A9AA862F}"/>
-              </a:ext>
-            </a:extLst>
-          </p:cNvPr>
+          <p:cNvPr id="8" name="Рисунок 7"/>
           <p:cNvPicPr>
             <a:picLocks noChangeAspect="1"/>
           </p:cNvPicPr>
           <p:nvPr/>
         </p:nvPicPr>
         <p:blipFill>
-          <a:blip r:embed="rId4"/>
+          <a:blip r:embed="rId3"/>
           <a:stretch>
             <a:fillRect/>
           </a:stretch>
@@ -21511,11 +22400,6 @@
         </p:spPr>
       </p:pic>
     </p:spTree>
-    <p:extLst>
-      <p:ext uri="{BB962C8B-B14F-4D97-AF65-F5344CB8AC3E}">
-        <p14:creationId xmlns:p14="http://schemas.microsoft.com/office/powerpoint/2010/main" val="2204415467"/>
-      </p:ext>
-    </p:extLst>
   </p:cSld>
   <p:clrMapOvr>
     <a:masterClrMapping/>
@@ -21795,7 +22679,6 @@
       </a:style>
     </a:lnDef>
   </a:objectDefaults>
-  <a:extraClrSchemeLst/>
   <a:extLst>
     <a:ext uri="{05A4C25C-085E-4340-85A3-A5531E510DB2}">
       <thm15:themeFamily xmlns:thm15="http://schemas.microsoft.com/office/thememl/2012/main" name="Office Theme" id="{62F939B6-93AF-4DB8-9C6B-D6C7DFDC589F}" vid="{4A3C46E8-61CC-4603-A589-7422A47A8E4A}"/>
@@ -22076,7 +22959,6 @@
       </a:style>
     </a:lnDef>
   </a:objectDefaults>
-  <a:extraClrSchemeLst/>
   <a:extLst>
     <a:ext uri="{05A4C25C-085E-4340-85A3-A5531E510DB2}">
       <thm15:themeFamily xmlns:thm15="http://schemas.microsoft.com/office/thememl/2012/main" name="Office Theme" id="{62F939B6-93AF-4DB8-9C6B-D6C7DFDC589F}" vid="{4A3C46E8-61CC-4603-A589-7422A47A8E4A}"/>
